--- a/exports/pptx/lessons/middle-module-08-yoga/day-03-five-asanas.pptx
+++ b/exports/pptx/lessons/middle-module-08-yoga/day-03-five-asanas.pptx
@@ -19,9 +19,16 @@
     <p:sldId id="267" r:id="rId13"/>
     <p:sldId id="268" r:id="rId14"/>
     <p:sldId id="269" r:id="rId15"/>
+    <p:sldId id="270" r:id="rId16"/>
+    <p:sldId id="271" r:id="rId17"/>
+    <p:sldId id="272" r:id="rId18"/>
+    <p:sldId id="273" r:id="rId19"/>
+    <p:sldId id="274" r:id="rId20"/>
+    <p:sldId id="275" r:id="rId21"/>
+    <p:sldId id="276" r:id="rId22"/>
   </p:sldIdLst>
   <p:notesMasterIdLst>
-    <p:notesMasterId r:id="rId16"/>
+    <p:notesMasterId r:id="rId23"/>
   </p:notesMasterIdLst>
   <p:sldSz cx="9144000" cy="5143500"/>
   <p:notesSz cx="5143500" cy="9144000"/>
@@ -997,6 +1004,446 @@
 </p:notes>
 </file>
 
+<file path=ppt/notesSlides/notesSlide15.xml><?xml version="1.0" encoding="utf-8"?>
+<p:notes xmlns:a="http://schemas.openxmlformats.org/drawingml/2006/main" xmlns:r="http://schemas.openxmlformats.org/officeDocument/2006/relationships" xmlns:p="http://schemas.openxmlformats.org/presentationml/2006/main">
+  <p:cSld>
+    <p:spTree>
+      <p:nvGrpSpPr>
+        <p:cNvPr id="1" name=""/>
+        <p:cNvGrpSpPr/>
+        <p:nvPr/>
+      </p:nvGrpSpPr>
+      <p:grpSpPr>
+        <a:xfrm>
+          <a:off x="0" y="0"/>
+          <a:ext cx="0" cy="0"/>
+          <a:chOff x="0" y="0"/>
+          <a:chExt cx="0" cy="0"/>
+        </a:xfrm>
+      </p:grpSpPr>
+      <p:sp>
+        <p:nvSpPr>
+          <p:cNvPr id="2" name="Slide Image Placeholder 1"/>
+          <p:cNvSpPr>
+            <a:spLocks noGrp="1" noRot="1" noChangeAspect="1"/>
+          </p:cNvSpPr>
+          <p:nvPr>
+            <p:ph type="sldImg"/>
+          </p:nvPr>
+        </p:nvSpPr>
+        <p:spPr/>
+      </p:sp>
+      <p:sp>
+        <p:nvSpPr>
+          <p:cNvPr id="3" name="Notes Placeholder 2"/>
+          <p:cNvSpPr>
+            <a:spLocks noGrp="1"/>
+          </p:cNvSpPr>
+          <p:nvPr>
+            <p:ph type="body" idx="1"/>
+          </p:nvPr>
+        </p:nvSpPr>
+        <p:spPr/>
+        <p:txBody>
+          <a:bodyPr/>
+          <a:lstStyle/>
+          <a:p>
+            <a:r>
+              <a:rPr lang="en-US" dirty="0"/>
+              <a:t/>
+            </a:r>
+            <a:endParaRPr lang="en-US" dirty="0"/>
+          </a:p>
+        </p:txBody>
+      </p:sp>
+      <p:sp>
+        <p:nvSpPr>
+          <p:cNvPr id="4" name="Slide Number Placeholder 3"/>
+          <p:cNvSpPr>
+            <a:spLocks noGrp="1"/>
+          </p:cNvSpPr>
+          <p:nvPr>
+            <p:ph type="sldNum" sz="quarter" idx="10"/>
+          </p:nvPr>
+        </p:nvSpPr>
+        <p:spPr/>
+        <p:txBody>
+          <a:bodyPr/>
+          <a:lstStyle/>
+          <a:p>
+            <a:fld id="{F7021451-1387-4CA6-816F-3879F97B5CBC}" type="slidenum">
+              <a:rPr lang="en-US"/>
+              <a:t>15</a:t>
+            </a:fld>
+            <a:endParaRPr lang="en-US"/>
+          </a:p>
+        </p:txBody>
+      </p:sp>
+    </p:spTree>
+    <p:extLst>
+      <p:ext uri="{BB962C8B-B14F-4D97-AF65-F5344CB8AC3E}">
+        <p14:creationId xmlns:p14="http://schemas.microsoft.com/office/powerpoint/2010/main" val="1024086991"/>
+      </p:ext>
+    </p:extLst>
+  </p:cSld>
+  <p:clrMapOvr>
+    <a:masterClrMapping/>
+  </p:clrMapOvr>
+</p:notes>
+</file>
+
+<file path=ppt/notesSlides/notesSlide16.xml><?xml version="1.0" encoding="utf-8"?>
+<p:notes xmlns:a="http://schemas.openxmlformats.org/drawingml/2006/main" xmlns:r="http://schemas.openxmlformats.org/officeDocument/2006/relationships" xmlns:p="http://schemas.openxmlformats.org/presentationml/2006/main">
+  <p:cSld>
+    <p:spTree>
+      <p:nvGrpSpPr>
+        <p:cNvPr id="1" name=""/>
+        <p:cNvGrpSpPr/>
+        <p:nvPr/>
+      </p:nvGrpSpPr>
+      <p:grpSpPr>
+        <a:xfrm>
+          <a:off x="0" y="0"/>
+          <a:ext cx="0" cy="0"/>
+          <a:chOff x="0" y="0"/>
+          <a:chExt cx="0" cy="0"/>
+        </a:xfrm>
+      </p:grpSpPr>
+      <p:sp>
+        <p:nvSpPr>
+          <p:cNvPr id="2" name="Slide Image Placeholder 1"/>
+          <p:cNvSpPr>
+            <a:spLocks noGrp="1" noRot="1" noChangeAspect="1"/>
+          </p:cNvSpPr>
+          <p:nvPr>
+            <p:ph type="sldImg"/>
+          </p:nvPr>
+        </p:nvSpPr>
+        <p:spPr/>
+      </p:sp>
+      <p:sp>
+        <p:nvSpPr>
+          <p:cNvPr id="3" name="Notes Placeholder 2"/>
+          <p:cNvSpPr>
+            <a:spLocks noGrp="1"/>
+          </p:cNvSpPr>
+          <p:nvPr>
+            <p:ph type="body" idx="1"/>
+          </p:nvPr>
+        </p:nvSpPr>
+        <p:spPr/>
+        <p:txBody>
+          <a:bodyPr/>
+          <a:lstStyle/>
+          <a:p>
+            <a:r>
+              <a:rPr lang="en-US" dirty="0"/>
+              <a:t/>
+            </a:r>
+            <a:endParaRPr lang="en-US" dirty="0"/>
+          </a:p>
+        </p:txBody>
+      </p:sp>
+      <p:sp>
+        <p:nvSpPr>
+          <p:cNvPr id="4" name="Slide Number Placeholder 3"/>
+          <p:cNvSpPr>
+            <a:spLocks noGrp="1"/>
+          </p:cNvSpPr>
+          <p:nvPr>
+            <p:ph type="sldNum" sz="quarter" idx="10"/>
+          </p:nvPr>
+        </p:nvSpPr>
+        <p:spPr/>
+        <p:txBody>
+          <a:bodyPr/>
+          <a:lstStyle/>
+          <a:p>
+            <a:fld id="{F7021451-1387-4CA6-816F-3879F97B5CBC}" type="slidenum">
+              <a:rPr lang="en-US"/>
+              <a:t>16</a:t>
+            </a:fld>
+            <a:endParaRPr lang="en-US"/>
+          </a:p>
+        </p:txBody>
+      </p:sp>
+    </p:spTree>
+    <p:extLst>
+      <p:ext uri="{BB962C8B-B14F-4D97-AF65-F5344CB8AC3E}">
+        <p14:creationId xmlns:p14="http://schemas.microsoft.com/office/powerpoint/2010/main" val="1024086991"/>
+      </p:ext>
+    </p:extLst>
+  </p:cSld>
+  <p:clrMapOvr>
+    <a:masterClrMapping/>
+  </p:clrMapOvr>
+</p:notes>
+</file>
+
+<file path=ppt/notesSlides/notesSlide17.xml><?xml version="1.0" encoding="utf-8"?>
+<p:notes xmlns:a="http://schemas.openxmlformats.org/drawingml/2006/main" xmlns:r="http://schemas.openxmlformats.org/officeDocument/2006/relationships" xmlns:p="http://schemas.openxmlformats.org/presentationml/2006/main">
+  <p:cSld>
+    <p:spTree>
+      <p:nvGrpSpPr>
+        <p:cNvPr id="1" name=""/>
+        <p:cNvGrpSpPr/>
+        <p:nvPr/>
+      </p:nvGrpSpPr>
+      <p:grpSpPr>
+        <a:xfrm>
+          <a:off x="0" y="0"/>
+          <a:ext cx="0" cy="0"/>
+          <a:chOff x="0" y="0"/>
+          <a:chExt cx="0" cy="0"/>
+        </a:xfrm>
+      </p:grpSpPr>
+      <p:sp>
+        <p:nvSpPr>
+          <p:cNvPr id="2" name="Slide Image Placeholder 1"/>
+          <p:cNvSpPr>
+            <a:spLocks noGrp="1" noRot="1" noChangeAspect="1"/>
+          </p:cNvSpPr>
+          <p:nvPr>
+            <p:ph type="sldImg"/>
+          </p:nvPr>
+        </p:nvSpPr>
+        <p:spPr/>
+      </p:sp>
+      <p:sp>
+        <p:nvSpPr>
+          <p:cNvPr id="3" name="Notes Placeholder 2"/>
+          <p:cNvSpPr>
+            <a:spLocks noGrp="1"/>
+          </p:cNvSpPr>
+          <p:nvPr>
+            <p:ph type="body" idx="1"/>
+          </p:nvPr>
+        </p:nvSpPr>
+        <p:spPr/>
+        <p:txBody>
+          <a:bodyPr/>
+          <a:lstStyle/>
+          <a:p>
+            <a:r>
+              <a:rPr lang="en-US" dirty="0"/>
+              <a:t/>
+            </a:r>
+            <a:endParaRPr lang="en-US" dirty="0"/>
+          </a:p>
+        </p:txBody>
+      </p:sp>
+      <p:sp>
+        <p:nvSpPr>
+          <p:cNvPr id="4" name="Slide Number Placeholder 3"/>
+          <p:cNvSpPr>
+            <a:spLocks noGrp="1"/>
+          </p:cNvSpPr>
+          <p:nvPr>
+            <p:ph type="sldNum" sz="quarter" idx="10"/>
+          </p:nvPr>
+        </p:nvSpPr>
+        <p:spPr/>
+        <p:txBody>
+          <a:bodyPr/>
+          <a:lstStyle/>
+          <a:p>
+            <a:fld id="{F7021451-1387-4CA6-816F-3879F97B5CBC}" type="slidenum">
+              <a:rPr lang="en-US"/>
+              <a:t>17</a:t>
+            </a:fld>
+            <a:endParaRPr lang="en-US"/>
+          </a:p>
+        </p:txBody>
+      </p:sp>
+    </p:spTree>
+    <p:extLst>
+      <p:ext uri="{BB962C8B-B14F-4D97-AF65-F5344CB8AC3E}">
+        <p14:creationId xmlns:p14="http://schemas.microsoft.com/office/powerpoint/2010/main" val="1024086991"/>
+      </p:ext>
+    </p:extLst>
+  </p:cSld>
+  <p:clrMapOvr>
+    <a:masterClrMapping/>
+  </p:clrMapOvr>
+</p:notes>
+</file>
+
+<file path=ppt/notesSlides/notesSlide18.xml><?xml version="1.0" encoding="utf-8"?>
+<p:notes xmlns:a="http://schemas.openxmlformats.org/drawingml/2006/main" xmlns:r="http://schemas.openxmlformats.org/officeDocument/2006/relationships" xmlns:p="http://schemas.openxmlformats.org/presentationml/2006/main">
+  <p:cSld>
+    <p:spTree>
+      <p:nvGrpSpPr>
+        <p:cNvPr id="1" name=""/>
+        <p:cNvGrpSpPr/>
+        <p:nvPr/>
+      </p:nvGrpSpPr>
+      <p:grpSpPr>
+        <a:xfrm>
+          <a:off x="0" y="0"/>
+          <a:ext cx="0" cy="0"/>
+          <a:chOff x="0" y="0"/>
+          <a:chExt cx="0" cy="0"/>
+        </a:xfrm>
+      </p:grpSpPr>
+      <p:sp>
+        <p:nvSpPr>
+          <p:cNvPr id="2" name="Slide Image Placeholder 1"/>
+          <p:cNvSpPr>
+            <a:spLocks noGrp="1" noRot="1" noChangeAspect="1"/>
+          </p:cNvSpPr>
+          <p:nvPr>
+            <p:ph type="sldImg"/>
+          </p:nvPr>
+        </p:nvSpPr>
+        <p:spPr/>
+      </p:sp>
+      <p:sp>
+        <p:nvSpPr>
+          <p:cNvPr id="3" name="Notes Placeholder 2"/>
+          <p:cNvSpPr>
+            <a:spLocks noGrp="1"/>
+          </p:cNvSpPr>
+          <p:nvPr>
+            <p:ph type="body" idx="1"/>
+          </p:nvPr>
+        </p:nvSpPr>
+        <p:spPr/>
+        <p:txBody>
+          <a:bodyPr/>
+          <a:lstStyle/>
+          <a:p>
+            <a:r>
+              <a:rPr lang="en-US" dirty="0"/>
+              <a:t/>
+            </a:r>
+            <a:endParaRPr lang="en-US" dirty="0"/>
+          </a:p>
+        </p:txBody>
+      </p:sp>
+      <p:sp>
+        <p:nvSpPr>
+          <p:cNvPr id="4" name="Slide Number Placeholder 3"/>
+          <p:cNvSpPr>
+            <a:spLocks noGrp="1"/>
+          </p:cNvSpPr>
+          <p:nvPr>
+            <p:ph type="sldNum" sz="quarter" idx="10"/>
+          </p:nvPr>
+        </p:nvSpPr>
+        <p:spPr/>
+        <p:txBody>
+          <a:bodyPr/>
+          <a:lstStyle/>
+          <a:p>
+            <a:fld id="{F7021451-1387-4CA6-816F-3879F97B5CBC}" type="slidenum">
+              <a:rPr lang="en-US"/>
+              <a:t>18</a:t>
+            </a:fld>
+            <a:endParaRPr lang="en-US"/>
+          </a:p>
+        </p:txBody>
+      </p:sp>
+    </p:spTree>
+    <p:extLst>
+      <p:ext uri="{BB962C8B-B14F-4D97-AF65-F5344CB8AC3E}">
+        <p14:creationId xmlns:p14="http://schemas.microsoft.com/office/powerpoint/2010/main" val="1024086991"/>
+      </p:ext>
+    </p:extLst>
+  </p:cSld>
+  <p:clrMapOvr>
+    <a:masterClrMapping/>
+  </p:clrMapOvr>
+</p:notes>
+</file>
+
+<file path=ppt/notesSlides/notesSlide19.xml><?xml version="1.0" encoding="utf-8"?>
+<p:notes xmlns:a="http://schemas.openxmlformats.org/drawingml/2006/main" xmlns:r="http://schemas.openxmlformats.org/officeDocument/2006/relationships" xmlns:p="http://schemas.openxmlformats.org/presentationml/2006/main">
+  <p:cSld>
+    <p:spTree>
+      <p:nvGrpSpPr>
+        <p:cNvPr id="1" name=""/>
+        <p:cNvGrpSpPr/>
+        <p:nvPr/>
+      </p:nvGrpSpPr>
+      <p:grpSpPr>
+        <a:xfrm>
+          <a:off x="0" y="0"/>
+          <a:ext cx="0" cy="0"/>
+          <a:chOff x="0" y="0"/>
+          <a:chExt cx="0" cy="0"/>
+        </a:xfrm>
+      </p:grpSpPr>
+      <p:sp>
+        <p:nvSpPr>
+          <p:cNvPr id="2" name="Slide Image Placeholder 1"/>
+          <p:cNvSpPr>
+            <a:spLocks noGrp="1" noRot="1" noChangeAspect="1"/>
+          </p:cNvSpPr>
+          <p:nvPr>
+            <p:ph type="sldImg"/>
+          </p:nvPr>
+        </p:nvSpPr>
+        <p:spPr/>
+      </p:sp>
+      <p:sp>
+        <p:nvSpPr>
+          <p:cNvPr id="3" name="Notes Placeholder 2"/>
+          <p:cNvSpPr>
+            <a:spLocks noGrp="1"/>
+          </p:cNvSpPr>
+          <p:nvPr>
+            <p:ph type="body" idx="1"/>
+          </p:nvPr>
+        </p:nvSpPr>
+        <p:spPr/>
+        <p:txBody>
+          <a:bodyPr/>
+          <a:lstStyle/>
+          <a:p>
+            <a:r>
+              <a:rPr lang="en-US" dirty="0"/>
+              <a:t/>
+            </a:r>
+            <a:endParaRPr lang="en-US" dirty="0"/>
+          </a:p>
+        </p:txBody>
+      </p:sp>
+      <p:sp>
+        <p:nvSpPr>
+          <p:cNvPr id="4" name="Slide Number Placeholder 3"/>
+          <p:cNvSpPr>
+            <a:spLocks noGrp="1"/>
+          </p:cNvSpPr>
+          <p:nvPr>
+            <p:ph type="sldNum" sz="quarter" idx="10"/>
+          </p:nvPr>
+        </p:nvSpPr>
+        <p:spPr/>
+        <p:txBody>
+          <a:bodyPr/>
+          <a:lstStyle/>
+          <a:p>
+            <a:fld id="{F7021451-1387-4CA6-816F-3879F97B5CBC}" type="slidenum">
+              <a:rPr lang="en-US"/>
+              <a:t>19</a:t>
+            </a:fld>
+            <a:endParaRPr lang="en-US"/>
+          </a:p>
+        </p:txBody>
+      </p:sp>
+    </p:spTree>
+    <p:extLst>
+      <p:ext uri="{BB962C8B-B14F-4D97-AF65-F5344CB8AC3E}">
+        <p14:creationId xmlns:p14="http://schemas.microsoft.com/office/powerpoint/2010/main" val="1024086991"/>
+      </p:ext>
+    </p:extLst>
+  </p:cSld>
+  <p:clrMapOvr>
+    <a:masterClrMapping/>
+  </p:clrMapOvr>
+</p:notes>
+</file>
+
 <file path=ppt/notesSlides/notesSlide2.xml><?xml version="1.0" encoding="utf-8"?>
 <p:notes xmlns:a="http://schemas.openxmlformats.org/drawingml/2006/main" xmlns:r="http://schemas.openxmlformats.org/officeDocument/2006/relationships" xmlns:p="http://schemas.openxmlformats.org/presentationml/2006/main">
   <p:cSld>
@@ -1067,6 +1514,182 @@
             <a:fld id="{F7021451-1387-4CA6-816F-3879F97B5CBC}" type="slidenum">
               <a:rPr lang="en-US"/>
               <a:t>2</a:t>
+            </a:fld>
+            <a:endParaRPr lang="en-US"/>
+          </a:p>
+        </p:txBody>
+      </p:sp>
+    </p:spTree>
+    <p:extLst>
+      <p:ext uri="{BB962C8B-B14F-4D97-AF65-F5344CB8AC3E}">
+        <p14:creationId xmlns:p14="http://schemas.microsoft.com/office/powerpoint/2010/main" val="1024086991"/>
+      </p:ext>
+    </p:extLst>
+  </p:cSld>
+  <p:clrMapOvr>
+    <a:masterClrMapping/>
+  </p:clrMapOvr>
+</p:notes>
+</file>
+
+<file path=ppt/notesSlides/notesSlide20.xml><?xml version="1.0" encoding="utf-8"?>
+<p:notes xmlns:a="http://schemas.openxmlformats.org/drawingml/2006/main" xmlns:r="http://schemas.openxmlformats.org/officeDocument/2006/relationships" xmlns:p="http://schemas.openxmlformats.org/presentationml/2006/main">
+  <p:cSld>
+    <p:spTree>
+      <p:nvGrpSpPr>
+        <p:cNvPr id="1" name=""/>
+        <p:cNvGrpSpPr/>
+        <p:nvPr/>
+      </p:nvGrpSpPr>
+      <p:grpSpPr>
+        <a:xfrm>
+          <a:off x="0" y="0"/>
+          <a:ext cx="0" cy="0"/>
+          <a:chOff x="0" y="0"/>
+          <a:chExt cx="0" cy="0"/>
+        </a:xfrm>
+      </p:grpSpPr>
+      <p:sp>
+        <p:nvSpPr>
+          <p:cNvPr id="2" name="Slide Image Placeholder 1"/>
+          <p:cNvSpPr>
+            <a:spLocks noGrp="1" noRot="1" noChangeAspect="1"/>
+          </p:cNvSpPr>
+          <p:nvPr>
+            <p:ph type="sldImg"/>
+          </p:nvPr>
+        </p:nvSpPr>
+        <p:spPr/>
+      </p:sp>
+      <p:sp>
+        <p:nvSpPr>
+          <p:cNvPr id="3" name="Notes Placeholder 2"/>
+          <p:cNvSpPr>
+            <a:spLocks noGrp="1"/>
+          </p:cNvSpPr>
+          <p:nvPr>
+            <p:ph type="body" idx="1"/>
+          </p:nvPr>
+        </p:nvSpPr>
+        <p:spPr/>
+        <p:txBody>
+          <a:bodyPr/>
+          <a:lstStyle/>
+          <a:p>
+            <a:r>
+              <a:rPr lang="en-US" dirty="0"/>
+              <a:t/>
+            </a:r>
+            <a:endParaRPr lang="en-US" dirty="0"/>
+          </a:p>
+        </p:txBody>
+      </p:sp>
+      <p:sp>
+        <p:nvSpPr>
+          <p:cNvPr id="4" name="Slide Number Placeholder 3"/>
+          <p:cNvSpPr>
+            <a:spLocks noGrp="1"/>
+          </p:cNvSpPr>
+          <p:nvPr>
+            <p:ph type="sldNum" sz="quarter" idx="10"/>
+          </p:nvPr>
+        </p:nvSpPr>
+        <p:spPr/>
+        <p:txBody>
+          <a:bodyPr/>
+          <a:lstStyle/>
+          <a:p>
+            <a:fld id="{F7021451-1387-4CA6-816F-3879F97B5CBC}" type="slidenum">
+              <a:rPr lang="en-US"/>
+              <a:t>20</a:t>
+            </a:fld>
+            <a:endParaRPr lang="en-US"/>
+          </a:p>
+        </p:txBody>
+      </p:sp>
+    </p:spTree>
+    <p:extLst>
+      <p:ext uri="{BB962C8B-B14F-4D97-AF65-F5344CB8AC3E}">
+        <p14:creationId xmlns:p14="http://schemas.microsoft.com/office/powerpoint/2010/main" val="1024086991"/>
+      </p:ext>
+    </p:extLst>
+  </p:cSld>
+  <p:clrMapOvr>
+    <a:masterClrMapping/>
+  </p:clrMapOvr>
+</p:notes>
+</file>
+
+<file path=ppt/notesSlides/notesSlide21.xml><?xml version="1.0" encoding="utf-8"?>
+<p:notes xmlns:a="http://schemas.openxmlformats.org/drawingml/2006/main" xmlns:r="http://schemas.openxmlformats.org/officeDocument/2006/relationships" xmlns:p="http://schemas.openxmlformats.org/presentationml/2006/main">
+  <p:cSld>
+    <p:spTree>
+      <p:nvGrpSpPr>
+        <p:cNvPr id="1" name=""/>
+        <p:cNvGrpSpPr/>
+        <p:nvPr/>
+      </p:nvGrpSpPr>
+      <p:grpSpPr>
+        <a:xfrm>
+          <a:off x="0" y="0"/>
+          <a:ext cx="0" cy="0"/>
+          <a:chOff x="0" y="0"/>
+          <a:chExt cx="0" cy="0"/>
+        </a:xfrm>
+      </p:grpSpPr>
+      <p:sp>
+        <p:nvSpPr>
+          <p:cNvPr id="2" name="Slide Image Placeholder 1"/>
+          <p:cNvSpPr>
+            <a:spLocks noGrp="1" noRot="1" noChangeAspect="1"/>
+          </p:cNvSpPr>
+          <p:nvPr>
+            <p:ph type="sldImg"/>
+          </p:nvPr>
+        </p:nvSpPr>
+        <p:spPr/>
+      </p:sp>
+      <p:sp>
+        <p:nvSpPr>
+          <p:cNvPr id="3" name="Notes Placeholder 2"/>
+          <p:cNvSpPr>
+            <a:spLocks noGrp="1"/>
+          </p:cNvSpPr>
+          <p:nvPr>
+            <p:ph type="body" idx="1"/>
+          </p:nvPr>
+        </p:nvSpPr>
+        <p:spPr/>
+        <p:txBody>
+          <a:bodyPr/>
+          <a:lstStyle/>
+          <a:p>
+            <a:r>
+              <a:rPr lang="en-US" dirty="0"/>
+              <a:t/>
+            </a:r>
+            <a:endParaRPr lang="en-US" dirty="0"/>
+          </a:p>
+        </p:txBody>
+      </p:sp>
+      <p:sp>
+        <p:nvSpPr>
+          <p:cNvPr id="4" name="Slide Number Placeholder 3"/>
+          <p:cNvSpPr>
+            <a:spLocks noGrp="1"/>
+          </p:cNvSpPr>
+          <p:nvPr>
+            <p:ph type="sldNum" sz="quarter" idx="10"/>
+          </p:nvPr>
+        </p:nvSpPr>
+        <p:spPr/>
+        <p:txBody>
+          <a:bodyPr/>
+          <a:lstStyle/>
+          <a:p>
+            <a:fld id="{F7021451-1387-4CA6-816F-3879F97B5CBC}" type="slidenum">
+              <a:rPr lang="en-US"/>
+              <a:t>21</a:t>
             </a:fld>
             <a:endParaRPr lang="en-US"/>
           </a:p>
@@ -2278,148 +2901,6 @@
         </p:nvSpPr>
         <p:spPr>
           <a:xfrm>
-            <a:off x="406301" y="1223963"/>
-            <a:ext cx="8498026" cy="274290"/>
-          </a:xfrm>
-          <a:prstGeom prst="rect">
-            <a:avLst/>
-          </a:prstGeom>
-          <a:noFill/>
-          <a:ln/>
-        </p:spPr>
-        <p:txBody>
-          <a:bodyPr wrap="square" lIns="0" tIns="0" rIns="0" bIns="0" rtlCol="0" anchor="t"/>
-          <a:lstStyle/>
-          <a:p>
-            <a:pPr algn="l" indent="0" marL="0">
-              <a:lnSpc>
-                <a:spcPts val="2160"/>
-              </a:lnSpc>
-              <a:spcBef>
-                <a:spcPts val="600"/>
-              </a:spcBef>
-              <a:spcAft>
-                <a:spcPts val="800"/>
-              </a:spcAft>
-              <a:buNone/>
-            </a:pPr>
-            <a:r>
-              <a:rPr lang="en-US" sz="1800" b="1" dirty="0">
-                <a:solidFill>
-                  <a:srgbClr val="FE4447"/>
-                </a:solidFill>
-                <a:latin typeface="Georgia" pitchFamily="34" charset="0"/>
-                <a:ea typeface="Georgia" pitchFamily="34" charset="-122"/>
-                <a:cs typeface="Georgia" pitchFamily="34" charset="-120"/>
-              </a:rPr>
-              <a:t>Learning objective</a:t>
-            </a:r>
-            <a:endParaRPr lang="en-US" sz="1800" dirty="0"/>
-          </a:p>
-        </p:txBody>
-      </p:sp>
-      <p:sp>
-        <p:nvSpPr>
-          <p:cNvPr id="6" name="Text 4"/>
-          <p:cNvSpPr/>
-          <p:nvPr/>
-        </p:nvSpPr>
-        <p:spPr>
-          <a:xfrm>
-            <a:off x="406301" y="1637854"/>
-            <a:ext cx="8498026" cy="426541"/>
-          </a:xfrm>
-          <a:prstGeom prst="rect">
-            <a:avLst/>
-          </a:prstGeom>
-          <a:noFill/>
-          <a:ln/>
-        </p:spPr>
-        <p:txBody>
-          <a:bodyPr wrap="square" lIns="0" tIns="0" rIns="0" bIns="0" rtlCol="0" anchor="t"/>
-          <a:lstStyle/>
-          <a:p>
-            <a:pPr algn="l" indent="0" marL="0">
-              <a:lnSpc>
-                <a:spcPts val="1680"/>
-              </a:lnSpc>
-              <a:spcBef>
-                <a:spcPts val="300"/>
-              </a:spcBef>
-              <a:spcAft>
-                <a:spcPts val="300"/>
-              </a:spcAft>
-              <a:buNone/>
-            </a:pPr>
-            <a:r>
-              <a:rPr lang="en-US" sz="1200" dirty="0">
-                <a:solidFill>
-                  <a:srgbClr val="1C2833"/>
-                </a:solidFill>
-                <a:latin typeface="Arial" pitchFamily="34" charset="0"/>
-                <a:ea typeface="Arial" pitchFamily="34" charset="-122"/>
-                <a:cs typeface="Arial" pitchFamily="34" charset="-120"/>
-              </a:rPr>
-              <a:t>By the end of this lesson, students will perform five foundational āsanas — </a:t>
-            </a:r>
-            <a:pPr algn="l" indent="0" marL="0">
-              <a:lnSpc>
-                <a:spcPts val="1680"/>
-              </a:lnSpc>
-              <a:spcBef>
-                <a:spcPts val="300"/>
-              </a:spcBef>
-              <a:spcAft>
-                <a:spcPts val="300"/>
-              </a:spcAft>
-              <a:buNone/>
-            </a:pPr>
-            <a:r>
-              <a:rPr lang="en-US" sz="1200" i="1" dirty="0">
-                <a:solidFill>
-                  <a:srgbClr val="1C2833"/>
-                </a:solidFill>
-                <a:latin typeface="Arial" pitchFamily="34" charset="0"/>
-                <a:ea typeface="Arial" pitchFamily="34" charset="-122"/>
-                <a:cs typeface="Arial" pitchFamily="34" charset="-120"/>
-              </a:rPr>
-              <a:t>tāḍāsana, vṛkṣāsana, baddha-koṇāsana, balāsana, sukhāsana</a:t>
-            </a:r>
-            <a:pPr algn="l" indent="0" marL="0">
-              <a:lnSpc>
-                <a:spcPts val="1680"/>
-              </a:lnSpc>
-              <a:spcBef>
-                <a:spcPts val="300"/>
-              </a:spcBef>
-              <a:spcAft>
-                <a:spcPts val="300"/>
-              </a:spcAft>
-              <a:buNone/>
-            </a:pPr>
-            <a:r>
-              <a:rPr lang="en-US" sz="1200" dirty="0">
-                <a:solidFill>
-                  <a:srgbClr val="1C2833"/>
-                </a:solidFill>
-                <a:latin typeface="Arial" pitchFamily="34" charset="0"/>
-                <a:ea typeface="Arial" pitchFamily="34" charset="-122"/>
-                <a:cs typeface="Arial" pitchFamily="34" charset="-120"/>
-              </a:rPr>
-              <a:t> — with safe alignment cues, and identify which body parts each pose strengthens or stretches.</a:t>
-            </a:r>
-            <a:endParaRPr lang="en-US" sz="1200" dirty="0"/>
-          </a:p>
-        </p:txBody>
-      </p:sp>
-      <p:sp>
-        <p:nvSpPr>
-          <p:cNvPr id="7" name="Text 5"/>
-          <p:cNvSpPr/>
-          <p:nvPr/>
-        </p:nvSpPr>
-        <p:spPr>
-          <a:xfrm>
             <a:off x="406301" y="4434929"/>
             <a:ext cx="8498026" cy="213271"/>
           </a:xfrm>
@@ -2564,7 +3045,7 @@
                 <a:ea typeface="Georgia" pitchFamily="34" charset="-122"/>
                 <a:cs typeface="Georgia" pitchFamily="34" charset="-120"/>
               </a:rPr>
-              <a:t>Student-facing content</a:t>
+              <a:t>Practice (25 min) — Walk through all five</a:t>
             </a:r>
             <a:endParaRPr lang="en-US" sz="1800" dirty="0"/>
           </a:p>
@@ -2578,50 +3059,111 @@
         </p:nvSpPr>
         <p:spPr>
           <a:xfrm>
-            <a:off x="406301" y="883593"/>
-            <a:ext cx="8331398" cy="1612106"/>
-          </a:xfrm>
-          <a:prstGeom prst="rect">
-            <a:avLst/>
-          </a:prstGeom>
-          <a:solidFill>
-            <a:srgbClr val="F4F8F9"/>
-          </a:solidFill>
-          <a:ln/>
-        </p:spPr>
-        <p:txBody>
-          <a:bodyPr wrap="square" rtlCol="0" anchor="ctr"/>
-          <a:lstStyle/>
-          <a:p>
-            <a:pPr indent="0" marL="0">
-              <a:buNone/>
-            </a:pPr>
-            <a:endParaRPr lang="en-US" dirty="0"/>
-          </a:p>
-        </p:txBody>
-      </p:sp>
-      <p:sp>
-        <p:nvSpPr>
-          <p:cNvPr id="5" name="Shape 3"/>
-          <p:cNvSpPr/>
-          <p:nvPr/>
-        </p:nvSpPr>
-        <p:spPr>
-          <a:xfrm>
-            <a:off x="434876" y="883593"/>
-            <a:ext cx="0" cy="1612106"/>
-          </a:xfrm>
-          <a:prstGeom prst="line">
+            <a:off x="406301" y="870942"/>
+            <a:ext cx="8498026" cy="213271"/>
+          </a:xfrm>
+          <a:prstGeom prst="rect">
             <a:avLst/>
           </a:prstGeom>
           <a:noFill/>
-          <a:ln w="57150">
-            <a:solidFill>
-              <a:srgbClr val="FE4447"/>
-            </a:solidFill>
-            <a:prstDash val="solid"/>
-          </a:ln>
-        </p:spPr>
+          <a:ln/>
+        </p:spPr>
+        <p:txBody>
+          <a:bodyPr wrap="square" lIns="0" tIns="0" rIns="0" bIns="0" rtlCol="0" anchor="t"/>
+          <a:lstStyle/>
+          <a:p>
+            <a:pPr algn="l" indent="0" marL="0">
+              <a:lnSpc>
+                <a:spcPts val="1680"/>
+              </a:lnSpc>
+              <a:spcBef>
+                <a:spcPts val="300"/>
+              </a:spcBef>
+              <a:spcAft>
+                <a:spcPts val="300"/>
+              </a:spcAft>
+              <a:buNone/>
+            </a:pPr>
+            <a:r>
+              <a:rPr lang="en-US" sz="1200" dirty="0">
+                <a:solidFill>
+                  <a:srgbClr val="1C2833"/>
+                </a:solidFill>
+                <a:latin typeface="Arial" pitchFamily="34" charset="0"/>
+                <a:ea typeface="Arial" pitchFamily="34" charset="-122"/>
+                <a:cs typeface="Arial" pitchFamily="34" charset="-120"/>
+              </a:rPr>
+              <a:t>For each pose: 1 min demonstration with verbal cues, 1 min student practice with teacher observation, 1 min hold + breath.</a:t>
+            </a:r>
+            <a:endParaRPr lang="en-US" sz="1200" dirty="0"/>
+          </a:p>
+        </p:txBody>
+      </p:sp>
+      <p:sp>
+        <p:nvSpPr>
+          <p:cNvPr id="5" name="Text 3"/>
+          <p:cNvSpPr/>
+          <p:nvPr/>
+        </p:nvSpPr>
+        <p:spPr>
+          <a:xfrm>
+            <a:off x="634901" y="1173063"/>
+            <a:ext cx="8102798" cy="281880"/>
+          </a:xfrm>
+          <a:prstGeom prst="rect">
+            <a:avLst/>
+          </a:prstGeom>
+          <a:noFill/>
+          <a:ln/>
+        </p:spPr>
+        <p:txBody>
+          <a:bodyPr wrap="square" lIns="0" tIns="0" rIns="0" bIns="0" rtlCol="0" anchor="t"/>
+          <a:lstStyle/>
+          <a:p>
+            <a:pPr algn="l" marL="342900" indent="-342900">
+              <a:lnSpc>
+                <a:spcPts val="1620"/>
+              </a:lnSpc>
+              <a:spcAft>
+                <a:spcPts val="300"/>
+              </a:spcAft>
+              <a:buSzPct val="100000"/>
+              <a:buChar char="•"/>
+            </a:pPr>
+            <a:r>
+              <a:rPr lang="en-US" sz="1200" b="1" dirty="0">
+                <a:solidFill>
+                  <a:srgbClr val="1C2833"/>
+                </a:solidFill>
+                <a:latin typeface="Arial" pitchFamily="34" charset="0"/>
+                <a:ea typeface="Arial" pitchFamily="34" charset="-122"/>
+                <a:cs typeface="Arial" pitchFamily="34" charset="-120"/>
+              </a:rPr>
+              <a:t>Tāḍāsana</a:t>
+            </a:r>
+            <a:pPr algn="l" indent="0" marL="0">
+              <a:lnSpc>
+                <a:spcPts val="1620"/>
+              </a:lnSpc>
+              <a:spcAft>
+                <a:spcPts val="300"/>
+              </a:spcAft>
+              <a:buNone/>
+            </a:pPr>
+            <a:r>
+              <a:rPr lang="en-US" sz="1200" dirty="0">
+                <a:solidFill>
+                  <a:srgbClr val="1C2833"/>
+                </a:solidFill>
+                <a:latin typeface="Arial" pitchFamily="34" charset="0"/>
+                <a:ea typeface="Arial" pitchFamily="34" charset="-122"/>
+                <a:cs typeface="Arial" pitchFamily="34" charset="-120"/>
+              </a:rPr>
+              <a:t> — 30 sec.</a:t>
+            </a:r>
+            <a:endParaRPr lang="en-US" sz="1200" dirty="0"/>
+          </a:p>
+        </p:txBody>
       </p:sp>
       <p:sp>
         <p:nvSpPr>
@@ -2631,8 +3173,8 @@
         </p:nvSpPr>
         <p:spPr>
           <a:xfrm>
-            <a:off x="692051" y="1074093"/>
-            <a:ext cx="7973389" cy="230981"/>
+            <a:off x="634901" y="1556445"/>
+            <a:ext cx="8102798" cy="525661"/>
           </a:xfrm>
           <a:prstGeom prst="rect">
             <a:avLst/>
@@ -2644,362 +3186,58 @@
           <a:bodyPr wrap="square" lIns="0" tIns="0" rIns="0" bIns="0" rtlCol="0" anchor="t"/>
           <a:lstStyle/>
           <a:p>
-            <a:pPr algn="l" indent="0" marL="0">
-              <a:lnSpc>
-                <a:spcPts val="1820"/>
-              </a:lnSpc>
-              <a:spcBef>
-                <a:spcPts val="300"/>
-              </a:spcBef>
-              <a:spcAft>
-                <a:spcPts val="300"/>
-              </a:spcAft>
-              <a:buNone/>
-            </a:pPr>
-            <a:r>
-              <a:rPr lang="en-US" sz="1300" b="1" i="1" dirty="0">
-                <a:solidFill>
-                  <a:srgbClr val="1C2833"/>
-                </a:solidFill>
-                <a:latin typeface="Georgia" pitchFamily="34" charset="0"/>
-                <a:ea typeface="Georgia" pitchFamily="34" charset="-122"/>
-                <a:cs typeface="Georgia" pitchFamily="34" charset="-120"/>
-              </a:rPr>
-              <a:t>Five Foundational Āsanas</a:t>
-            </a:r>
-            <a:endParaRPr lang="en-US" sz="1300" dirty="0"/>
+            <a:pPr algn="l" marL="342900" indent="-342900">
+              <a:lnSpc>
+                <a:spcPts val="1620"/>
+              </a:lnSpc>
+              <a:spcAft>
+                <a:spcPts val="300"/>
+              </a:spcAft>
+              <a:buSzPct val="100000"/>
+              <a:buChar char="•"/>
+            </a:pPr>
+            <a:r>
+              <a:rPr lang="en-US" sz="1200" dirty="0">
+                <a:solidFill>
+                  <a:srgbClr val="1C2833"/>
+                </a:solidFill>
+                <a:latin typeface="Arial" pitchFamily="34" charset="0"/>
+                <a:ea typeface="Arial" pitchFamily="34" charset="-122"/>
+                <a:cs typeface="Arial" pitchFamily="34" charset="-120"/>
+              </a:rPr>
+              <a:t>Feet hip-width. Press into all four corners of each foot.</a:t>
+            </a:r>
+            <a:endParaRPr lang="en-US" sz="1200" dirty="0"/>
+          </a:p>
+          <a:p>
+            <a:pPr algn="l" marL="342900" indent="-342900">
+              <a:lnSpc>
+                <a:spcPts val="1620"/>
+              </a:lnSpc>
+              <a:spcAft>
+                <a:spcPts val="300"/>
+              </a:spcAft>
+              <a:buSzPct val="100000"/>
+              <a:buChar char="•"/>
+            </a:pPr>
+            <a:r>
+              <a:rPr lang="en-US" sz="1200" dirty="0">
+                <a:solidFill>
+                  <a:srgbClr val="1C2833"/>
+                </a:solidFill>
+                <a:latin typeface="Arial" pitchFamily="34" charset="0"/>
+                <a:ea typeface="Arial" pitchFamily="34" charset="-122"/>
+                <a:cs typeface="Arial" pitchFamily="34" charset="-120"/>
+              </a:rPr>
+              <a:t>Lengthen up. Soft knees. Breathe.</a:t>
+            </a:r>
+            <a:endParaRPr lang="en-US" sz="1200" dirty="0"/>
           </a:p>
         </p:txBody>
       </p:sp>
       <p:sp>
         <p:nvSpPr>
           <p:cNvPr id="7" name="Text 5"/>
-          <p:cNvSpPr/>
-          <p:nvPr/>
-        </p:nvSpPr>
-        <p:spPr>
-          <a:xfrm>
-            <a:off x="692051" y="1343174"/>
-            <a:ext cx="7973389" cy="692944"/>
-          </a:xfrm>
-          <a:prstGeom prst="rect">
-            <a:avLst/>
-          </a:prstGeom>
-          <a:noFill/>
-          <a:ln/>
-        </p:spPr>
-        <p:txBody>
-          <a:bodyPr wrap="square" lIns="0" tIns="0" rIns="0" bIns="0" rtlCol="0" anchor="t"/>
-          <a:lstStyle/>
-          <a:p>
-            <a:pPr algn="l" indent="0" marL="0">
-              <a:lnSpc>
-                <a:spcPts val="1820"/>
-              </a:lnSpc>
-              <a:spcBef>
-                <a:spcPts val="300"/>
-              </a:spcBef>
-              <a:spcAft>
-                <a:spcPts val="300"/>
-              </a:spcAft>
-              <a:buNone/>
-            </a:pPr>
-            <a:r>
-              <a:rPr lang="en-US" sz="1300" dirty="0">
-                <a:solidFill>
-                  <a:srgbClr val="1C2833"/>
-                </a:solidFill>
-                <a:latin typeface="Georgia" pitchFamily="34" charset="0"/>
-                <a:ea typeface="Georgia" pitchFamily="34" charset="-122"/>
-                <a:cs typeface="Georgia" pitchFamily="34" charset="-120"/>
-              </a:rPr>
-              <a:t>| # | Sanskrit | Type | What it does | |---|----------|------|---------------| | 1 | </a:t>
-            </a:r>
-            <a:pPr algn="l" indent="0" marL="0">
-              <a:lnSpc>
-                <a:spcPts val="1820"/>
-              </a:lnSpc>
-              <a:spcBef>
-                <a:spcPts val="300"/>
-              </a:spcBef>
-              <a:spcAft>
-                <a:spcPts val="300"/>
-              </a:spcAft>
-              <a:buNone/>
-            </a:pPr>
-            <a:r>
-              <a:rPr lang="en-US" sz="1300" i="1" dirty="0">
-                <a:solidFill>
-                  <a:srgbClr val="1C2833"/>
-                </a:solidFill>
-                <a:latin typeface="Georgia" pitchFamily="34" charset="0"/>
-                <a:ea typeface="Georgia" pitchFamily="34" charset="-122"/>
-                <a:cs typeface="Georgia" pitchFamily="34" charset="-120"/>
-              </a:rPr>
-              <a:t>tāḍāsana</a:t>
-            </a:r>
-            <a:pPr algn="l" indent="0" marL="0">
-              <a:lnSpc>
-                <a:spcPts val="1820"/>
-              </a:lnSpc>
-              <a:spcBef>
-                <a:spcPts val="300"/>
-              </a:spcBef>
-              <a:spcAft>
-                <a:spcPts val="300"/>
-              </a:spcAft>
-              <a:buNone/>
-            </a:pPr>
-            <a:r>
-              <a:rPr lang="en-US" sz="1300" dirty="0">
-                <a:solidFill>
-                  <a:srgbClr val="1C2833"/>
-                </a:solidFill>
-                <a:latin typeface="Georgia" pitchFamily="34" charset="0"/>
-                <a:ea typeface="Georgia" pitchFamily="34" charset="-122"/>
-                <a:cs typeface="Georgia" pitchFamily="34" charset="-120"/>
-              </a:rPr>
-              <a:t> | standing | posture foundation | | 2 | </a:t>
-            </a:r>
-            <a:pPr algn="l" indent="0" marL="0">
-              <a:lnSpc>
-                <a:spcPts val="1820"/>
-              </a:lnSpc>
-              <a:spcBef>
-                <a:spcPts val="300"/>
-              </a:spcBef>
-              <a:spcAft>
-                <a:spcPts val="300"/>
-              </a:spcAft>
-              <a:buNone/>
-            </a:pPr>
-            <a:r>
-              <a:rPr lang="en-US" sz="1300" i="1" dirty="0">
-                <a:solidFill>
-                  <a:srgbClr val="1C2833"/>
-                </a:solidFill>
-                <a:latin typeface="Georgia" pitchFamily="34" charset="0"/>
-                <a:ea typeface="Georgia" pitchFamily="34" charset="-122"/>
-                <a:cs typeface="Georgia" pitchFamily="34" charset="-120"/>
-              </a:rPr>
-              <a:t>vṛkṣāsana</a:t>
-            </a:r>
-            <a:pPr algn="l" indent="0" marL="0">
-              <a:lnSpc>
-                <a:spcPts val="1820"/>
-              </a:lnSpc>
-              <a:spcBef>
-                <a:spcPts val="300"/>
-              </a:spcBef>
-              <a:spcAft>
-                <a:spcPts val="300"/>
-              </a:spcAft>
-              <a:buNone/>
-            </a:pPr>
-            <a:r>
-              <a:rPr lang="en-US" sz="1300" dirty="0">
-                <a:solidFill>
-                  <a:srgbClr val="1C2833"/>
-                </a:solidFill>
-                <a:latin typeface="Georgia" pitchFamily="34" charset="0"/>
-                <a:ea typeface="Georgia" pitchFamily="34" charset="-122"/>
-                <a:cs typeface="Georgia" pitchFamily="34" charset="-120"/>
-              </a:rPr>
-              <a:t> | balance | leg strength, focus | | 3 | </a:t>
-            </a:r>
-            <a:pPr algn="l" indent="0" marL="0">
-              <a:lnSpc>
-                <a:spcPts val="1820"/>
-              </a:lnSpc>
-              <a:spcBef>
-                <a:spcPts val="300"/>
-              </a:spcBef>
-              <a:spcAft>
-                <a:spcPts val="300"/>
-              </a:spcAft>
-              <a:buNone/>
-            </a:pPr>
-            <a:r>
-              <a:rPr lang="en-US" sz="1300" i="1" dirty="0">
-                <a:solidFill>
-                  <a:srgbClr val="1C2833"/>
-                </a:solidFill>
-                <a:latin typeface="Georgia" pitchFamily="34" charset="0"/>
-                <a:ea typeface="Georgia" pitchFamily="34" charset="-122"/>
-                <a:cs typeface="Georgia" pitchFamily="34" charset="-120"/>
-              </a:rPr>
-              <a:t>baddha-koṇāsana</a:t>
-            </a:r>
-            <a:pPr algn="l" indent="0" marL="0">
-              <a:lnSpc>
-                <a:spcPts val="1820"/>
-              </a:lnSpc>
-              <a:spcBef>
-                <a:spcPts val="300"/>
-              </a:spcBef>
-              <a:spcAft>
-                <a:spcPts val="300"/>
-              </a:spcAft>
-              <a:buNone/>
-            </a:pPr>
-            <a:r>
-              <a:rPr lang="en-US" sz="1300" dirty="0">
-                <a:solidFill>
-                  <a:srgbClr val="1C2833"/>
-                </a:solidFill>
-                <a:latin typeface="Georgia" pitchFamily="34" charset="0"/>
-                <a:ea typeface="Georgia" pitchFamily="34" charset="-122"/>
-                <a:cs typeface="Georgia" pitchFamily="34" charset="-120"/>
-              </a:rPr>
-              <a:t> | seated | hip opener | | 4 | </a:t>
-            </a:r>
-            <a:pPr algn="l" indent="0" marL="0">
-              <a:lnSpc>
-                <a:spcPts val="1820"/>
-              </a:lnSpc>
-              <a:spcBef>
-                <a:spcPts val="300"/>
-              </a:spcBef>
-              <a:spcAft>
-                <a:spcPts val="300"/>
-              </a:spcAft>
-              <a:buNone/>
-            </a:pPr>
-            <a:r>
-              <a:rPr lang="en-US" sz="1300" i="1" dirty="0">
-                <a:solidFill>
-                  <a:srgbClr val="1C2833"/>
-                </a:solidFill>
-                <a:latin typeface="Georgia" pitchFamily="34" charset="0"/>
-                <a:ea typeface="Georgia" pitchFamily="34" charset="-122"/>
-                <a:cs typeface="Georgia" pitchFamily="34" charset="-120"/>
-              </a:rPr>
-              <a:t>balāsana</a:t>
-            </a:r>
-            <a:pPr algn="l" indent="0" marL="0">
-              <a:lnSpc>
-                <a:spcPts val="1820"/>
-              </a:lnSpc>
-              <a:spcBef>
-                <a:spcPts val="300"/>
-              </a:spcBef>
-              <a:spcAft>
-                <a:spcPts val="300"/>
-              </a:spcAft>
-              <a:buNone/>
-            </a:pPr>
-            <a:r>
-              <a:rPr lang="en-US" sz="1300" dirty="0">
-                <a:solidFill>
-                  <a:srgbClr val="1C2833"/>
-                </a:solidFill>
-                <a:latin typeface="Georgia" pitchFamily="34" charset="0"/>
-                <a:ea typeface="Georgia" pitchFamily="34" charset="-122"/>
-                <a:cs typeface="Georgia" pitchFamily="34" charset="-120"/>
-              </a:rPr>
-              <a:t> | rest | calming, back release | | 5 | </a:t>
-            </a:r>
-            <a:pPr algn="l" indent="0" marL="0">
-              <a:lnSpc>
-                <a:spcPts val="1820"/>
-              </a:lnSpc>
-              <a:spcBef>
-                <a:spcPts val="300"/>
-              </a:spcBef>
-              <a:spcAft>
-                <a:spcPts val="300"/>
-              </a:spcAft>
-              <a:buNone/>
-            </a:pPr>
-            <a:r>
-              <a:rPr lang="en-US" sz="1300" i="1" dirty="0">
-                <a:solidFill>
-                  <a:srgbClr val="1C2833"/>
-                </a:solidFill>
-                <a:latin typeface="Georgia" pitchFamily="34" charset="0"/>
-                <a:ea typeface="Georgia" pitchFamily="34" charset="-122"/>
-                <a:cs typeface="Georgia" pitchFamily="34" charset="-120"/>
-              </a:rPr>
-              <a:t>sukhāsana</a:t>
-            </a:r>
-            <a:pPr algn="l" indent="0" marL="0">
-              <a:lnSpc>
-                <a:spcPts val="1820"/>
-              </a:lnSpc>
-              <a:spcBef>
-                <a:spcPts val="300"/>
-              </a:spcBef>
-              <a:spcAft>
-                <a:spcPts val="300"/>
-              </a:spcAft>
-              <a:buNone/>
-            </a:pPr>
-            <a:r>
-              <a:rPr lang="en-US" sz="1300" dirty="0">
-                <a:solidFill>
-                  <a:srgbClr val="1C2833"/>
-                </a:solidFill>
-                <a:latin typeface="Georgia" pitchFamily="34" charset="0"/>
-                <a:ea typeface="Georgia" pitchFamily="34" charset="-122"/>
-                <a:cs typeface="Georgia" pitchFamily="34" charset="-120"/>
-              </a:rPr>
-              <a:t> | seated | foundation for breath practice |</a:t>
-            </a:r>
-            <a:endParaRPr lang="en-US" sz="1300" dirty="0"/>
-          </a:p>
-        </p:txBody>
-      </p:sp>
-      <p:sp>
-        <p:nvSpPr>
-          <p:cNvPr id="8" name="Text 6"/>
-          <p:cNvSpPr/>
-          <p:nvPr/>
-        </p:nvSpPr>
-        <p:spPr>
-          <a:xfrm>
-            <a:off x="692051" y="2074218"/>
-            <a:ext cx="7973389" cy="230981"/>
-          </a:xfrm>
-          <a:prstGeom prst="rect">
-            <a:avLst/>
-          </a:prstGeom>
-          <a:noFill/>
-          <a:ln/>
-        </p:spPr>
-        <p:txBody>
-          <a:bodyPr wrap="square" lIns="0" tIns="0" rIns="0" bIns="0" rtlCol="0" anchor="t"/>
-          <a:lstStyle/>
-          <a:p>
-            <a:pPr algn="l" indent="0" marL="0">
-              <a:lnSpc>
-                <a:spcPts val="1820"/>
-              </a:lnSpc>
-              <a:spcBef>
-                <a:spcPts val="300"/>
-              </a:spcBef>
-              <a:spcAft>
-                <a:spcPts val="300"/>
-              </a:spcAft>
-              <a:buNone/>
-            </a:pPr>
-            <a:r>
-              <a:rPr lang="en-US" sz="1300" i="1" dirty="0">
-                <a:solidFill>
-                  <a:srgbClr val="1C2833"/>
-                </a:solidFill>
-                <a:latin typeface="Georgia" pitchFamily="34" charset="0"/>
-                <a:ea typeface="Georgia" pitchFamily="34" charset="-122"/>
-                <a:cs typeface="Georgia" pitchFamily="34" charset="-120"/>
-              </a:rPr>
-              <a:t>All five are safe to practise at home, daily, no equipment needed.</a:t>
-            </a:r>
-            <a:endParaRPr lang="en-US" sz="1300" dirty="0"/>
-          </a:p>
-        </p:txBody>
-      </p:sp>
-      <p:sp>
-        <p:nvSpPr>
-          <p:cNvPr id="9" name="Text 7"/>
           <p:cNvSpPr/>
           <p:nvPr/>
         </p:nvSpPr>
@@ -3149,7 +3387,7 @@
                 <a:ea typeface="Georgia" pitchFamily="34" charset="-122"/>
                 <a:cs typeface="Georgia" pitchFamily="34" charset="-120"/>
               </a:rPr>
-              <a:t>Homework</a:t>
+              <a:t>Practice (25 min) — Walk through all five (cont.)</a:t>
             </a:r>
             <a:endParaRPr lang="en-US" sz="1800" dirty="0"/>
           </a:p>
@@ -3163,8 +3401,8 @@
         </p:nvSpPr>
         <p:spPr>
           <a:xfrm>
-            <a:off x="406301" y="870942"/>
-            <a:ext cx="8498026" cy="426541"/>
+            <a:off x="634901" y="883593"/>
+            <a:ext cx="8102798" cy="281880"/>
           </a:xfrm>
           <a:prstGeom prst="rect">
             <a:avLst/>
@@ -3176,13 +3414,31 @@
           <a:bodyPr wrap="square" lIns="0" tIns="0" rIns="0" bIns="0" rtlCol="0" anchor="t"/>
           <a:lstStyle/>
           <a:p>
-            <a:pPr algn="l" indent="0" marL="0">
-              <a:lnSpc>
-                <a:spcPts val="1680"/>
-              </a:lnSpc>
-              <a:spcBef>
-                <a:spcPts val="300"/>
-              </a:spcBef>
+            <a:pPr algn="l" marL="342900" indent="-342900">
+              <a:lnSpc>
+                <a:spcPts val="1620"/>
+              </a:lnSpc>
+              <a:spcAft>
+                <a:spcPts val="300"/>
+              </a:spcAft>
+              <a:buSzPct val="100000"/>
+              <a:buChar char="•"/>
+            </a:pPr>
+            <a:r>
+              <a:rPr lang="en-US" sz="1200" b="1" dirty="0">
+                <a:solidFill>
+                  <a:srgbClr val="1C2833"/>
+                </a:solidFill>
+                <a:latin typeface="Arial" pitchFamily="34" charset="0"/>
+                <a:ea typeface="Arial" pitchFamily="34" charset="-122"/>
+                <a:cs typeface="Arial" pitchFamily="34" charset="-120"/>
+              </a:rPr>
+              <a:t>Vṛkṣāsana</a:t>
+            </a:r>
+            <a:pPr algn="l" indent="0" marL="0">
+              <a:lnSpc>
+                <a:spcPts val="1620"/>
+              </a:lnSpc>
               <a:spcAft>
                 <a:spcPts val="300"/>
               </a:spcAft>
@@ -3197,7 +3453,7 @@
                 <a:ea typeface="Arial" pitchFamily="34" charset="-122"/>
                 <a:cs typeface="Arial" pitchFamily="34" charset="-120"/>
               </a:rPr>
-              <a:t>– Choose 3 of the 5 āsanas. Practise them for 5 minutes before bed tonight. Note in your workbook how you felt before vs. after.</a:t>
+              <a:t> — 20 sec per side.</a:t>
             </a:r>
             <a:endParaRPr lang="en-US" sz="1200" dirty="0"/>
           </a:p>
@@ -3206,6 +3462,100 @@
       <p:sp>
         <p:nvSpPr>
           <p:cNvPr id="5" name="Text 3"/>
+          <p:cNvSpPr/>
+          <p:nvPr/>
+        </p:nvSpPr>
+        <p:spPr>
+          <a:xfrm>
+            <a:off x="634901" y="1266974"/>
+            <a:ext cx="8102798" cy="769441"/>
+          </a:xfrm>
+          <a:prstGeom prst="rect">
+            <a:avLst/>
+          </a:prstGeom>
+          <a:noFill/>
+          <a:ln/>
+        </p:spPr>
+        <p:txBody>
+          <a:bodyPr wrap="square" lIns="0" tIns="0" rIns="0" bIns="0" rtlCol="0" anchor="t"/>
+          <a:lstStyle/>
+          <a:p>
+            <a:pPr algn="l" marL="342900" indent="-342900">
+              <a:lnSpc>
+                <a:spcPts val="1620"/>
+              </a:lnSpc>
+              <a:spcAft>
+                <a:spcPts val="300"/>
+              </a:spcAft>
+              <a:buSzPct val="100000"/>
+              <a:buChar char="•"/>
+            </a:pPr>
+            <a:r>
+              <a:rPr lang="en-US" sz="1200" dirty="0">
+                <a:solidFill>
+                  <a:srgbClr val="1C2833"/>
+                </a:solidFill>
+                <a:latin typeface="Arial" pitchFamily="34" charset="0"/>
+                <a:ea typeface="Arial" pitchFamily="34" charset="-122"/>
+                <a:cs typeface="Arial" pitchFamily="34" charset="-120"/>
+              </a:rPr>
+              <a:t>From tāḍāsana, shift weight, foot on calf (NOT knee).</a:t>
+            </a:r>
+            <a:endParaRPr lang="en-US" sz="1200" dirty="0"/>
+          </a:p>
+          <a:p>
+            <a:pPr algn="l" marL="342900" indent="-342900">
+              <a:lnSpc>
+                <a:spcPts val="1620"/>
+              </a:lnSpc>
+              <a:spcAft>
+                <a:spcPts val="300"/>
+              </a:spcAft>
+              <a:buSzPct val="100000"/>
+              <a:buChar char="•"/>
+            </a:pPr>
+            <a:r>
+              <a:rPr lang="en-US" sz="1200" dirty="0">
+                <a:solidFill>
+                  <a:srgbClr val="1C2833"/>
+                </a:solidFill>
+                <a:latin typeface="Arial" pitchFamily="34" charset="0"/>
+                <a:ea typeface="Arial" pitchFamily="34" charset="-122"/>
+                <a:cs typeface="Arial" pitchFamily="34" charset="-120"/>
+              </a:rPr>
+              <a:t>Hands at heart or overhead.</a:t>
+            </a:r>
+            <a:endParaRPr lang="en-US" sz="1200" dirty="0"/>
+          </a:p>
+          <a:p>
+            <a:pPr algn="l" marL="342900" indent="-342900">
+              <a:lnSpc>
+                <a:spcPts val="1620"/>
+              </a:lnSpc>
+              <a:spcAft>
+                <a:spcPts val="300"/>
+              </a:spcAft>
+              <a:buSzPct val="100000"/>
+              <a:buChar char="•"/>
+            </a:pPr>
+            <a:r>
+              <a:rPr lang="en-US" sz="1200" dirty="0">
+                <a:solidFill>
+                  <a:srgbClr val="1C2833"/>
+                </a:solidFill>
+                <a:latin typeface="Arial" pitchFamily="34" charset="0"/>
+                <a:ea typeface="Arial" pitchFamily="34" charset="-122"/>
+                <a:cs typeface="Arial" pitchFamily="34" charset="-120"/>
+              </a:rPr>
+              <a:t>Wobble allowed. Switch sides.</a:t>
+            </a:r>
+            <a:endParaRPr lang="en-US" sz="1200" dirty="0"/>
+          </a:p>
+        </p:txBody>
+      </p:sp>
+      <p:sp>
+        <p:nvSpPr>
+          <p:cNvPr id="6" name="Text 4"/>
           <p:cNvSpPr/>
           <p:nvPr/>
         </p:nvSpPr>
@@ -3355,7 +3705,7 @@
                 <a:ea typeface="Georgia" pitchFamily="34" charset="-122"/>
                 <a:cs typeface="Georgia" pitchFamily="34" charset="-120"/>
               </a:rPr>
-              <a:t>Differentiation</a:t>
+              <a:t>Practice (25 min) — Walk through all five (cont.)</a:t>
             </a:r>
             <a:endParaRPr lang="en-US" sz="1800" dirty="0"/>
           </a:p>
@@ -3370,7 +3720,7 @@
         <p:spPr>
           <a:xfrm>
             <a:off x="634901" y="883593"/>
-            <a:ext cx="8102798" cy="525661"/>
+            <a:ext cx="8102798" cy="281880"/>
           </a:xfrm>
           <a:prstGeom prst="rect">
             <a:avLst/>
@@ -3401,7 +3751,7 @@
                 <a:ea typeface="Arial" pitchFamily="34" charset="-122"/>
                 <a:cs typeface="Arial" pitchFamily="34" charset="-120"/>
               </a:rPr>
-              <a:t>Tier up:</a:t>
+              <a:t>Baddha-koṇāsana</a:t>
             </a:r>
             <a:pPr algn="l" indent="0" marL="0">
               <a:lnSpc>
@@ -3421,50 +3771,32 @@
                 <a:ea typeface="Arial" pitchFamily="34" charset="-122"/>
                 <a:cs typeface="Arial" pitchFamily="34" charset="-120"/>
               </a:rPr>
-              <a:t> Add </a:t>
-            </a:r>
-            <a:pPr algn="l" indent="0" marL="0">
-              <a:lnSpc>
-                <a:spcPts val="1620"/>
-              </a:lnSpc>
-              <a:spcAft>
-                <a:spcPts val="300"/>
-              </a:spcAft>
-              <a:buNone/>
-            </a:pPr>
-            <a:r>
-              <a:rPr lang="en-US" sz="1200" i="1" dirty="0">
-                <a:solidFill>
-                  <a:srgbClr val="1C2833"/>
-                </a:solidFill>
-                <a:latin typeface="Arial" pitchFamily="34" charset="0"/>
-                <a:ea typeface="Arial" pitchFamily="34" charset="-122"/>
-                <a:cs typeface="Arial" pitchFamily="34" charset="-120"/>
-              </a:rPr>
-              <a:t>adho-mukha-śvānāsana</a:t>
-            </a:r>
-            <a:pPr algn="l" indent="0" marL="0">
-              <a:lnSpc>
-                <a:spcPts val="1620"/>
-              </a:lnSpc>
-              <a:spcAft>
-                <a:spcPts val="300"/>
-              </a:spcAft>
-              <a:buNone/>
-            </a:pPr>
-            <a:r>
-              <a:rPr lang="en-US" sz="1200" dirty="0">
-                <a:solidFill>
-                  <a:srgbClr val="1C2833"/>
-                </a:solidFill>
-                <a:latin typeface="Arial" pitchFamily="34" charset="0"/>
-                <a:ea typeface="Arial" pitchFamily="34" charset="-122"/>
-                <a:cs typeface="Arial" pitchFamily="34" charset="-120"/>
-              </a:rPr>
-              <a:t> (downward-facing dog) to your home practice — try 30 sec hold.</a:t>
+              <a:t> — 60 sec.</a:t>
             </a:r>
             <a:endParaRPr lang="en-US" sz="1200" dirty="0"/>
           </a:p>
+        </p:txBody>
+      </p:sp>
+      <p:sp>
+        <p:nvSpPr>
+          <p:cNvPr id="5" name="Text 3"/>
+          <p:cNvSpPr/>
+          <p:nvPr/>
+        </p:nvSpPr>
+        <p:spPr>
+          <a:xfrm>
+            <a:off x="634901" y="1266974"/>
+            <a:ext cx="8102798" cy="769441"/>
+          </a:xfrm>
+          <a:prstGeom prst="rect">
+            <a:avLst/>
+          </a:prstGeom>
+          <a:noFill/>
+          <a:ln/>
+        </p:spPr>
+        <p:txBody>
+          <a:bodyPr wrap="square" lIns="0" tIns="0" rIns="0" bIns="0" rtlCol="0" anchor="t"/>
+          <a:lstStyle/>
           <a:p>
             <a:pPr algn="l" marL="342900" indent="-342900">
               <a:lnSpc>
@@ -3477,24 +3809,28 @@
               <a:buChar char="•"/>
             </a:pPr>
             <a:r>
-              <a:rPr lang="en-US" sz="1200" b="1" dirty="0">
-                <a:solidFill>
-                  <a:srgbClr val="1C2833"/>
-                </a:solidFill>
-                <a:latin typeface="Arial" pitchFamily="34" charset="0"/>
-                <a:ea typeface="Arial" pitchFamily="34" charset="-122"/>
-                <a:cs typeface="Arial" pitchFamily="34" charset="-120"/>
-              </a:rPr>
-              <a:t>Tier down:</a:t>
-            </a:r>
-            <a:pPr algn="l" indent="0" marL="0">
+              <a:rPr lang="en-US" sz="1200" dirty="0">
+                <a:solidFill>
+                  <a:srgbClr val="1C2833"/>
+                </a:solidFill>
+                <a:latin typeface="Arial" pitchFamily="34" charset="0"/>
+                <a:ea typeface="Arial" pitchFamily="34" charset="-122"/>
+                <a:cs typeface="Arial" pitchFamily="34" charset="-120"/>
+              </a:rPr>
+              <a:t>Sit. Bend knees, soles of feet together, drop knees out to the sides.</a:t>
+            </a:r>
+            <a:endParaRPr lang="en-US" sz="1200" dirty="0"/>
+          </a:p>
+          <a:p>
+            <a:pPr algn="l" marL="342900" indent="-342900">
               <a:lnSpc>
                 <a:spcPts val="1620"/>
               </a:lnSpc>
               <a:spcAft>
                 <a:spcPts val="300"/>
               </a:spcAft>
-              <a:buNone/>
+              <a:buSzPct val="100000"/>
+              <a:buChar char="•"/>
             </a:pPr>
             <a:r>
               <a:rPr lang="en-US" sz="1200" dirty="0">
@@ -3505,15 +3841,39 @@
                 <a:ea typeface="Arial" pitchFamily="34" charset="-122"/>
                 <a:cs typeface="Arial" pitchFamily="34" charset="-120"/>
               </a:rPr>
-              <a:t> Use a wall for vṛkṣāsana support. Use a folded blanket under the knees for sukhāsana / baddha-koṇāsana.</a:t>
+              <a:t>Hold the feet. Long spine. Don't force the knees down.</a:t>
             </a:r>
             <a:endParaRPr lang="en-US" sz="1200" dirty="0"/>
           </a:p>
-        </p:txBody>
-      </p:sp>
-      <p:sp>
-        <p:nvSpPr>
-          <p:cNvPr id="5" name="Text 3"/>
+          <a:p>
+            <a:pPr algn="l" marL="342900" indent="-342900">
+              <a:lnSpc>
+                <a:spcPts val="1620"/>
+              </a:lnSpc>
+              <a:spcAft>
+                <a:spcPts val="300"/>
+              </a:spcAft>
+              <a:buSzPct val="100000"/>
+              <a:buChar char="•"/>
+            </a:pPr>
+            <a:r>
+              <a:rPr lang="en-US" sz="1200" dirty="0">
+                <a:solidFill>
+                  <a:srgbClr val="1C2833"/>
+                </a:solidFill>
+                <a:latin typeface="Arial" pitchFamily="34" charset="0"/>
+                <a:ea typeface="Arial" pitchFamily="34" charset="-122"/>
+                <a:cs typeface="Arial" pitchFamily="34" charset="-120"/>
+              </a:rPr>
+              <a:t>Gentle nodding of the knees is acceptable.</a:t>
+            </a:r>
+            <a:endParaRPr lang="en-US" sz="1200" dirty="0"/>
+          </a:p>
+        </p:txBody>
+      </p:sp>
+      <p:sp>
+        <p:nvSpPr>
+          <p:cNvPr id="6" name="Text 4"/>
           <p:cNvSpPr/>
           <p:nvPr/>
         </p:nvSpPr>
@@ -3663,7 +4023,7 @@
                 <a:ea typeface="Georgia" pitchFamily="34" charset="-122"/>
                 <a:cs typeface="Georgia" pitchFamily="34" charset="-120"/>
               </a:rPr>
-              <a:t>Teacher notes</a:t>
+              <a:t>Practice (25 min) — Walk through all five (cont.)</a:t>
             </a:r>
             <a:endParaRPr lang="en-US" sz="1800" dirty="0"/>
           </a:p>
@@ -3677,8 +4037,8 @@
         </p:nvSpPr>
         <p:spPr>
           <a:xfrm>
-            <a:off x="406301" y="870942"/>
-            <a:ext cx="8498026" cy="853083"/>
+            <a:off x="634901" y="883593"/>
+            <a:ext cx="8102798" cy="281880"/>
           </a:xfrm>
           <a:prstGeom prst="rect">
             <a:avLst/>
@@ -3690,13 +4050,31 @@
           <a:bodyPr wrap="square" lIns="0" tIns="0" rIns="0" bIns="0" rtlCol="0" anchor="t"/>
           <a:lstStyle/>
           <a:p>
-            <a:pPr algn="l" indent="0" marL="0">
-              <a:lnSpc>
-                <a:spcPts val="1680"/>
-              </a:lnSpc>
-              <a:spcBef>
-                <a:spcPts val="300"/>
-              </a:spcBef>
+            <a:pPr algn="l" marL="342900" indent="-342900">
+              <a:lnSpc>
+                <a:spcPts val="1620"/>
+              </a:lnSpc>
+              <a:spcAft>
+                <a:spcPts val="300"/>
+              </a:spcAft>
+              <a:buSzPct val="100000"/>
+              <a:buChar char="•"/>
+            </a:pPr>
+            <a:r>
+              <a:rPr lang="en-US" sz="1200" b="1" dirty="0">
+                <a:solidFill>
+                  <a:srgbClr val="1C2833"/>
+                </a:solidFill>
+                <a:latin typeface="Arial" pitchFamily="34" charset="0"/>
+                <a:ea typeface="Arial" pitchFamily="34" charset="-122"/>
+                <a:cs typeface="Arial" pitchFamily="34" charset="-120"/>
+              </a:rPr>
+              <a:t>Balāsana</a:t>
+            </a:r>
+            <a:pPr algn="l" indent="0" marL="0">
+              <a:lnSpc>
+                <a:spcPts val="1620"/>
+              </a:lnSpc>
               <a:spcAft>
                 <a:spcPts val="300"/>
               </a:spcAft>
@@ -3711,7 +4089,7 @@
                 <a:ea typeface="Arial" pitchFamily="34" charset="-122"/>
                 <a:cs typeface="Arial" pitchFamily="34" charset="-120"/>
               </a:rPr>
-              <a:t>– Walk around during baddha-koṇāsana. Many students try to force the knees down — this can strain the inner thigh. Cue "gentle, let gravity do the work." – Balāsana is restorative. If a student's hips don't allow them to sit on their heels, place a folded blanket between thighs and calves. – A handful of students will fidget through sukhāsana. Don't correct — let them feel the discomfort of stillness. That's part of the lesson.</a:t>
+              <a:t> — 90 sec rest pose.</a:t>
             </a:r>
             <a:endParaRPr lang="en-US" sz="1200" dirty="0"/>
           </a:p>
@@ -3720,6 +4098,124 @@
       <p:sp>
         <p:nvSpPr>
           <p:cNvPr id="5" name="Text 3"/>
+          <p:cNvSpPr/>
+          <p:nvPr/>
+        </p:nvSpPr>
+        <p:spPr>
+          <a:xfrm>
+            <a:off x="634901" y="1266974"/>
+            <a:ext cx="8102798" cy="1013222"/>
+          </a:xfrm>
+          <a:prstGeom prst="rect">
+            <a:avLst/>
+          </a:prstGeom>
+          <a:noFill/>
+          <a:ln/>
+        </p:spPr>
+        <p:txBody>
+          <a:bodyPr wrap="square" lIns="0" tIns="0" rIns="0" bIns="0" rtlCol="0" anchor="t"/>
+          <a:lstStyle/>
+          <a:p>
+            <a:pPr algn="l" marL="342900" indent="-342900">
+              <a:lnSpc>
+                <a:spcPts val="1620"/>
+              </a:lnSpc>
+              <a:spcAft>
+                <a:spcPts val="300"/>
+              </a:spcAft>
+              <a:buSzPct val="100000"/>
+              <a:buChar char="•"/>
+            </a:pPr>
+            <a:r>
+              <a:rPr lang="en-US" sz="1200" dirty="0">
+                <a:solidFill>
+                  <a:srgbClr val="1C2833"/>
+                </a:solidFill>
+                <a:latin typeface="Arial" pitchFamily="34" charset="0"/>
+                <a:ea typeface="Arial" pitchFamily="34" charset="-122"/>
+                <a:cs typeface="Arial" pitchFamily="34" charset="-120"/>
+              </a:rPr>
+              <a:t>From kneeling: knees apart, big toes touch.</a:t>
+            </a:r>
+            <a:endParaRPr lang="en-US" sz="1200" dirty="0"/>
+          </a:p>
+          <a:p>
+            <a:pPr algn="l" marL="342900" indent="-342900">
+              <a:lnSpc>
+                <a:spcPts val="1620"/>
+              </a:lnSpc>
+              <a:spcAft>
+                <a:spcPts val="300"/>
+              </a:spcAft>
+              <a:buSzPct val="100000"/>
+              <a:buChar char="•"/>
+            </a:pPr>
+            <a:r>
+              <a:rPr lang="en-US" sz="1200" dirty="0">
+                <a:solidFill>
+                  <a:srgbClr val="1C2833"/>
+                </a:solidFill>
+                <a:latin typeface="Arial" pitchFamily="34" charset="0"/>
+                <a:ea typeface="Arial" pitchFamily="34" charset="-122"/>
+                <a:cs typeface="Arial" pitchFamily="34" charset="-120"/>
+              </a:rPr>
+              <a:t>Fold forward, forehead on the mat (or stacked fists if forehead doesn't reach).</a:t>
+            </a:r>
+            <a:endParaRPr lang="en-US" sz="1200" dirty="0"/>
+          </a:p>
+          <a:p>
+            <a:pPr algn="l" marL="342900" indent="-342900">
+              <a:lnSpc>
+                <a:spcPts val="1620"/>
+              </a:lnSpc>
+              <a:spcAft>
+                <a:spcPts val="300"/>
+              </a:spcAft>
+              <a:buSzPct val="100000"/>
+              <a:buChar char="•"/>
+            </a:pPr>
+            <a:r>
+              <a:rPr lang="en-US" sz="1200" dirty="0">
+                <a:solidFill>
+                  <a:srgbClr val="1C2833"/>
+                </a:solidFill>
+                <a:latin typeface="Arial" pitchFamily="34" charset="0"/>
+                <a:ea typeface="Arial" pitchFamily="34" charset="-122"/>
+                <a:cs typeface="Arial" pitchFamily="34" charset="-120"/>
+              </a:rPr>
+              <a:t>Arms forward or alongside the body.</a:t>
+            </a:r>
+            <a:endParaRPr lang="en-US" sz="1200" dirty="0"/>
+          </a:p>
+          <a:p>
+            <a:pPr algn="l" marL="342900" indent="-342900">
+              <a:lnSpc>
+                <a:spcPts val="1620"/>
+              </a:lnSpc>
+              <a:spcAft>
+                <a:spcPts val="300"/>
+              </a:spcAft>
+              <a:buSzPct val="100000"/>
+              <a:buChar char="•"/>
+            </a:pPr>
+            <a:r>
+              <a:rPr lang="en-US" sz="1200" dirty="0">
+                <a:solidFill>
+                  <a:srgbClr val="1C2833"/>
+                </a:solidFill>
+                <a:latin typeface="Arial" pitchFamily="34" charset="0"/>
+                <a:ea typeface="Arial" pitchFamily="34" charset="-122"/>
+                <a:cs typeface="Arial" pitchFamily="34" charset="-120"/>
+              </a:rPr>
+              <a:t>Breathe slowly. This is rest, not effort.</a:t>
+            </a:r>
+            <a:endParaRPr lang="en-US" sz="1200" dirty="0"/>
+          </a:p>
+        </p:txBody>
+      </p:sp>
+      <p:sp>
+        <p:nvSpPr>
+          <p:cNvPr id="6" name="Text 4"/>
           <p:cNvSpPr/>
           <p:nvPr/>
         </p:nvSpPr>
@@ -3869,7 +4365,7 @@
                 <a:ea typeface="Georgia" pitchFamily="34" charset="-122"/>
                 <a:cs typeface="Georgia" pitchFamily="34" charset="-120"/>
               </a:rPr>
-              <a:t>Citation(s) used in this lesson</a:t>
+              <a:t>Practice (25 min) — Walk through all five (cont.)</a:t>
             </a:r>
             <a:endParaRPr lang="en-US" sz="1800" dirty="0"/>
           </a:p>
@@ -3883,8 +4379,8 @@
         </p:nvSpPr>
         <p:spPr>
           <a:xfrm>
-            <a:off x="406301" y="870942"/>
-            <a:ext cx="8498026" cy="426541"/>
+            <a:off x="634901" y="883593"/>
+            <a:ext cx="8102798" cy="281880"/>
           </a:xfrm>
           <a:prstGeom prst="rect">
             <a:avLst/>
@@ -3896,6 +4392,166 @@
           <a:bodyPr wrap="square" lIns="0" tIns="0" rIns="0" bIns="0" rtlCol="0" anchor="t"/>
           <a:lstStyle/>
           <a:p>
+            <a:pPr algn="l" marL="342900" indent="-342900">
+              <a:lnSpc>
+                <a:spcPts val="1620"/>
+              </a:lnSpc>
+              <a:spcAft>
+                <a:spcPts val="300"/>
+              </a:spcAft>
+              <a:buSzPct val="100000"/>
+              <a:buChar char="•"/>
+            </a:pPr>
+            <a:r>
+              <a:rPr lang="en-US" sz="1200" b="1" dirty="0">
+                <a:solidFill>
+                  <a:srgbClr val="1C2833"/>
+                </a:solidFill>
+                <a:latin typeface="Arial" pitchFamily="34" charset="0"/>
+                <a:ea typeface="Arial" pitchFamily="34" charset="-122"/>
+                <a:cs typeface="Arial" pitchFamily="34" charset="-120"/>
+              </a:rPr>
+              <a:t>Sukhāsana</a:t>
+            </a:r>
+            <a:pPr algn="l" indent="0" marL="0">
+              <a:lnSpc>
+                <a:spcPts val="1620"/>
+              </a:lnSpc>
+              <a:spcAft>
+                <a:spcPts val="300"/>
+              </a:spcAft>
+              <a:buNone/>
+            </a:pPr>
+            <a:r>
+              <a:rPr lang="en-US" sz="1200" dirty="0">
+                <a:solidFill>
+                  <a:srgbClr val="1C2833"/>
+                </a:solidFill>
+                <a:latin typeface="Arial" pitchFamily="34" charset="0"/>
+                <a:ea typeface="Arial" pitchFamily="34" charset="-122"/>
+                <a:cs typeface="Arial" pitchFamily="34" charset="-120"/>
+              </a:rPr>
+              <a:t> — 60 sec.</a:t>
+            </a:r>
+            <a:endParaRPr lang="en-US" sz="1200" dirty="0"/>
+          </a:p>
+        </p:txBody>
+      </p:sp>
+      <p:sp>
+        <p:nvSpPr>
+          <p:cNvPr id="5" name="Text 3"/>
+          <p:cNvSpPr/>
+          <p:nvPr/>
+        </p:nvSpPr>
+        <p:spPr>
+          <a:xfrm>
+            <a:off x="634901" y="1266974"/>
+            <a:ext cx="8102798" cy="769441"/>
+          </a:xfrm>
+          <a:prstGeom prst="rect">
+            <a:avLst/>
+          </a:prstGeom>
+          <a:noFill/>
+          <a:ln/>
+        </p:spPr>
+        <p:txBody>
+          <a:bodyPr wrap="square" lIns="0" tIns="0" rIns="0" bIns="0" rtlCol="0" anchor="t"/>
+          <a:lstStyle/>
+          <a:p>
+            <a:pPr algn="l" marL="342900" indent="-342900">
+              <a:lnSpc>
+                <a:spcPts val="1620"/>
+              </a:lnSpc>
+              <a:spcAft>
+                <a:spcPts val="300"/>
+              </a:spcAft>
+              <a:buSzPct val="100000"/>
+              <a:buChar char="•"/>
+            </a:pPr>
+            <a:r>
+              <a:rPr lang="en-US" sz="1200" dirty="0">
+                <a:solidFill>
+                  <a:srgbClr val="1C2833"/>
+                </a:solidFill>
+                <a:latin typeface="Arial" pitchFamily="34" charset="0"/>
+                <a:ea typeface="Arial" pitchFamily="34" charset="-122"/>
+                <a:cs typeface="Arial" pitchFamily="34" charset="-120"/>
+              </a:rPr>
+              <a:t>Sit cross-legged. Long spine.</a:t>
+            </a:r>
+            <a:endParaRPr lang="en-US" sz="1200" dirty="0"/>
+          </a:p>
+          <a:p>
+            <a:pPr algn="l" marL="342900" indent="-342900">
+              <a:lnSpc>
+                <a:spcPts val="1620"/>
+              </a:lnSpc>
+              <a:spcAft>
+                <a:spcPts val="300"/>
+              </a:spcAft>
+              <a:buSzPct val="100000"/>
+              <a:buChar char="•"/>
+            </a:pPr>
+            <a:r>
+              <a:rPr lang="en-US" sz="1200" dirty="0">
+                <a:solidFill>
+                  <a:srgbClr val="1C2833"/>
+                </a:solidFill>
+                <a:latin typeface="Arial" pitchFamily="34" charset="0"/>
+                <a:ea typeface="Arial" pitchFamily="34" charset="-122"/>
+                <a:cs typeface="Arial" pitchFamily="34" charset="-120"/>
+              </a:rPr>
+              <a:t>Hands on the knees, palms up or down.</a:t>
+            </a:r>
+            <a:endParaRPr lang="en-US" sz="1200" dirty="0"/>
+          </a:p>
+          <a:p>
+            <a:pPr algn="l" marL="342900" indent="-342900">
+              <a:lnSpc>
+                <a:spcPts val="1620"/>
+              </a:lnSpc>
+              <a:spcAft>
+                <a:spcPts val="300"/>
+              </a:spcAft>
+              <a:buSzPct val="100000"/>
+              <a:buChar char="•"/>
+            </a:pPr>
+            <a:r>
+              <a:rPr lang="en-US" sz="1200" dirty="0">
+                <a:solidFill>
+                  <a:srgbClr val="1C2833"/>
+                </a:solidFill>
+                <a:latin typeface="Arial" pitchFamily="34" charset="0"/>
+                <a:ea typeface="Arial" pitchFamily="34" charset="-122"/>
+                <a:cs typeface="Arial" pitchFamily="34" charset="-120"/>
+              </a:rPr>
+              <a:t>Eyes closed. 10 natural breaths.</a:t>
+            </a:r>
+            <a:endParaRPr lang="en-US" sz="1200" dirty="0"/>
+          </a:p>
+        </p:txBody>
+      </p:sp>
+      <p:sp>
+        <p:nvSpPr>
+          <p:cNvPr id="6" name="Text 4"/>
+          <p:cNvSpPr/>
+          <p:nvPr/>
+        </p:nvSpPr>
+        <p:spPr>
+          <a:xfrm>
+            <a:off x="406301" y="4434929"/>
+            <a:ext cx="8498026" cy="213271"/>
+          </a:xfrm>
+          <a:prstGeom prst="rect">
+            <a:avLst/>
+          </a:prstGeom>
+          <a:noFill/>
+          <a:ln/>
+        </p:spPr>
+        <p:txBody>
+          <a:bodyPr wrap="square" lIns="0" tIns="0" rIns="0" bIns="0" rtlCol="0" anchor="t"/>
+          <a:lstStyle/>
+          <a:p>
             <a:pPr algn="l" indent="0" marL="0">
               <a:lnSpc>
                 <a:spcPts val="1680"/>
@@ -3917,7 +4573,1588 @@
                 <a:ea typeface="Arial" pitchFamily="34" charset="-122"/>
                 <a:cs typeface="Arial" pitchFamily="34" charset="-120"/>
               </a:rPr>
-              <a:t>– No new RAG citations. Āsana descriptions reference standard practice (Iyengar 1966; teacher reference, not student-facing).</a:t>
+              <a:t>Middle ·  · IKS Curriculum</a:t>
+            </a:r>
+            <a:endParaRPr lang="en-US" sz="1200" dirty="0"/>
+          </a:p>
+        </p:txBody>
+      </p:sp>
+    </p:spTree>
+  </p:cSld>
+  <p:clrMapOvr>
+    <a:masterClrMapping/>
+  </p:clrMapOvr>
+</p:sld>
+</file>
+
+<file path=ppt/slides/slide15.xml><?xml version="1.0" encoding="utf-8"?>
+<p:sld xmlns:a="http://schemas.openxmlformats.org/drawingml/2006/main" xmlns:r="http://schemas.openxmlformats.org/officeDocument/2006/relationships" xmlns:p="http://schemas.openxmlformats.org/presentationml/2006/main">
+  <p:cSld name="Slide 15">
+    <p:bg>
+      <p:bgPr>
+        <a:solidFill>
+          <a:srgbClr val="FFFFFF"/>
+        </a:solidFill>
+      </p:bgPr>
+    </p:bg>
+    <p:spTree>
+      <p:nvGrpSpPr>
+        <p:cNvPr id="1" name=""/>
+        <p:cNvGrpSpPr/>
+        <p:nvPr/>
+      </p:nvGrpSpPr>
+      <p:grpSpPr>
+        <a:xfrm>
+          <a:off x="0" y="0"/>
+          <a:ext cx="0" cy="0"/>
+          <a:chOff x="0" y="0"/>
+          <a:chExt cx="0" cy="0"/>
+        </a:xfrm>
+      </p:grpSpPr>
+      <p:sp>
+        <p:nvSpPr>
+          <p:cNvPr id="2" name="Text 0"/>
+          <p:cNvSpPr/>
+          <p:nvPr/>
+        </p:nvSpPr>
+        <p:spPr>
+          <a:xfrm>
+            <a:off x="0" y="0"/>
+            <a:ext cx="9144000" cy="101501"/>
+          </a:xfrm>
+          <a:prstGeom prst="rect">
+            <a:avLst/>
+          </a:prstGeom>
+          <a:solidFill>
+            <a:srgbClr val="277884"/>
+          </a:solidFill>
+          <a:ln/>
+        </p:spPr>
+        <p:txBody>
+          <a:bodyPr wrap="square" rtlCol="0" anchor="ctr"/>
+          <a:lstStyle/>
+          <a:p>
+            <a:pPr indent="0" marL="0">
+              <a:buNone/>
+            </a:pPr>
+            <a:endParaRPr lang="en-US" dirty="0"/>
+          </a:p>
+        </p:txBody>
+      </p:sp>
+      <p:sp>
+        <p:nvSpPr>
+          <p:cNvPr id="3" name="Text 1"/>
+          <p:cNvSpPr/>
+          <p:nvPr/>
+        </p:nvSpPr>
+        <p:spPr>
+          <a:xfrm>
+            <a:off x="406301" y="457051"/>
+            <a:ext cx="8498026" cy="274290"/>
+          </a:xfrm>
+          <a:prstGeom prst="rect">
+            <a:avLst/>
+          </a:prstGeom>
+          <a:noFill/>
+          <a:ln/>
+        </p:spPr>
+        <p:txBody>
+          <a:bodyPr wrap="square" lIns="0" tIns="0" rIns="0" bIns="0" rtlCol="0" anchor="t"/>
+          <a:lstStyle/>
+          <a:p>
+            <a:pPr algn="l" indent="0" marL="0">
+              <a:lnSpc>
+                <a:spcPts val="2160"/>
+              </a:lnSpc>
+              <a:spcBef>
+                <a:spcPts val="600"/>
+              </a:spcBef>
+              <a:spcAft>
+                <a:spcPts val="800"/>
+              </a:spcAft>
+              <a:buNone/>
+            </a:pPr>
+            <a:r>
+              <a:rPr lang="en-US" sz="1800" b="1" dirty="0">
+                <a:solidFill>
+                  <a:srgbClr val="FE4447"/>
+                </a:solidFill>
+                <a:latin typeface="Georgia" pitchFamily="34" charset="0"/>
+                <a:ea typeface="Georgia" pitchFamily="34" charset="-122"/>
+                <a:cs typeface="Georgia" pitchFamily="34" charset="-120"/>
+              </a:rPr>
+              <a:t>Formative quiz (8 min)</a:t>
+            </a:r>
+            <a:endParaRPr lang="en-US" sz="1800" dirty="0"/>
+          </a:p>
+        </p:txBody>
+      </p:sp>
+      <p:sp>
+        <p:nvSpPr>
+          <p:cNvPr id="4" name="Text 2"/>
+          <p:cNvSpPr/>
+          <p:nvPr/>
+        </p:nvSpPr>
+        <p:spPr>
+          <a:xfrm>
+            <a:off x="634901" y="883593"/>
+            <a:ext cx="8102798" cy="300930"/>
+          </a:xfrm>
+          <a:prstGeom prst="rect">
+            <a:avLst/>
+          </a:prstGeom>
+          <a:noFill/>
+          <a:ln/>
+        </p:spPr>
+        <p:txBody>
+          <a:bodyPr wrap="square" lIns="0" tIns="0" rIns="0" bIns="0" rtlCol="0" anchor="t"/>
+          <a:lstStyle/>
+          <a:p>
+            <a:pPr algn="l" marL="342900" indent="-342900">
+              <a:lnSpc>
+                <a:spcPts val="1620"/>
+              </a:lnSpc>
+              <a:spcAft>
+                <a:spcPts val="300"/>
+              </a:spcAft>
+              <a:buSzPct val="100000"/>
+              <a:buChar char="•"/>
+            </a:pPr>
+            <a:r>
+              <a:rPr lang="en-US" sz="1200" dirty="0">
+                <a:solidFill>
+                  <a:srgbClr val="1C2833"/>
+                </a:solidFill>
+                <a:latin typeface="Arial" pitchFamily="34" charset="0"/>
+                <a:ea typeface="Arial" pitchFamily="34" charset="-122"/>
+                <a:cs typeface="Arial" pitchFamily="34" charset="-120"/>
+              </a:rPr>
+              <a:t>See </a:t>
+            </a:r>
+            <a:pPr algn="l" indent="0" marL="0">
+              <a:lnSpc>
+                <a:spcPts val="1620"/>
+              </a:lnSpc>
+              <a:spcAft>
+                <a:spcPts val="300"/>
+              </a:spcAft>
+              <a:buNone/>
+            </a:pPr>
+            <a:r>
+              <a:rPr lang="en-US" sz="1200" dirty="0">
+                <a:solidFill>
+                  <a:srgbClr val="1C2833"/>
+                </a:solidFill>
+                <a:latin typeface="Arial" pitchFamily="34" charset="0"/>
+                <a:ea typeface="Arial" pitchFamily="34" charset="-122"/>
+                <a:cs typeface="Arial" pitchFamily="34" charset="-120"/>
+              </a:rPr>
+              <a:t>quizzes/formative.md</a:t>
+            </a:r>
+            <a:pPr algn="l" indent="0" marL="0">
+              <a:lnSpc>
+                <a:spcPts val="1620"/>
+              </a:lnSpc>
+              <a:spcAft>
+                <a:spcPts val="300"/>
+              </a:spcAft>
+              <a:buNone/>
+            </a:pPr>
+            <a:r>
+              <a:rPr lang="en-US" sz="1200" dirty="0">
+                <a:solidFill>
+                  <a:srgbClr val="1C2833"/>
+                </a:solidFill>
+                <a:latin typeface="Arial" pitchFamily="34" charset="0"/>
+                <a:ea typeface="Arial" pitchFamily="34" charset="-122"/>
+                <a:cs typeface="Arial" pitchFamily="34" charset="-120"/>
+              </a:rPr>
+              <a:t> Part A — limb-matching from Day 2 + āsana-naming from Day 3.</a:t>
+            </a:r>
+            <a:endParaRPr lang="en-US" sz="1200" dirty="0"/>
+          </a:p>
+        </p:txBody>
+      </p:sp>
+      <p:sp>
+        <p:nvSpPr>
+          <p:cNvPr id="5" name="Text 3"/>
+          <p:cNvSpPr/>
+          <p:nvPr/>
+        </p:nvSpPr>
+        <p:spPr>
+          <a:xfrm>
+            <a:off x="406301" y="4434929"/>
+            <a:ext cx="8498026" cy="213271"/>
+          </a:xfrm>
+          <a:prstGeom prst="rect">
+            <a:avLst/>
+          </a:prstGeom>
+          <a:noFill/>
+          <a:ln/>
+        </p:spPr>
+        <p:txBody>
+          <a:bodyPr wrap="square" lIns="0" tIns="0" rIns="0" bIns="0" rtlCol="0" anchor="t"/>
+          <a:lstStyle/>
+          <a:p>
+            <a:pPr algn="l" indent="0" marL="0">
+              <a:lnSpc>
+                <a:spcPts val="1680"/>
+              </a:lnSpc>
+              <a:spcBef>
+                <a:spcPts val="300"/>
+              </a:spcBef>
+              <a:spcAft>
+                <a:spcPts val="300"/>
+              </a:spcAft>
+              <a:buNone/>
+            </a:pPr>
+            <a:r>
+              <a:rPr lang="en-US" sz="1200" dirty="0">
+                <a:solidFill>
+                  <a:srgbClr val="1C2833"/>
+                </a:solidFill>
+                <a:latin typeface="Arial" pitchFamily="34" charset="0"/>
+                <a:ea typeface="Arial" pitchFamily="34" charset="-122"/>
+                <a:cs typeface="Arial" pitchFamily="34" charset="-120"/>
+              </a:rPr>
+              <a:t>Middle ·  · IKS Curriculum</a:t>
+            </a:r>
+            <a:endParaRPr lang="en-US" sz="1200" dirty="0"/>
+          </a:p>
+        </p:txBody>
+      </p:sp>
+    </p:spTree>
+  </p:cSld>
+  <p:clrMapOvr>
+    <a:masterClrMapping/>
+  </p:clrMapOvr>
+</p:sld>
+</file>
+
+<file path=ppt/slides/slide16.xml><?xml version="1.0" encoding="utf-8"?>
+<p:sld xmlns:a="http://schemas.openxmlformats.org/drawingml/2006/main" xmlns:r="http://schemas.openxmlformats.org/officeDocument/2006/relationships" xmlns:p="http://schemas.openxmlformats.org/presentationml/2006/main">
+  <p:cSld name="Slide 16">
+    <p:bg>
+      <p:bgPr>
+        <a:solidFill>
+          <a:srgbClr val="FFFFFF"/>
+        </a:solidFill>
+      </p:bgPr>
+    </p:bg>
+    <p:spTree>
+      <p:nvGrpSpPr>
+        <p:cNvPr id="1" name=""/>
+        <p:cNvGrpSpPr/>
+        <p:nvPr/>
+      </p:nvGrpSpPr>
+      <p:grpSpPr>
+        <a:xfrm>
+          <a:off x="0" y="0"/>
+          <a:ext cx="0" cy="0"/>
+          <a:chOff x="0" y="0"/>
+          <a:chExt cx="0" cy="0"/>
+        </a:xfrm>
+      </p:grpSpPr>
+      <p:sp>
+        <p:nvSpPr>
+          <p:cNvPr id="2" name="Text 0"/>
+          <p:cNvSpPr/>
+          <p:nvPr/>
+        </p:nvSpPr>
+        <p:spPr>
+          <a:xfrm>
+            <a:off x="0" y="0"/>
+            <a:ext cx="9144000" cy="101501"/>
+          </a:xfrm>
+          <a:prstGeom prst="rect">
+            <a:avLst/>
+          </a:prstGeom>
+          <a:solidFill>
+            <a:srgbClr val="277884"/>
+          </a:solidFill>
+          <a:ln/>
+        </p:spPr>
+        <p:txBody>
+          <a:bodyPr wrap="square" rtlCol="0" anchor="ctr"/>
+          <a:lstStyle/>
+          <a:p>
+            <a:pPr indent="0" marL="0">
+              <a:buNone/>
+            </a:pPr>
+            <a:endParaRPr lang="en-US" dirty="0"/>
+          </a:p>
+        </p:txBody>
+      </p:sp>
+      <p:sp>
+        <p:nvSpPr>
+          <p:cNvPr id="3" name="Text 1"/>
+          <p:cNvSpPr/>
+          <p:nvPr/>
+        </p:nvSpPr>
+        <p:spPr>
+          <a:xfrm>
+            <a:off x="406301" y="457051"/>
+            <a:ext cx="8498026" cy="274290"/>
+          </a:xfrm>
+          <a:prstGeom prst="rect">
+            <a:avLst/>
+          </a:prstGeom>
+          <a:noFill/>
+          <a:ln/>
+        </p:spPr>
+        <p:txBody>
+          <a:bodyPr wrap="square" lIns="0" tIns="0" rIns="0" bIns="0" rtlCol="0" anchor="t"/>
+          <a:lstStyle/>
+          <a:p>
+            <a:pPr algn="l" indent="0" marL="0">
+              <a:lnSpc>
+                <a:spcPts val="2160"/>
+              </a:lnSpc>
+              <a:spcBef>
+                <a:spcPts val="600"/>
+              </a:spcBef>
+              <a:spcAft>
+                <a:spcPts val="800"/>
+              </a:spcAft>
+              <a:buNone/>
+            </a:pPr>
+            <a:r>
+              <a:rPr lang="en-US" sz="1800" b="1" dirty="0">
+                <a:solidFill>
+                  <a:srgbClr val="FE4447"/>
+                </a:solidFill>
+                <a:latin typeface="Georgia" pitchFamily="34" charset="0"/>
+                <a:ea typeface="Georgia" pitchFamily="34" charset="-122"/>
+                <a:cs typeface="Georgia" pitchFamily="34" charset="-120"/>
+              </a:rPr>
+              <a:t>Wrap-up (2 min)</a:t>
+            </a:r>
+            <a:endParaRPr lang="en-US" sz="1800" dirty="0"/>
+          </a:p>
+        </p:txBody>
+      </p:sp>
+      <p:sp>
+        <p:nvSpPr>
+          <p:cNvPr id="4" name="Text 2"/>
+          <p:cNvSpPr/>
+          <p:nvPr/>
+        </p:nvSpPr>
+        <p:spPr>
+          <a:xfrm>
+            <a:off x="634901" y="883593"/>
+            <a:ext cx="8102798" cy="731341"/>
+          </a:xfrm>
+          <a:prstGeom prst="rect">
+            <a:avLst/>
+          </a:prstGeom>
+          <a:noFill/>
+          <a:ln/>
+        </p:spPr>
+        <p:txBody>
+          <a:bodyPr wrap="square" lIns="0" tIns="0" rIns="0" bIns="0" rtlCol="0" anchor="t"/>
+          <a:lstStyle/>
+          <a:p>
+            <a:pPr algn="l" marL="342900" indent="-342900">
+              <a:lnSpc>
+                <a:spcPts val="1620"/>
+              </a:lnSpc>
+              <a:spcAft>
+                <a:spcPts val="300"/>
+              </a:spcAft>
+              <a:buSzPct val="100000"/>
+              <a:buChar char="•"/>
+            </a:pPr>
+            <a:r>
+              <a:rPr lang="en-US" sz="1200" dirty="0">
+                <a:solidFill>
+                  <a:srgbClr val="1C2833"/>
+                </a:solidFill>
+                <a:latin typeface="Arial" pitchFamily="34" charset="0"/>
+                <a:ea typeface="Arial" pitchFamily="34" charset="-122"/>
+                <a:cs typeface="Arial" pitchFamily="34" charset="-120"/>
+              </a:rPr>
+              <a:t>Question: </a:t>
+            </a:r>
+            <a:pPr algn="l" indent="0" marL="0">
+              <a:lnSpc>
+                <a:spcPts val="1620"/>
+              </a:lnSpc>
+              <a:spcAft>
+                <a:spcPts val="300"/>
+              </a:spcAft>
+              <a:buNone/>
+            </a:pPr>
+            <a:r>
+              <a:rPr lang="en-US" sz="1200" i="1" dirty="0">
+                <a:solidFill>
+                  <a:srgbClr val="1C2833"/>
+                </a:solidFill>
+                <a:latin typeface="Arial" pitchFamily="34" charset="0"/>
+                <a:ea typeface="Arial" pitchFamily="34" charset="-122"/>
+                <a:cs typeface="Arial" pitchFamily="34" charset="-120"/>
+              </a:rPr>
+              <a:t>"Which of the five did your body LIKE the most? Which felt hardest?"</a:t>
+            </a:r>
+            <a:pPr algn="l" indent="0" marL="0">
+              <a:lnSpc>
+                <a:spcPts val="1620"/>
+              </a:lnSpc>
+              <a:spcAft>
+                <a:spcPts val="300"/>
+              </a:spcAft>
+              <a:buNone/>
+            </a:pPr>
+            <a:r>
+              <a:rPr lang="en-US" sz="1200" dirty="0">
+                <a:solidFill>
+                  <a:srgbClr val="1C2833"/>
+                </a:solidFill>
+                <a:latin typeface="Arial" pitchFamily="34" charset="0"/>
+                <a:ea typeface="Arial" pitchFamily="34" charset="-122"/>
+                <a:cs typeface="Arial" pitchFamily="34" charset="-120"/>
+              </a:rPr>
+              <a:t> — students share with a neighbour for 30 sec each.</a:t>
+            </a:r>
+            <a:endParaRPr lang="en-US" sz="1200" dirty="0"/>
+          </a:p>
+          <a:p>
+            <a:pPr algn="l" marL="342900" indent="-342900">
+              <a:lnSpc>
+                <a:spcPts val="1620"/>
+              </a:lnSpc>
+              <a:spcAft>
+                <a:spcPts val="300"/>
+              </a:spcAft>
+              <a:buSzPct val="100000"/>
+              <a:buChar char="•"/>
+            </a:pPr>
+            <a:r>
+              <a:rPr lang="en-US" sz="1200" dirty="0">
+                <a:solidFill>
+                  <a:srgbClr val="1C2833"/>
+                </a:solidFill>
+                <a:latin typeface="Arial" pitchFamily="34" charset="0"/>
+                <a:ea typeface="Arial" pitchFamily="34" charset="-122"/>
+                <a:cs typeface="Arial" pitchFamily="34" charset="-120"/>
+              </a:rPr>
+              <a:t>Preview Day 4: </a:t>
+            </a:r>
+            <a:pPr algn="l" indent="0" marL="0">
+              <a:lnSpc>
+                <a:spcPts val="1620"/>
+              </a:lnSpc>
+              <a:spcAft>
+                <a:spcPts val="300"/>
+              </a:spcAft>
+              <a:buNone/>
+            </a:pPr>
+            <a:r>
+              <a:rPr lang="en-US" sz="1200" i="1" dirty="0">
+                <a:solidFill>
+                  <a:srgbClr val="1C2833"/>
+                </a:solidFill>
+                <a:latin typeface="Arial" pitchFamily="34" charset="0"/>
+                <a:ea typeface="Arial" pitchFamily="34" charset="-122"/>
+                <a:cs typeface="Arial" pitchFamily="34" charset="-120"/>
+              </a:rPr>
+              <a:t>"Tomorrow we begin Sūrya Namaskāra — the 12-pose sun salutation."</a:t>
+            </a:r>
+            <a:endParaRPr lang="en-US" sz="1200" dirty="0"/>
+          </a:p>
+        </p:txBody>
+      </p:sp>
+      <p:sp>
+        <p:nvSpPr>
+          <p:cNvPr id="5" name="Text 3"/>
+          <p:cNvSpPr/>
+          <p:nvPr/>
+        </p:nvSpPr>
+        <p:spPr>
+          <a:xfrm>
+            <a:off x="406301" y="4434929"/>
+            <a:ext cx="8498026" cy="213271"/>
+          </a:xfrm>
+          <a:prstGeom prst="rect">
+            <a:avLst/>
+          </a:prstGeom>
+          <a:noFill/>
+          <a:ln/>
+        </p:spPr>
+        <p:txBody>
+          <a:bodyPr wrap="square" lIns="0" tIns="0" rIns="0" bIns="0" rtlCol="0" anchor="t"/>
+          <a:lstStyle/>
+          <a:p>
+            <a:pPr algn="l" indent="0" marL="0">
+              <a:lnSpc>
+                <a:spcPts val="1680"/>
+              </a:lnSpc>
+              <a:spcBef>
+                <a:spcPts val="300"/>
+              </a:spcBef>
+              <a:spcAft>
+                <a:spcPts val="300"/>
+              </a:spcAft>
+              <a:buNone/>
+            </a:pPr>
+            <a:r>
+              <a:rPr lang="en-US" sz="1200" dirty="0">
+                <a:solidFill>
+                  <a:srgbClr val="1C2833"/>
+                </a:solidFill>
+                <a:latin typeface="Arial" pitchFamily="34" charset="0"/>
+                <a:ea typeface="Arial" pitchFamily="34" charset="-122"/>
+                <a:cs typeface="Arial" pitchFamily="34" charset="-120"/>
+              </a:rPr>
+              <a:t>Middle ·  · IKS Curriculum</a:t>
+            </a:r>
+            <a:endParaRPr lang="en-US" sz="1200" dirty="0"/>
+          </a:p>
+        </p:txBody>
+      </p:sp>
+    </p:spTree>
+  </p:cSld>
+  <p:clrMapOvr>
+    <a:masterClrMapping/>
+  </p:clrMapOvr>
+</p:sld>
+</file>
+
+<file path=ppt/slides/slide17.xml><?xml version="1.0" encoding="utf-8"?>
+<p:sld xmlns:a="http://schemas.openxmlformats.org/drawingml/2006/main" xmlns:r="http://schemas.openxmlformats.org/officeDocument/2006/relationships" xmlns:p="http://schemas.openxmlformats.org/presentationml/2006/main">
+  <p:cSld name="Slide 17">
+    <p:bg>
+      <p:bgPr>
+        <a:solidFill>
+          <a:srgbClr val="FFFFFF"/>
+        </a:solidFill>
+      </p:bgPr>
+    </p:bg>
+    <p:spTree>
+      <p:nvGrpSpPr>
+        <p:cNvPr id="1" name=""/>
+        <p:cNvGrpSpPr/>
+        <p:nvPr/>
+      </p:nvGrpSpPr>
+      <p:grpSpPr>
+        <a:xfrm>
+          <a:off x="0" y="0"/>
+          <a:ext cx="0" cy="0"/>
+          <a:chOff x="0" y="0"/>
+          <a:chExt cx="0" cy="0"/>
+        </a:xfrm>
+      </p:grpSpPr>
+      <p:sp>
+        <p:nvSpPr>
+          <p:cNvPr id="2" name="Text 0"/>
+          <p:cNvSpPr/>
+          <p:nvPr/>
+        </p:nvSpPr>
+        <p:spPr>
+          <a:xfrm>
+            <a:off x="0" y="0"/>
+            <a:ext cx="9144000" cy="101501"/>
+          </a:xfrm>
+          <a:prstGeom prst="rect">
+            <a:avLst/>
+          </a:prstGeom>
+          <a:solidFill>
+            <a:srgbClr val="277884"/>
+          </a:solidFill>
+          <a:ln/>
+        </p:spPr>
+        <p:txBody>
+          <a:bodyPr wrap="square" rtlCol="0" anchor="ctr"/>
+          <a:lstStyle/>
+          <a:p>
+            <a:pPr indent="0" marL="0">
+              <a:buNone/>
+            </a:pPr>
+            <a:endParaRPr lang="en-US" dirty="0"/>
+          </a:p>
+        </p:txBody>
+      </p:sp>
+      <p:sp>
+        <p:nvSpPr>
+          <p:cNvPr id="3" name="Text 1"/>
+          <p:cNvSpPr/>
+          <p:nvPr/>
+        </p:nvSpPr>
+        <p:spPr>
+          <a:xfrm>
+            <a:off x="406301" y="457051"/>
+            <a:ext cx="8498026" cy="274290"/>
+          </a:xfrm>
+          <a:prstGeom prst="rect">
+            <a:avLst/>
+          </a:prstGeom>
+          <a:noFill/>
+          <a:ln/>
+        </p:spPr>
+        <p:txBody>
+          <a:bodyPr wrap="square" lIns="0" tIns="0" rIns="0" bIns="0" rtlCol="0" anchor="t"/>
+          <a:lstStyle/>
+          <a:p>
+            <a:pPr algn="l" indent="0" marL="0">
+              <a:lnSpc>
+                <a:spcPts val="2160"/>
+              </a:lnSpc>
+              <a:spcBef>
+                <a:spcPts val="600"/>
+              </a:spcBef>
+              <a:spcAft>
+                <a:spcPts val="800"/>
+              </a:spcAft>
+              <a:buNone/>
+            </a:pPr>
+            <a:r>
+              <a:rPr lang="en-US" sz="1800" b="1" dirty="0">
+                <a:solidFill>
+                  <a:srgbClr val="FE4447"/>
+                </a:solidFill>
+                <a:latin typeface="Georgia" pitchFamily="34" charset="0"/>
+                <a:ea typeface="Georgia" pitchFamily="34" charset="-122"/>
+                <a:cs typeface="Georgia" pitchFamily="34" charset="-120"/>
+              </a:rPr>
+              <a:t>Student-facing content</a:t>
+            </a:r>
+            <a:endParaRPr lang="en-US" sz="1800" dirty="0"/>
+          </a:p>
+        </p:txBody>
+      </p:sp>
+      <p:sp>
+        <p:nvSpPr>
+          <p:cNvPr id="4" name="Text 2"/>
+          <p:cNvSpPr/>
+          <p:nvPr/>
+        </p:nvSpPr>
+        <p:spPr>
+          <a:xfrm>
+            <a:off x="406301" y="883593"/>
+            <a:ext cx="8331398" cy="1612106"/>
+          </a:xfrm>
+          <a:prstGeom prst="rect">
+            <a:avLst/>
+          </a:prstGeom>
+          <a:solidFill>
+            <a:srgbClr val="F4F8F9"/>
+          </a:solidFill>
+          <a:ln/>
+        </p:spPr>
+        <p:txBody>
+          <a:bodyPr wrap="square" rtlCol="0" anchor="ctr"/>
+          <a:lstStyle/>
+          <a:p>
+            <a:pPr indent="0" marL="0">
+              <a:buNone/>
+            </a:pPr>
+            <a:endParaRPr lang="en-US" dirty="0"/>
+          </a:p>
+        </p:txBody>
+      </p:sp>
+      <p:sp>
+        <p:nvSpPr>
+          <p:cNvPr id="5" name="Shape 3"/>
+          <p:cNvSpPr/>
+          <p:nvPr/>
+        </p:nvSpPr>
+        <p:spPr>
+          <a:xfrm>
+            <a:off x="434876" y="883593"/>
+            <a:ext cx="0" cy="1612106"/>
+          </a:xfrm>
+          <a:prstGeom prst="line">
+            <a:avLst/>
+          </a:prstGeom>
+          <a:noFill/>
+          <a:ln w="57150">
+            <a:solidFill>
+              <a:srgbClr val="FE4447"/>
+            </a:solidFill>
+            <a:prstDash val="solid"/>
+          </a:ln>
+        </p:spPr>
+      </p:sp>
+      <p:sp>
+        <p:nvSpPr>
+          <p:cNvPr id="6" name="Text 4"/>
+          <p:cNvSpPr/>
+          <p:nvPr/>
+        </p:nvSpPr>
+        <p:spPr>
+          <a:xfrm>
+            <a:off x="692051" y="1074093"/>
+            <a:ext cx="7973389" cy="230981"/>
+          </a:xfrm>
+          <a:prstGeom prst="rect">
+            <a:avLst/>
+          </a:prstGeom>
+          <a:noFill/>
+          <a:ln/>
+        </p:spPr>
+        <p:txBody>
+          <a:bodyPr wrap="square" lIns="0" tIns="0" rIns="0" bIns="0" rtlCol="0" anchor="t"/>
+          <a:lstStyle/>
+          <a:p>
+            <a:pPr algn="l" indent="0" marL="0">
+              <a:lnSpc>
+                <a:spcPts val="1820"/>
+              </a:lnSpc>
+              <a:spcBef>
+                <a:spcPts val="300"/>
+              </a:spcBef>
+              <a:spcAft>
+                <a:spcPts val="300"/>
+              </a:spcAft>
+              <a:buNone/>
+            </a:pPr>
+            <a:r>
+              <a:rPr lang="en-US" sz="1300" b="1" i="1" dirty="0">
+                <a:solidFill>
+                  <a:srgbClr val="1C2833"/>
+                </a:solidFill>
+                <a:latin typeface="Georgia" pitchFamily="34" charset="0"/>
+                <a:ea typeface="Georgia" pitchFamily="34" charset="-122"/>
+                <a:cs typeface="Georgia" pitchFamily="34" charset="-120"/>
+              </a:rPr>
+              <a:t>Five Foundational Āsanas</a:t>
+            </a:r>
+            <a:endParaRPr lang="en-US" sz="1300" dirty="0"/>
+          </a:p>
+        </p:txBody>
+      </p:sp>
+      <p:sp>
+        <p:nvSpPr>
+          <p:cNvPr id="7" name="Text 5"/>
+          <p:cNvSpPr/>
+          <p:nvPr/>
+        </p:nvSpPr>
+        <p:spPr>
+          <a:xfrm>
+            <a:off x="692051" y="1343174"/>
+            <a:ext cx="7973389" cy="692944"/>
+          </a:xfrm>
+          <a:prstGeom prst="rect">
+            <a:avLst/>
+          </a:prstGeom>
+          <a:noFill/>
+          <a:ln/>
+        </p:spPr>
+        <p:txBody>
+          <a:bodyPr wrap="square" lIns="0" tIns="0" rIns="0" bIns="0" rtlCol="0" anchor="t"/>
+          <a:lstStyle/>
+          <a:p>
+            <a:pPr algn="l" indent="0" marL="0">
+              <a:lnSpc>
+                <a:spcPts val="1820"/>
+              </a:lnSpc>
+              <a:spcBef>
+                <a:spcPts val="300"/>
+              </a:spcBef>
+              <a:spcAft>
+                <a:spcPts val="300"/>
+              </a:spcAft>
+              <a:buNone/>
+            </a:pPr>
+            <a:r>
+              <a:rPr lang="en-US" sz="1300" dirty="0">
+                <a:solidFill>
+                  <a:srgbClr val="1C2833"/>
+                </a:solidFill>
+                <a:latin typeface="Georgia" pitchFamily="34" charset="0"/>
+                <a:ea typeface="Georgia" pitchFamily="34" charset="-122"/>
+                <a:cs typeface="Georgia" pitchFamily="34" charset="-120"/>
+              </a:rPr>
+              <a:t>| # | Sanskrit | Type | What it does | |---|----------|------|---------------| | 1 | </a:t>
+            </a:r>
+            <a:pPr algn="l" indent="0" marL="0">
+              <a:lnSpc>
+                <a:spcPts val="1820"/>
+              </a:lnSpc>
+              <a:spcBef>
+                <a:spcPts val="300"/>
+              </a:spcBef>
+              <a:spcAft>
+                <a:spcPts val="300"/>
+              </a:spcAft>
+              <a:buNone/>
+            </a:pPr>
+            <a:r>
+              <a:rPr lang="en-US" sz="1300" i="1" dirty="0">
+                <a:solidFill>
+                  <a:srgbClr val="1C2833"/>
+                </a:solidFill>
+                <a:latin typeface="Georgia" pitchFamily="34" charset="0"/>
+                <a:ea typeface="Georgia" pitchFamily="34" charset="-122"/>
+                <a:cs typeface="Georgia" pitchFamily="34" charset="-120"/>
+              </a:rPr>
+              <a:t>tāḍāsana</a:t>
+            </a:r>
+            <a:pPr algn="l" indent="0" marL="0">
+              <a:lnSpc>
+                <a:spcPts val="1820"/>
+              </a:lnSpc>
+              <a:spcBef>
+                <a:spcPts val="300"/>
+              </a:spcBef>
+              <a:spcAft>
+                <a:spcPts val="300"/>
+              </a:spcAft>
+              <a:buNone/>
+            </a:pPr>
+            <a:r>
+              <a:rPr lang="en-US" sz="1300" dirty="0">
+                <a:solidFill>
+                  <a:srgbClr val="1C2833"/>
+                </a:solidFill>
+                <a:latin typeface="Georgia" pitchFamily="34" charset="0"/>
+                <a:ea typeface="Georgia" pitchFamily="34" charset="-122"/>
+                <a:cs typeface="Georgia" pitchFamily="34" charset="-120"/>
+              </a:rPr>
+              <a:t> | standing | posture foundation | | 2 | </a:t>
+            </a:r>
+            <a:pPr algn="l" indent="0" marL="0">
+              <a:lnSpc>
+                <a:spcPts val="1820"/>
+              </a:lnSpc>
+              <a:spcBef>
+                <a:spcPts val="300"/>
+              </a:spcBef>
+              <a:spcAft>
+                <a:spcPts val="300"/>
+              </a:spcAft>
+              <a:buNone/>
+            </a:pPr>
+            <a:r>
+              <a:rPr lang="en-US" sz="1300" i="1" dirty="0">
+                <a:solidFill>
+                  <a:srgbClr val="1C2833"/>
+                </a:solidFill>
+                <a:latin typeface="Georgia" pitchFamily="34" charset="0"/>
+                <a:ea typeface="Georgia" pitchFamily="34" charset="-122"/>
+                <a:cs typeface="Georgia" pitchFamily="34" charset="-120"/>
+              </a:rPr>
+              <a:t>vṛkṣāsana</a:t>
+            </a:r>
+            <a:pPr algn="l" indent="0" marL="0">
+              <a:lnSpc>
+                <a:spcPts val="1820"/>
+              </a:lnSpc>
+              <a:spcBef>
+                <a:spcPts val="300"/>
+              </a:spcBef>
+              <a:spcAft>
+                <a:spcPts val="300"/>
+              </a:spcAft>
+              <a:buNone/>
+            </a:pPr>
+            <a:r>
+              <a:rPr lang="en-US" sz="1300" dirty="0">
+                <a:solidFill>
+                  <a:srgbClr val="1C2833"/>
+                </a:solidFill>
+                <a:latin typeface="Georgia" pitchFamily="34" charset="0"/>
+                <a:ea typeface="Georgia" pitchFamily="34" charset="-122"/>
+                <a:cs typeface="Georgia" pitchFamily="34" charset="-120"/>
+              </a:rPr>
+              <a:t> | balance | leg strength, focus | | 3 | </a:t>
+            </a:r>
+            <a:pPr algn="l" indent="0" marL="0">
+              <a:lnSpc>
+                <a:spcPts val="1820"/>
+              </a:lnSpc>
+              <a:spcBef>
+                <a:spcPts val="300"/>
+              </a:spcBef>
+              <a:spcAft>
+                <a:spcPts val="300"/>
+              </a:spcAft>
+              <a:buNone/>
+            </a:pPr>
+            <a:r>
+              <a:rPr lang="en-US" sz="1300" i="1" dirty="0">
+                <a:solidFill>
+                  <a:srgbClr val="1C2833"/>
+                </a:solidFill>
+                <a:latin typeface="Georgia" pitchFamily="34" charset="0"/>
+                <a:ea typeface="Georgia" pitchFamily="34" charset="-122"/>
+                <a:cs typeface="Georgia" pitchFamily="34" charset="-120"/>
+              </a:rPr>
+              <a:t>baddha-koṇāsana</a:t>
+            </a:r>
+            <a:pPr algn="l" indent="0" marL="0">
+              <a:lnSpc>
+                <a:spcPts val="1820"/>
+              </a:lnSpc>
+              <a:spcBef>
+                <a:spcPts val="300"/>
+              </a:spcBef>
+              <a:spcAft>
+                <a:spcPts val="300"/>
+              </a:spcAft>
+              <a:buNone/>
+            </a:pPr>
+            <a:r>
+              <a:rPr lang="en-US" sz="1300" dirty="0">
+                <a:solidFill>
+                  <a:srgbClr val="1C2833"/>
+                </a:solidFill>
+                <a:latin typeface="Georgia" pitchFamily="34" charset="0"/>
+                <a:ea typeface="Georgia" pitchFamily="34" charset="-122"/>
+                <a:cs typeface="Georgia" pitchFamily="34" charset="-120"/>
+              </a:rPr>
+              <a:t> | seated | hip opener | | 4 | </a:t>
+            </a:r>
+            <a:pPr algn="l" indent="0" marL="0">
+              <a:lnSpc>
+                <a:spcPts val="1820"/>
+              </a:lnSpc>
+              <a:spcBef>
+                <a:spcPts val="300"/>
+              </a:spcBef>
+              <a:spcAft>
+                <a:spcPts val="300"/>
+              </a:spcAft>
+              <a:buNone/>
+            </a:pPr>
+            <a:r>
+              <a:rPr lang="en-US" sz="1300" i="1" dirty="0">
+                <a:solidFill>
+                  <a:srgbClr val="1C2833"/>
+                </a:solidFill>
+                <a:latin typeface="Georgia" pitchFamily="34" charset="0"/>
+                <a:ea typeface="Georgia" pitchFamily="34" charset="-122"/>
+                <a:cs typeface="Georgia" pitchFamily="34" charset="-120"/>
+              </a:rPr>
+              <a:t>balāsana</a:t>
+            </a:r>
+            <a:pPr algn="l" indent="0" marL="0">
+              <a:lnSpc>
+                <a:spcPts val="1820"/>
+              </a:lnSpc>
+              <a:spcBef>
+                <a:spcPts val="300"/>
+              </a:spcBef>
+              <a:spcAft>
+                <a:spcPts val="300"/>
+              </a:spcAft>
+              <a:buNone/>
+            </a:pPr>
+            <a:r>
+              <a:rPr lang="en-US" sz="1300" dirty="0">
+                <a:solidFill>
+                  <a:srgbClr val="1C2833"/>
+                </a:solidFill>
+                <a:latin typeface="Georgia" pitchFamily="34" charset="0"/>
+                <a:ea typeface="Georgia" pitchFamily="34" charset="-122"/>
+                <a:cs typeface="Georgia" pitchFamily="34" charset="-120"/>
+              </a:rPr>
+              <a:t> | rest | calming, back release | | 5 | </a:t>
+            </a:r>
+            <a:pPr algn="l" indent="0" marL="0">
+              <a:lnSpc>
+                <a:spcPts val="1820"/>
+              </a:lnSpc>
+              <a:spcBef>
+                <a:spcPts val="300"/>
+              </a:spcBef>
+              <a:spcAft>
+                <a:spcPts val="300"/>
+              </a:spcAft>
+              <a:buNone/>
+            </a:pPr>
+            <a:r>
+              <a:rPr lang="en-US" sz="1300" i="1" dirty="0">
+                <a:solidFill>
+                  <a:srgbClr val="1C2833"/>
+                </a:solidFill>
+                <a:latin typeface="Georgia" pitchFamily="34" charset="0"/>
+                <a:ea typeface="Georgia" pitchFamily="34" charset="-122"/>
+                <a:cs typeface="Georgia" pitchFamily="34" charset="-120"/>
+              </a:rPr>
+              <a:t>sukhāsana</a:t>
+            </a:r>
+            <a:pPr algn="l" indent="0" marL="0">
+              <a:lnSpc>
+                <a:spcPts val="1820"/>
+              </a:lnSpc>
+              <a:spcBef>
+                <a:spcPts val="300"/>
+              </a:spcBef>
+              <a:spcAft>
+                <a:spcPts val="300"/>
+              </a:spcAft>
+              <a:buNone/>
+            </a:pPr>
+            <a:r>
+              <a:rPr lang="en-US" sz="1300" dirty="0">
+                <a:solidFill>
+                  <a:srgbClr val="1C2833"/>
+                </a:solidFill>
+                <a:latin typeface="Georgia" pitchFamily="34" charset="0"/>
+                <a:ea typeface="Georgia" pitchFamily="34" charset="-122"/>
+                <a:cs typeface="Georgia" pitchFamily="34" charset="-120"/>
+              </a:rPr>
+              <a:t> | seated | foundation for breath practice |</a:t>
+            </a:r>
+            <a:endParaRPr lang="en-US" sz="1300" dirty="0"/>
+          </a:p>
+        </p:txBody>
+      </p:sp>
+      <p:sp>
+        <p:nvSpPr>
+          <p:cNvPr id="8" name="Text 6"/>
+          <p:cNvSpPr/>
+          <p:nvPr/>
+        </p:nvSpPr>
+        <p:spPr>
+          <a:xfrm>
+            <a:off x="692051" y="2074218"/>
+            <a:ext cx="7973389" cy="230981"/>
+          </a:xfrm>
+          <a:prstGeom prst="rect">
+            <a:avLst/>
+          </a:prstGeom>
+          <a:noFill/>
+          <a:ln/>
+        </p:spPr>
+        <p:txBody>
+          <a:bodyPr wrap="square" lIns="0" tIns="0" rIns="0" bIns="0" rtlCol="0" anchor="t"/>
+          <a:lstStyle/>
+          <a:p>
+            <a:pPr algn="l" indent="0" marL="0">
+              <a:lnSpc>
+                <a:spcPts val="1820"/>
+              </a:lnSpc>
+              <a:spcBef>
+                <a:spcPts val="300"/>
+              </a:spcBef>
+              <a:spcAft>
+                <a:spcPts val="300"/>
+              </a:spcAft>
+              <a:buNone/>
+            </a:pPr>
+            <a:r>
+              <a:rPr lang="en-US" sz="1300" i="1" dirty="0">
+                <a:solidFill>
+                  <a:srgbClr val="1C2833"/>
+                </a:solidFill>
+                <a:latin typeface="Georgia" pitchFamily="34" charset="0"/>
+                <a:ea typeface="Georgia" pitchFamily="34" charset="-122"/>
+                <a:cs typeface="Georgia" pitchFamily="34" charset="-120"/>
+              </a:rPr>
+              <a:t>All five are safe to practise at home, daily, no equipment needed.</a:t>
+            </a:r>
+            <a:endParaRPr lang="en-US" sz="1300" dirty="0"/>
+          </a:p>
+        </p:txBody>
+      </p:sp>
+      <p:sp>
+        <p:nvSpPr>
+          <p:cNvPr id="9" name="Text 7"/>
+          <p:cNvSpPr/>
+          <p:nvPr/>
+        </p:nvSpPr>
+        <p:spPr>
+          <a:xfrm>
+            <a:off x="406301" y="4434929"/>
+            <a:ext cx="8498026" cy="213271"/>
+          </a:xfrm>
+          <a:prstGeom prst="rect">
+            <a:avLst/>
+          </a:prstGeom>
+          <a:noFill/>
+          <a:ln/>
+        </p:spPr>
+        <p:txBody>
+          <a:bodyPr wrap="square" lIns="0" tIns="0" rIns="0" bIns="0" rtlCol="0" anchor="t"/>
+          <a:lstStyle/>
+          <a:p>
+            <a:pPr algn="l" indent="0" marL="0">
+              <a:lnSpc>
+                <a:spcPts val="1680"/>
+              </a:lnSpc>
+              <a:spcBef>
+                <a:spcPts val="300"/>
+              </a:spcBef>
+              <a:spcAft>
+                <a:spcPts val="300"/>
+              </a:spcAft>
+              <a:buNone/>
+            </a:pPr>
+            <a:r>
+              <a:rPr lang="en-US" sz="1200" dirty="0">
+                <a:solidFill>
+                  <a:srgbClr val="1C2833"/>
+                </a:solidFill>
+                <a:latin typeface="Arial" pitchFamily="34" charset="0"/>
+                <a:ea typeface="Arial" pitchFamily="34" charset="-122"/>
+                <a:cs typeface="Arial" pitchFamily="34" charset="-120"/>
+              </a:rPr>
+              <a:t>Middle ·  · IKS Curriculum</a:t>
+            </a:r>
+            <a:endParaRPr lang="en-US" sz="1200" dirty="0"/>
+          </a:p>
+        </p:txBody>
+      </p:sp>
+    </p:spTree>
+  </p:cSld>
+  <p:clrMapOvr>
+    <a:masterClrMapping/>
+  </p:clrMapOvr>
+</p:sld>
+</file>
+
+<file path=ppt/slides/slide18.xml><?xml version="1.0" encoding="utf-8"?>
+<p:sld xmlns:a="http://schemas.openxmlformats.org/drawingml/2006/main" xmlns:r="http://schemas.openxmlformats.org/officeDocument/2006/relationships" xmlns:p="http://schemas.openxmlformats.org/presentationml/2006/main">
+  <p:cSld name="Slide 18">
+    <p:bg>
+      <p:bgPr>
+        <a:solidFill>
+          <a:srgbClr val="FFFFFF"/>
+        </a:solidFill>
+      </p:bgPr>
+    </p:bg>
+    <p:spTree>
+      <p:nvGrpSpPr>
+        <p:cNvPr id="1" name=""/>
+        <p:cNvGrpSpPr/>
+        <p:nvPr/>
+      </p:nvGrpSpPr>
+      <p:grpSpPr>
+        <a:xfrm>
+          <a:off x="0" y="0"/>
+          <a:ext cx="0" cy="0"/>
+          <a:chOff x="0" y="0"/>
+          <a:chExt cx="0" cy="0"/>
+        </a:xfrm>
+      </p:grpSpPr>
+      <p:sp>
+        <p:nvSpPr>
+          <p:cNvPr id="2" name="Text 0"/>
+          <p:cNvSpPr/>
+          <p:nvPr/>
+        </p:nvSpPr>
+        <p:spPr>
+          <a:xfrm>
+            <a:off x="0" y="0"/>
+            <a:ext cx="9144000" cy="101501"/>
+          </a:xfrm>
+          <a:prstGeom prst="rect">
+            <a:avLst/>
+          </a:prstGeom>
+          <a:solidFill>
+            <a:srgbClr val="277884"/>
+          </a:solidFill>
+          <a:ln/>
+        </p:spPr>
+        <p:txBody>
+          <a:bodyPr wrap="square" rtlCol="0" anchor="ctr"/>
+          <a:lstStyle/>
+          <a:p>
+            <a:pPr indent="0" marL="0">
+              <a:buNone/>
+            </a:pPr>
+            <a:endParaRPr lang="en-US" dirty="0"/>
+          </a:p>
+        </p:txBody>
+      </p:sp>
+      <p:sp>
+        <p:nvSpPr>
+          <p:cNvPr id="3" name="Text 1"/>
+          <p:cNvSpPr/>
+          <p:nvPr/>
+        </p:nvSpPr>
+        <p:spPr>
+          <a:xfrm>
+            <a:off x="406301" y="457051"/>
+            <a:ext cx="8498026" cy="274290"/>
+          </a:xfrm>
+          <a:prstGeom prst="rect">
+            <a:avLst/>
+          </a:prstGeom>
+          <a:noFill/>
+          <a:ln/>
+        </p:spPr>
+        <p:txBody>
+          <a:bodyPr wrap="square" lIns="0" tIns="0" rIns="0" bIns="0" rtlCol="0" anchor="t"/>
+          <a:lstStyle/>
+          <a:p>
+            <a:pPr algn="l" indent="0" marL="0">
+              <a:lnSpc>
+                <a:spcPts val="2160"/>
+              </a:lnSpc>
+              <a:spcBef>
+                <a:spcPts val="600"/>
+              </a:spcBef>
+              <a:spcAft>
+                <a:spcPts val="800"/>
+              </a:spcAft>
+              <a:buNone/>
+            </a:pPr>
+            <a:r>
+              <a:rPr lang="en-US" sz="1800" b="1" dirty="0">
+                <a:solidFill>
+                  <a:srgbClr val="FE4447"/>
+                </a:solidFill>
+                <a:latin typeface="Georgia" pitchFamily="34" charset="0"/>
+                <a:ea typeface="Georgia" pitchFamily="34" charset="-122"/>
+                <a:cs typeface="Georgia" pitchFamily="34" charset="-120"/>
+              </a:rPr>
+              <a:t>Homework</a:t>
+            </a:r>
+            <a:endParaRPr lang="en-US" sz="1800" dirty="0"/>
+          </a:p>
+        </p:txBody>
+      </p:sp>
+      <p:sp>
+        <p:nvSpPr>
+          <p:cNvPr id="4" name="Text 2"/>
+          <p:cNvSpPr/>
+          <p:nvPr/>
+        </p:nvSpPr>
+        <p:spPr>
+          <a:xfrm>
+            <a:off x="634901" y="883593"/>
+            <a:ext cx="8102798" cy="487561"/>
+          </a:xfrm>
+          <a:prstGeom prst="rect">
+            <a:avLst/>
+          </a:prstGeom>
+          <a:noFill/>
+          <a:ln/>
+        </p:spPr>
+        <p:txBody>
+          <a:bodyPr wrap="square" lIns="0" tIns="0" rIns="0" bIns="0" rtlCol="0" anchor="t"/>
+          <a:lstStyle/>
+          <a:p>
+            <a:pPr algn="l" marL="342900" indent="-342900">
+              <a:lnSpc>
+                <a:spcPts val="1620"/>
+              </a:lnSpc>
+              <a:spcAft>
+                <a:spcPts val="300"/>
+              </a:spcAft>
+              <a:buSzPct val="100000"/>
+              <a:buChar char="•"/>
+            </a:pPr>
+            <a:r>
+              <a:rPr lang="en-US" sz="1200" dirty="0">
+                <a:solidFill>
+                  <a:srgbClr val="1C2833"/>
+                </a:solidFill>
+                <a:latin typeface="Arial" pitchFamily="34" charset="0"/>
+                <a:ea typeface="Arial" pitchFamily="34" charset="-122"/>
+                <a:cs typeface="Arial" pitchFamily="34" charset="-120"/>
+              </a:rPr>
+              <a:t>Choose 3 of the 5 āsanas. Practise them for 5 minutes before bed tonight. Note in your workbook how you felt before vs. after.</a:t>
+            </a:r>
+            <a:endParaRPr lang="en-US" sz="1200" dirty="0"/>
+          </a:p>
+        </p:txBody>
+      </p:sp>
+      <p:sp>
+        <p:nvSpPr>
+          <p:cNvPr id="5" name="Text 3"/>
+          <p:cNvSpPr/>
+          <p:nvPr/>
+        </p:nvSpPr>
+        <p:spPr>
+          <a:xfrm>
+            <a:off x="406301" y="4434929"/>
+            <a:ext cx="8498026" cy="213271"/>
+          </a:xfrm>
+          <a:prstGeom prst="rect">
+            <a:avLst/>
+          </a:prstGeom>
+          <a:noFill/>
+          <a:ln/>
+        </p:spPr>
+        <p:txBody>
+          <a:bodyPr wrap="square" lIns="0" tIns="0" rIns="0" bIns="0" rtlCol="0" anchor="t"/>
+          <a:lstStyle/>
+          <a:p>
+            <a:pPr algn="l" indent="0" marL="0">
+              <a:lnSpc>
+                <a:spcPts val="1680"/>
+              </a:lnSpc>
+              <a:spcBef>
+                <a:spcPts val="300"/>
+              </a:spcBef>
+              <a:spcAft>
+                <a:spcPts val="300"/>
+              </a:spcAft>
+              <a:buNone/>
+            </a:pPr>
+            <a:r>
+              <a:rPr lang="en-US" sz="1200" dirty="0">
+                <a:solidFill>
+                  <a:srgbClr val="1C2833"/>
+                </a:solidFill>
+                <a:latin typeface="Arial" pitchFamily="34" charset="0"/>
+                <a:ea typeface="Arial" pitchFamily="34" charset="-122"/>
+                <a:cs typeface="Arial" pitchFamily="34" charset="-120"/>
+              </a:rPr>
+              <a:t>Middle ·  · IKS Curriculum</a:t>
+            </a:r>
+            <a:endParaRPr lang="en-US" sz="1200" dirty="0"/>
+          </a:p>
+        </p:txBody>
+      </p:sp>
+    </p:spTree>
+  </p:cSld>
+  <p:clrMapOvr>
+    <a:masterClrMapping/>
+  </p:clrMapOvr>
+</p:sld>
+</file>
+
+<file path=ppt/slides/slide19.xml><?xml version="1.0" encoding="utf-8"?>
+<p:sld xmlns:a="http://schemas.openxmlformats.org/drawingml/2006/main" xmlns:r="http://schemas.openxmlformats.org/officeDocument/2006/relationships" xmlns:p="http://schemas.openxmlformats.org/presentationml/2006/main">
+  <p:cSld name="Slide 19">
+    <p:bg>
+      <p:bgPr>
+        <a:solidFill>
+          <a:srgbClr val="FFFFFF"/>
+        </a:solidFill>
+      </p:bgPr>
+    </p:bg>
+    <p:spTree>
+      <p:nvGrpSpPr>
+        <p:cNvPr id="1" name=""/>
+        <p:cNvGrpSpPr/>
+        <p:nvPr/>
+      </p:nvGrpSpPr>
+      <p:grpSpPr>
+        <a:xfrm>
+          <a:off x="0" y="0"/>
+          <a:ext cx="0" cy="0"/>
+          <a:chOff x="0" y="0"/>
+          <a:chExt cx="0" cy="0"/>
+        </a:xfrm>
+      </p:grpSpPr>
+      <p:sp>
+        <p:nvSpPr>
+          <p:cNvPr id="2" name="Text 0"/>
+          <p:cNvSpPr/>
+          <p:nvPr/>
+        </p:nvSpPr>
+        <p:spPr>
+          <a:xfrm>
+            <a:off x="0" y="0"/>
+            <a:ext cx="9144000" cy="101501"/>
+          </a:xfrm>
+          <a:prstGeom prst="rect">
+            <a:avLst/>
+          </a:prstGeom>
+          <a:solidFill>
+            <a:srgbClr val="277884"/>
+          </a:solidFill>
+          <a:ln/>
+        </p:spPr>
+        <p:txBody>
+          <a:bodyPr wrap="square" rtlCol="0" anchor="ctr"/>
+          <a:lstStyle/>
+          <a:p>
+            <a:pPr indent="0" marL="0">
+              <a:buNone/>
+            </a:pPr>
+            <a:endParaRPr lang="en-US" dirty="0"/>
+          </a:p>
+        </p:txBody>
+      </p:sp>
+      <p:sp>
+        <p:nvSpPr>
+          <p:cNvPr id="3" name="Text 1"/>
+          <p:cNvSpPr/>
+          <p:nvPr/>
+        </p:nvSpPr>
+        <p:spPr>
+          <a:xfrm>
+            <a:off x="406301" y="457051"/>
+            <a:ext cx="8498026" cy="274290"/>
+          </a:xfrm>
+          <a:prstGeom prst="rect">
+            <a:avLst/>
+          </a:prstGeom>
+          <a:noFill/>
+          <a:ln/>
+        </p:spPr>
+        <p:txBody>
+          <a:bodyPr wrap="square" lIns="0" tIns="0" rIns="0" bIns="0" rtlCol="0" anchor="t"/>
+          <a:lstStyle/>
+          <a:p>
+            <a:pPr algn="l" indent="0" marL="0">
+              <a:lnSpc>
+                <a:spcPts val="2160"/>
+              </a:lnSpc>
+              <a:spcBef>
+                <a:spcPts val="600"/>
+              </a:spcBef>
+              <a:spcAft>
+                <a:spcPts val="800"/>
+              </a:spcAft>
+              <a:buNone/>
+            </a:pPr>
+            <a:r>
+              <a:rPr lang="en-US" sz="1800" b="1" dirty="0">
+                <a:solidFill>
+                  <a:srgbClr val="FE4447"/>
+                </a:solidFill>
+                <a:latin typeface="Georgia" pitchFamily="34" charset="0"/>
+                <a:ea typeface="Georgia" pitchFamily="34" charset="-122"/>
+                <a:cs typeface="Georgia" pitchFamily="34" charset="-120"/>
+              </a:rPr>
+              <a:t>Differentiation</a:t>
+            </a:r>
+            <a:endParaRPr lang="en-US" sz="1800" dirty="0"/>
+          </a:p>
+        </p:txBody>
+      </p:sp>
+      <p:sp>
+        <p:nvSpPr>
+          <p:cNvPr id="4" name="Text 2"/>
+          <p:cNvSpPr/>
+          <p:nvPr/>
+        </p:nvSpPr>
+        <p:spPr>
+          <a:xfrm>
+            <a:off x="634901" y="883593"/>
+            <a:ext cx="8102798" cy="525661"/>
+          </a:xfrm>
+          <a:prstGeom prst="rect">
+            <a:avLst/>
+          </a:prstGeom>
+          <a:noFill/>
+          <a:ln/>
+        </p:spPr>
+        <p:txBody>
+          <a:bodyPr wrap="square" lIns="0" tIns="0" rIns="0" bIns="0" rtlCol="0" anchor="t"/>
+          <a:lstStyle/>
+          <a:p>
+            <a:pPr algn="l" marL="342900" indent="-342900">
+              <a:lnSpc>
+                <a:spcPts val="1620"/>
+              </a:lnSpc>
+              <a:spcAft>
+                <a:spcPts val="300"/>
+              </a:spcAft>
+              <a:buSzPct val="100000"/>
+              <a:buChar char="•"/>
+            </a:pPr>
+            <a:r>
+              <a:rPr lang="en-US" sz="1200" b="1" dirty="0">
+                <a:solidFill>
+                  <a:srgbClr val="1C2833"/>
+                </a:solidFill>
+                <a:latin typeface="Arial" pitchFamily="34" charset="0"/>
+                <a:ea typeface="Arial" pitchFamily="34" charset="-122"/>
+                <a:cs typeface="Arial" pitchFamily="34" charset="-120"/>
+              </a:rPr>
+              <a:t>Tier up:</a:t>
+            </a:r>
+            <a:pPr algn="l" indent="0" marL="0">
+              <a:lnSpc>
+                <a:spcPts val="1620"/>
+              </a:lnSpc>
+              <a:spcAft>
+                <a:spcPts val="300"/>
+              </a:spcAft>
+              <a:buNone/>
+            </a:pPr>
+            <a:r>
+              <a:rPr lang="en-US" sz="1200" dirty="0">
+                <a:solidFill>
+                  <a:srgbClr val="1C2833"/>
+                </a:solidFill>
+                <a:latin typeface="Arial" pitchFamily="34" charset="0"/>
+                <a:ea typeface="Arial" pitchFamily="34" charset="-122"/>
+                <a:cs typeface="Arial" pitchFamily="34" charset="-120"/>
+              </a:rPr>
+              <a:t> Add </a:t>
+            </a:r>
+            <a:pPr algn="l" indent="0" marL="0">
+              <a:lnSpc>
+                <a:spcPts val="1620"/>
+              </a:lnSpc>
+              <a:spcAft>
+                <a:spcPts val="300"/>
+              </a:spcAft>
+              <a:buNone/>
+            </a:pPr>
+            <a:r>
+              <a:rPr lang="en-US" sz="1200" i="1" dirty="0">
+                <a:solidFill>
+                  <a:srgbClr val="1C2833"/>
+                </a:solidFill>
+                <a:latin typeface="Arial" pitchFamily="34" charset="0"/>
+                <a:ea typeface="Arial" pitchFamily="34" charset="-122"/>
+                <a:cs typeface="Arial" pitchFamily="34" charset="-120"/>
+              </a:rPr>
+              <a:t>adho-mukha-śvānāsana</a:t>
+            </a:r>
+            <a:pPr algn="l" indent="0" marL="0">
+              <a:lnSpc>
+                <a:spcPts val="1620"/>
+              </a:lnSpc>
+              <a:spcAft>
+                <a:spcPts val="300"/>
+              </a:spcAft>
+              <a:buNone/>
+            </a:pPr>
+            <a:r>
+              <a:rPr lang="en-US" sz="1200" dirty="0">
+                <a:solidFill>
+                  <a:srgbClr val="1C2833"/>
+                </a:solidFill>
+                <a:latin typeface="Arial" pitchFamily="34" charset="0"/>
+                <a:ea typeface="Arial" pitchFamily="34" charset="-122"/>
+                <a:cs typeface="Arial" pitchFamily="34" charset="-120"/>
+              </a:rPr>
+              <a:t> (downward-facing dog) to your home practice — try 30 sec hold.</a:t>
+            </a:r>
+            <a:endParaRPr lang="en-US" sz="1200" dirty="0"/>
+          </a:p>
+          <a:p>
+            <a:pPr algn="l" marL="342900" indent="-342900">
+              <a:lnSpc>
+                <a:spcPts val="1620"/>
+              </a:lnSpc>
+              <a:spcAft>
+                <a:spcPts val="300"/>
+              </a:spcAft>
+              <a:buSzPct val="100000"/>
+              <a:buChar char="•"/>
+            </a:pPr>
+            <a:r>
+              <a:rPr lang="en-US" sz="1200" b="1" dirty="0">
+                <a:solidFill>
+                  <a:srgbClr val="1C2833"/>
+                </a:solidFill>
+                <a:latin typeface="Arial" pitchFamily="34" charset="0"/>
+                <a:ea typeface="Arial" pitchFamily="34" charset="-122"/>
+                <a:cs typeface="Arial" pitchFamily="34" charset="-120"/>
+              </a:rPr>
+              <a:t>Tier down:</a:t>
+            </a:r>
+            <a:pPr algn="l" indent="0" marL="0">
+              <a:lnSpc>
+                <a:spcPts val="1620"/>
+              </a:lnSpc>
+              <a:spcAft>
+                <a:spcPts val="300"/>
+              </a:spcAft>
+              <a:buNone/>
+            </a:pPr>
+            <a:r>
+              <a:rPr lang="en-US" sz="1200" dirty="0">
+                <a:solidFill>
+                  <a:srgbClr val="1C2833"/>
+                </a:solidFill>
+                <a:latin typeface="Arial" pitchFamily="34" charset="0"/>
+                <a:ea typeface="Arial" pitchFamily="34" charset="-122"/>
+                <a:cs typeface="Arial" pitchFamily="34" charset="-120"/>
+              </a:rPr>
+              <a:t> Use a wall for vṛkṣāsana support. Use a folded blanket under the knees for sukhāsana / baddha-koṇāsana.</a:t>
             </a:r>
             <a:endParaRPr lang="en-US" sz="1200" dirty="0"/>
           </a:p>
@@ -4075,7 +6312,7 @@
                 <a:ea typeface="Georgia" pitchFamily="34" charset="-122"/>
                 <a:cs typeface="Georgia" pitchFamily="34" charset="-120"/>
               </a:rPr>
-              <a:t>Materials</a:t>
+              <a:t>Learning objective</a:t>
             </a:r>
             <a:endParaRPr lang="en-US" sz="1800" dirty="0"/>
           </a:p>
@@ -4090,6 +6327,100 @@
         <p:spPr>
           <a:xfrm>
             <a:off x="406301" y="870942"/>
+            <a:ext cx="8498026" cy="426541"/>
+          </a:xfrm>
+          <a:prstGeom prst="rect">
+            <a:avLst/>
+          </a:prstGeom>
+          <a:noFill/>
+          <a:ln/>
+        </p:spPr>
+        <p:txBody>
+          <a:bodyPr wrap="square" lIns="0" tIns="0" rIns="0" bIns="0" rtlCol="0" anchor="t"/>
+          <a:lstStyle/>
+          <a:p>
+            <a:pPr algn="l" indent="0" marL="0">
+              <a:lnSpc>
+                <a:spcPts val="1680"/>
+              </a:lnSpc>
+              <a:spcBef>
+                <a:spcPts val="300"/>
+              </a:spcBef>
+              <a:spcAft>
+                <a:spcPts val="300"/>
+              </a:spcAft>
+              <a:buNone/>
+            </a:pPr>
+            <a:r>
+              <a:rPr lang="en-US" sz="1200" dirty="0">
+                <a:solidFill>
+                  <a:srgbClr val="1C2833"/>
+                </a:solidFill>
+                <a:latin typeface="Arial" pitchFamily="34" charset="0"/>
+                <a:ea typeface="Arial" pitchFamily="34" charset="-122"/>
+                <a:cs typeface="Arial" pitchFamily="34" charset="-120"/>
+              </a:rPr>
+              <a:t>By the end of this lesson, students will perform five foundational āsanas — </a:t>
+            </a:r>
+            <a:pPr algn="l" indent="0" marL="0">
+              <a:lnSpc>
+                <a:spcPts val="1680"/>
+              </a:lnSpc>
+              <a:spcBef>
+                <a:spcPts val="300"/>
+              </a:spcBef>
+              <a:spcAft>
+                <a:spcPts val="300"/>
+              </a:spcAft>
+              <a:buNone/>
+            </a:pPr>
+            <a:r>
+              <a:rPr lang="en-US" sz="1200" i="1" dirty="0">
+                <a:solidFill>
+                  <a:srgbClr val="1C2833"/>
+                </a:solidFill>
+                <a:latin typeface="Arial" pitchFamily="34" charset="0"/>
+                <a:ea typeface="Arial" pitchFamily="34" charset="-122"/>
+                <a:cs typeface="Arial" pitchFamily="34" charset="-120"/>
+              </a:rPr>
+              <a:t>tāḍāsana, vṛkṣāsana, baddha-koṇāsana, balāsana, sukhāsana</a:t>
+            </a:r>
+            <a:pPr algn="l" indent="0" marL="0">
+              <a:lnSpc>
+                <a:spcPts val="1680"/>
+              </a:lnSpc>
+              <a:spcBef>
+                <a:spcPts val="300"/>
+              </a:spcBef>
+              <a:spcAft>
+                <a:spcPts val="300"/>
+              </a:spcAft>
+              <a:buNone/>
+            </a:pPr>
+            <a:r>
+              <a:rPr lang="en-US" sz="1200" dirty="0">
+                <a:solidFill>
+                  <a:srgbClr val="1C2833"/>
+                </a:solidFill>
+                <a:latin typeface="Arial" pitchFamily="34" charset="0"/>
+                <a:ea typeface="Arial" pitchFamily="34" charset="-122"/>
+                <a:cs typeface="Arial" pitchFamily="34" charset="-120"/>
+              </a:rPr>
+              <a:t> — with safe alignment cues, and identify which body parts each pose strengthens or stretches.</a:t>
+            </a:r>
+            <a:endParaRPr lang="en-US" sz="1200" dirty="0"/>
+          </a:p>
+        </p:txBody>
+      </p:sp>
+      <p:sp>
+        <p:nvSpPr>
+          <p:cNvPr id="5" name="Text 3"/>
+          <p:cNvSpPr/>
+          <p:nvPr/>
+        </p:nvSpPr>
+        <p:spPr>
+          <a:xfrm>
+            <a:off x="406301" y="4434929"/>
             <a:ext cx="8498026" cy="213271"/>
           </a:xfrm>
           <a:prstGeom prst="rect">
@@ -4123,7 +6454,415 @@
                 <a:ea typeface="Arial" pitchFamily="34" charset="-122"/>
                 <a:cs typeface="Arial" pitchFamily="34" charset="-120"/>
               </a:rPr>
-              <a:t>– Mats. Poster of the five āsanas (optional). – Formative quiz Part A (limb-matching) returned.</a:t>
+              <a:t>Middle ·  · IKS Curriculum</a:t>
+            </a:r>
+            <a:endParaRPr lang="en-US" sz="1200" dirty="0"/>
+          </a:p>
+        </p:txBody>
+      </p:sp>
+    </p:spTree>
+  </p:cSld>
+  <p:clrMapOvr>
+    <a:masterClrMapping/>
+  </p:clrMapOvr>
+</p:sld>
+</file>
+
+<file path=ppt/slides/slide20.xml><?xml version="1.0" encoding="utf-8"?>
+<p:sld xmlns:a="http://schemas.openxmlformats.org/drawingml/2006/main" xmlns:r="http://schemas.openxmlformats.org/officeDocument/2006/relationships" xmlns:p="http://schemas.openxmlformats.org/presentationml/2006/main">
+  <p:cSld name="Slide 20">
+    <p:bg>
+      <p:bgPr>
+        <a:solidFill>
+          <a:srgbClr val="FFFFFF"/>
+        </a:solidFill>
+      </p:bgPr>
+    </p:bg>
+    <p:spTree>
+      <p:nvGrpSpPr>
+        <p:cNvPr id="1" name=""/>
+        <p:cNvGrpSpPr/>
+        <p:nvPr/>
+      </p:nvGrpSpPr>
+      <p:grpSpPr>
+        <a:xfrm>
+          <a:off x="0" y="0"/>
+          <a:ext cx="0" cy="0"/>
+          <a:chOff x="0" y="0"/>
+          <a:chExt cx="0" cy="0"/>
+        </a:xfrm>
+      </p:grpSpPr>
+      <p:sp>
+        <p:nvSpPr>
+          <p:cNvPr id="2" name="Text 0"/>
+          <p:cNvSpPr/>
+          <p:nvPr/>
+        </p:nvSpPr>
+        <p:spPr>
+          <a:xfrm>
+            <a:off x="0" y="0"/>
+            <a:ext cx="9144000" cy="101501"/>
+          </a:xfrm>
+          <a:prstGeom prst="rect">
+            <a:avLst/>
+          </a:prstGeom>
+          <a:solidFill>
+            <a:srgbClr val="277884"/>
+          </a:solidFill>
+          <a:ln/>
+        </p:spPr>
+        <p:txBody>
+          <a:bodyPr wrap="square" rtlCol="0" anchor="ctr"/>
+          <a:lstStyle/>
+          <a:p>
+            <a:pPr indent="0" marL="0">
+              <a:buNone/>
+            </a:pPr>
+            <a:endParaRPr lang="en-US" dirty="0"/>
+          </a:p>
+        </p:txBody>
+      </p:sp>
+      <p:sp>
+        <p:nvSpPr>
+          <p:cNvPr id="3" name="Text 1"/>
+          <p:cNvSpPr/>
+          <p:nvPr/>
+        </p:nvSpPr>
+        <p:spPr>
+          <a:xfrm>
+            <a:off x="406301" y="457051"/>
+            <a:ext cx="8498026" cy="274290"/>
+          </a:xfrm>
+          <a:prstGeom prst="rect">
+            <a:avLst/>
+          </a:prstGeom>
+          <a:noFill/>
+          <a:ln/>
+        </p:spPr>
+        <p:txBody>
+          <a:bodyPr wrap="square" lIns="0" tIns="0" rIns="0" bIns="0" rtlCol="0" anchor="t"/>
+          <a:lstStyle/>
+          <a:p>
+            <a:pPr algn="l" indent="0" marL="0">
+              <a:lnSpc>
+                <a:spcPts val="2160"/>
+              </a:lnSpc>
+              <a:spcBef>
+                <a:spcPts val="600"/>
+              </a:spcBef>
+              <a:spcAft>
+                <a:spcPts val="800"/>
+              </a:spcAft>
+              <a:buNone/>
+            </a:pPr>
+            <a:r>
+              <a:rPr lang="en-US" sz="1800" b="1" dirty="0">
+                <a:solidFill>
+                  <a:srgbClr val="FE4447"/>
+                </a:solidFill>
+                <a:latin typeface="Georgia" pitchFamily="34" charset="0"/>
+                <a:ea typeface="Georgia" pitchFamily="34" charset="-122"/>
+                <a:cs typeface="Georgia" pitchFamily="34" charset="-120"/>
+              </a:rPr>
+              <a:t>Teacher notes</a:t>
+            </a:r>
+            <a:endParaRPr lang="en-US" sz="1800" dirty="0"/>
+          </a:p>
+        </p:txBody>
+      </p:sp>
+      <p:sp>
+        <p:nvSpPr>
+          <p:cNvPr id="4" name="Text 2"/>
+          <p:cNvSpPr/>
+          <p:nvPr/>
+        </p:nvSpPr>
+        <p:spPr>
+          <a:xfrm>
+            <a:off x="634901" y="883593"/>
+            <a:ext cx="8102798" cy="1386483"/>
+          </a:xfrm>
+          <a:prstGeom prst="rect">
+            <a:avLst/>
+          </a:prstGeom>
+          <a:noFill/>
+          <a:ln/>
+        </p:spPr>
+        <p:txBody>
+          <a:bodyPr wrap="square" lIns="0" tIns="0" rIns="0" bIns="0" rtlCol="0" anchor="t"/>
+          <a:lstStyle/>
+          <a:p>
+            <a:pPr algn="l" marL="342900" indent="-342900">
+              <a:lnSpc>
+                <a:spcPts val="1620"/>
+              </a:lnSpc>
+              <a:spcAft>
+                <a:spcPts val="300"/>
+              </a:spcAft>
+              <a:buSzPct val="100000"/>
+              <a:buChar char="•"/>
+            </a:pPr>
+            <a:r>
+              <a:rPr lang="en-US" sz="1200" dirty="0">
+                <a:solidFill>
+                  <a:srgbClr val="1C2833"/>
+                </a:solidFill>
+                <a:latin typeface="Arial" pitchFamily="34" charset="0"/>
+                <a:ea typeface="Arial" pitchFamily="34" charset="-122"/>
+                <a:cs typeface="Arial" pitchFamily="34" charset="-120"/>
+              </a:rPr>
+              <a:t>Walk around during baddha-koṇāsana. Many students try to force the knees down — this can strain the inner thigh. Cue "gentle, let gravity do the work."</a:t>
+            </a:r>
+            <a:endParaRPr lang="en-US" sz="1200" dirty="0"/>
+          </a:p>
+          <a:p>
+            <a:pPr algn="l" marL="342900" indent="-342900">
+              <a:lnSpc>
+                <a:spcPts val="1620"/>
+              </a:lnSpc>
+              <a:spcAft>
+                <a:spcPts val="300"/>
+              </a:spcAft>
+              <a:buSzPct val="100000"/>
+              <a:buChar char="•"/>
+            </a:pPr>
+            <a:r>
+              <a:rPr lang="en-US" sz="1200" dirty="0">
+                <a:solidFill>
+                  <a:srgbClr val="1C2833"/>
+                </a:solidFill>
+                <a:latin typeface="Arial" pitchFamily="34" charset="0"/>
+                <a:ea typeface="Arial" pitchFamily="34" charset="-122"/>
+                <a:cs typeface="Arial" pitchFamily="34" charset="-120"/>
+              </a:rPr>
+              <a:t>Balāsana is restorative. If a student's hips don't allow them to sit on their heels, place a folded blanket between thighs and calves.</a:t>
+            </a:r>
+            <a:endParaRPr lang="en-US" sz="1200" dirty="0"/>
+          </a:p>
+          <a:p>
+            <a:pPr algn="l" marL="342900" indent="-342900">
+              <a:lnSpc>
+                <a:spcPts val="1620"/>
+              </a:lnSpc>
+              <a:spcAft>
+                <a:spcPts val="300"/>
+              </a:spcAft>
+              <a:buSzPct val="100000"/>
+              <a:buChar char="•"/>
+            </a:pPr>
+            <a:r>
+              <a:rPr lang="en-US" sz="1200" dirty="0">
+                <a:solidFill>
+                  <a:srgbClr val="1C2833"/>
+                </a:solidFill>
+                <a:latin typeface="Arial" pitchFamily="34" charset="0"/>
+                <a:ea typeface="Arial" pitchFamily="34" charset="-122"/>
+                <a:cs typeface="Arial" pitchFamily="34" charset="-120"/>
+              </a:rPr>
+              <a:t>A handful of students will fidget through sukhāsana. Don't correct — let them feel the discomfort of stillness. That's part of the lesson.</a:t>
+            </a:r>
+            <a:endParaRPr lang="en-US" sz="1200" dirty="0"/>
+          </a:p>
+        </p:txBody>
+      </p:sp>
+      <p:sp>
+        <p:nvSpPr>
+          <p:cNvPr id="5" name="Text 3"/>
+          <p:cNvSpPr/>
+          <p:nvPr/>
+        </p:nvSpPr>
+        <p:spPr>
+          <a:xfrm>
+            <a:off x="406301" y="4434929"/>
+            <a:ext cx="8498026" cy="213271"/>
+          </a:xfrm>
+          <a:prstGeom prst="rect">
+            <a:avLst/>
+          </a:prstGeom>
+          <a:noFill/>
+          <a:ln/>
+        </p:spPr>
+        <p:txBody>
+          <a:bodyPr wrap="square" lIns="0" tIns="0" rIns="0" bIns="0" rtlCol="0" anchor="t"/>
+          <a:lstStyle/>
+          <a:p>
+            <a:pPr algn="l" indent="0" marL="0">
+              <a:lnSpc>
+                <a:spcPts val="1680"/>
+              </a:lnSpc>
+              <a:spcBef>
+                <a:spcPts val="300"/>
+              </a:spcBef>
+              <a:spcAft>
+                <a:spcPts val="300"/>
+              </a:spcAft>
+              <a:buNone/>
+            </a:pPr>
+            <a:r>
+              <a:rPr lang="en-US" sz="1200" dirty="0">
+                <a:solidFill>
+                  <a:srgbClr val="1C2833"/>
+                </a:solidFill>
+                <a:latin typeface="Arial" pitchFamily="34" charset="0"/>
+                <a:ea typeface="Arial" pitchFamily="34" charset="-122"/>
+                <a:cs typeface="Arial" pitchFamily="34" charset="-120"/>
+              </a:rPr>
+              <a:t>Middle ·  · IKS Curriculum</a:t>
+            </a:r>
+            <a:endParaRPr lang="en-US" sz="1200" dirty="0"/>
+          </a:p>
+        </p:txBody>
+      </p:sp>
+    </p:spTree>
+  </p:cSld>
+  <p:clrMapOvr>
+    <a:masterClrMapping/>
+  </p:clrMapOvr>
+</p:sld>
+</file>
+
+<file path=ppt/slides/slide21.xml><?xml version="1.0" encoding="utf-8"?>
+<p:sld xmlns:a="http://schemas.openxmlformats.org/drawingml/2006/main" xmlns:r="http://schemas.openxmlformats.org/officeDocument/2006/relationships" xmlns:p="http://schemas.openxmlformats.org/presentationml/2006/main">
+  <p:cSld name="Slide 21">
+    <p:bg>
+      <p:bgPr>
+        <a:solidFill>
+          <a:srgbClr val="FFFFFF"/>
+        </a:solidFill>
+      </p:bgPr>
+    </p:bg>
+    <p:spTree>
+      <p:nvGrpSpPr>
+        <p:cNvPr id="1" name=""/>
+        <p:cNvGrpSpPr/>
+        <p:nvPr/>
+      </p:nvGrpSpPr>
+      <p:grpSpPr>
+        <a:xfrm>
+          <a:off x="0" y="0"/>
+          <a:ext cx="0" cy="0"/>
+          <a:chOff x="0" y="0"/>
+          <a:chExt cx="0" cy="0"/>
+        </a:xfrm>
+      </p:grpSpPr>
+      <p:sp>
+        <p:nvSpPr>
+          <p:cNvPr id="2" name="Text 0"/>
+          <p:cNvSpPr/>
+          <p:nvPr/>
+        </p:nvSpPr>
+        <p:spPr>
+          <a:xfrm>
+            <a:off x="0" y="0"/>
+            <a:ext cx="9144000" cy="101501"/>
+          </a:xfrm>
+          <a:prstGeom prst="rect">
+            <a:avLst/>
+          </a:prstGeom>
+          <a:solidFill>
+            <a:srgbClr val="277884"/>
+          </a:solidFill>
+          <a:ln/>
+        </p:spPr>
+        <p:txBody>
+          <a:bodyPr wrap="square" rtlCol="0" anchor="ctr"/>
+          <a:lstStyle/>
+          <a:p>
+            <a:pPr indent="0" marL="0">
+              <a:buNone/>
+            </a:pPr>
+            <a:endParaRPr lang="en-US" dirty="0"/>
+          </a:p>
+        </p:txBody>
+      </p:sp>
+      <p:sp>
+        <p:nvSpPr>
+          <p:cNvPr id="3" name="Text 1"/>
+          <p:cNvSpPr/>
+          <p:nvPr/>
+        </p:nvSpPr>
+        <p:spPr>
+          <a:xfrm>
+            <a:off x="406301" y="457051"/>
+            <a:ext cx="8498026" cy="274290"/>
+          </a:xfrm>
+          <a:prstGeom prst="rect">
+            <a:avLst/>
+          </a:prstGeom>
+          <a:noFill/>
+          <a:ln/>
+        </p:spPr>
+        <p:txBody>
+          <a:bodyPr wrap="square" lIns="0" tIns="0" rIns="0" bIns="0" rtlCol="0" anchor="t"/>
+          <a:lstStyle/>
+          <a:p>
+            <a:pPr algn="l" indent="0" marL="0">
+              <a:lnSpc>
+                <a:spcPts val="2160"/>
+              </a:lnSpc>
+              <a:spcBef>
+                <a:spcPts val="600"/>
+              </a:spcBef>
+              <a:spcAft>
+                <a:spcPts val="800"/>
+              </a:spcAft>
+              <a:buNone/>
+            </a:pPr>
+            <a:r>
+              <a:rPr lang="en-US" sz="1800" b="1" dirty="0">
+                <a:solidFill>
+                  <a:srgbClr val="FE4447"/>
+                </a:solidFill>
+                <a:latin typeface="Georgia" pitchFamily="34" charset="0"/>
+                <a:ea typeface="Georgia" pitchFamily="34" charset="-122"/>
+                <a:cs typeface="Georgia" pitchFamily="34" charset="-120"/>
+              </a:rPr>
+              <a:t>Citation(s) used in this lesson</a:t>
+            </a:r>
+            <a:endParaRPr lang="en-US" sz="1800" dirty="0"/>
+          </a:p>
+        </p:txBody>
+      </p:sp>
+      <p:sp>
+        <p:nvSpPr>
+          <p:cNvPr id="4" name="Text 2"/>
+          <p:cNvSpPr/>
+          <p:nvPr/>
+        </p:nvSpPr>
+        <p:spPr>
+          <a:xfrm>
+            <a:off x="634901" y="883593"/>
+            <a:ext cx="8102798" cy="487561"/>
+          </a:xfrm>
+          <a:prstGeom prst="rect">
+            <a:avLst/>
+          </a:prstGeom>
+          <a:noFill/>
+          <a:ln/>
+        </p:spPr>
+        <p:txBody>
+          <a:bodyPr wrap="square" lIns="0" tIns="0" rIns="0" bIns="0" rtlCol="0" anchor="t"/>
+          <a:lstStyle/>
+          <a:p>
+            <a:pPr algn="l" marL="342900" indent="-342900">
+              <a:lnSpc>
+                <a:spcPts val="1620"/>
+              </a:lnSpc>
+              <a:spcAft>
+                <a:spcPts val="300"/>
+              </a:spcAft>
+              <a:buSzPct val="100000"/>
+              <a:buChar char="•"/>
+            </a:pPr>
+            <a:r>
+              <a:rPr lang="en-US" sz="1200" dirty="0">
+                <a:solidFill>
+                  <a:srgbClr val="1C2833"/>
+                </a:solidFill>
+                <a:latin typeface="Arial" pitchFamily="34" charset="0"/>
+                <a:ea typeface="Arial" pitchFamily="34" charset="-122"/>
+                <a:cs typeface="Arial" pitchFamily="34" charset="-120"/>
+              </a:rPr>
+              <a:t>No new RAG citations. Āsana descriptions reference standard practice (Iyengar 1966; teacher reference, not student-facing).</a:t>
             </a:r>
             <a:endParaRPr lang="en-US" sz="1200" dirty="0"/>
           </a:p>
@@ -4281,7 +7020,7 @@
                 <a:ea typeface="Georgia" pitchFamily="34" charset="-122"/>
                 <a:cs typeface="Georgia" pitchFamily="34" charset="-120"/>
               </a:rPr>
-              <a:t>Vocabulary introduced today</a:t>
+              <a:t>Materials</a:t>
             </a:r>
             <a:endParaRPr lang="en-US" sz="1800" dirty="0"/>
           </a:p>
@@ -4296,7 +7035,7 @@
         <p:spPr>
           <a:xfrm>
             <a:off x="634901" y="883593"/>
-            <a:ext cx="8102798" cy="769441"/>
+            <a:ext cx="8102798" cy="525661"/>
           </a:xfrm>
           <a:prstGeom prst="rect">
             <a:avLst/>
@@ -4319,26 +7058,6 @@
               <a:buChar char="•"/>
             </a:pPr>
             <a:r>
-              <a:rPr lang="en-US" sz="1200" i="1" dirty="0">
-                <a:solidFill>
-                  <a:srgbClr val="1C2833"/>
-                </a:solidFill>
-                <a:latin typeface="Arial" pitchFamily="34" charset="0"/>
-                <a:ea typeface="Arial" pitchFamily="34" charset="-122"/>
-                <a:cs typeface="Arial" pitchFamily="34" charset="-120"/>
-              </a:rPr>
-              <a:t>baddha-koṇāsana</a:t>
-            </a:r>
-            <a:pPr algn="l" indent="0" marL="0">
-              <a:lnSpc>
-                <a:spcPts val="1620"/>
-              </a:lnSpc>
-              <a:spcAft>
-                <a:spcPts val="300"/>
-              </a:spcAft>
-              <a:buNone/>
-            </a:pPr>
-            <a:r>
               <a:rPr lang="en-US" sz="1200" dirty="0">
                 <a:solidFill>
                   <a:srgbClr val="1C2833"/>
@@ -4347,7 +7066,7 @@
                 <a:ea typeface="Arial" pitchFamily="34" charset="-122"/>
                 <a:cs typeface="Arial" pitchFamily="34" charset="-120"/>
               </a:rPr>
-              <a:t> (IAST: baddha-koṇa-āsana; lit. "bound-angle posture") — seated wide-knees pose, soles together.</a:t>
+              <a:t>Mats. Poster of the five āsanas (optional).</a:t>
             </a:r>
             <a:endParaRPr lang="en-US" sz="1200" dirty="0"/>
           </a:p>
@@ -4363,26 +7082,6 @@
               <a:buChar char="•"/>
             </a:pPr>
             <a:r>
-              <a:rPr lang="en-US" sz="1200" i="1" dirty="0">
-                <a:solidFill>
-                  <a:srgbClr val="1C2833"/>
-                </a:solidFill>
-                <a:latin typeface="Arial" pitchFamily="34" charset="0"/>
-                <a:ea typeface="Arial" pitchFamily="34" charset="-122"/>
-                <a:cs typeface="Arial" pitchFamily="34" charset="-120"/>
-              </a:rPr>
-              <a:t>balāsana</a:t>
-            </a:r>
-            <a:pPr algn="l" indent="0" marL="0">
-              <a:lnSpc>
-                <a:spcPts val="1620"/>
-              </a:lnSpc>
-              <a:spcAft>
-                <a:spcPts val="300"/>
-              </a:spcAft>
-              <a:buNone/>
-            </a:pPr>
-            <a:r>
               <a:rPr lang="en-US" sz="1200" dirty="0">
                 <a:solidFill>
                   <a:srgbClr val="1C2833"/>
@@ -4391,51 +7090,7 @@
                 <a:ea typeface="Arial" pitchFamily="34" charset="-122"/>
                 <a:cs typeface="Arial" pitchFamily="34" charset="-120"/>
               </a:rPr>
-              <a:t> (IAST: bāla-āsana; lit. "child posture") — folded forward rest pose.</a:t>
-            </a:r>
-            <a:endParaRPr lang="en-US" sz="1200" dirty="0"/>
-          </a:p>
-          <a:p>
-            <a:pPr algn="l" marL="342900" indent="-342900">
-              <a:lnSpc>
-                <a:spcPts val="1620"/>
-              </a:lnSpc>
-              <a:spcAft>
-                <a:spcPts val="300"/>
-              </a:spcAft>
-              <a:buSzPct val="100000"/>
-              <a:buChar char="•"/>
-            </a:pPr>
-            <a:r>
-              <a:rPr lang="en-US" sz="1200" i="1" dirty="0">
-                <a:solidFill>
-                  <a:srgbClr val="1C2833"/>
-                </a:solidFill>
-                <a:latin typeface="Arial" pitchFamily="34" charset="0"/>
-                <a:ea typeface="Arial" pitchFamily="34" charset="-122"/>
-                <a:cs typeface="Arial" pitchFamily="34" charset="-120"/>
-              </a:rPr>
-              <a:t>sukhāsana</a:t>
-            </a:r>
-            <a:pPr algn="l" indent="0" marL="0">
-              <a:lnSpc>
-                <a:spcPts val="1620"/>
-              </a:lnSpc>
-              <a:spcAft>
-                <a:spcPts val="300"/>
-              </a:spcAft>
-              <a:buNone/>
-            </a:pPr>
-            <a:r>
-              <a:rPr lang="en-US" sz="1200" dirty="0">
-                <a:solidFill>
-                  <a:srgbClr val="1C2833"/>
-                </a:solidFill>
-                <a:latin typeface="Arial" pitchFamily="34" charset="0"/>
-                <a:ea typeface="Arial" pitchFamily="34" charset="-122"/>
-                <a:cs typeface="Arial" pitchFamily="34" charset="-120"/>
-              </a:rPr>
-              <a:t> (IAST: sukha-āsana; lit. "easy posture") — comfortable cross-legged seat.</a:t>
+              <a:t>Formative quiz Part A (limb-matching) returned.</a:t>
             </a:r>
             <a:endParaRPr lang="en-US" sz="1200" dirty="0"/>
           </a:p>
@@ -4593,7 +7248,7 @@
                 <a:ea typeface="Georgia" pitchFamily="34" charset="-122"/>
                 <a:cs typeface="Georgia" pitchFamily="34" charset="-120"/>
               </a:rPr>
-              <a:t>Lesson flow</a:t>
+              <a:t>Vocabulary introduced today</a:t>
             </a:r>
             <a:endParaRPr lang="en-US" sz="1800" dirty="0"/>
           </a:p>
@@ -4602,6 +7257,160 @@
       <p:sp>
         <p:nvSpPr>
           <p:cNvPr id="4" name="Text 2"/>
+          <p:cNvSpPr/>
+          <p:nvPr/>
+        </p:nvSpPr>
+        <p:spPr>
+          <a:xfrm>
+            <a:off x="634901" y="883593"/>
+            <a:ext cx="8102798" cy="769441"/>
+          </a:xfrm>
+          <a:prstGeom prst="rect">
+            <a:avLst/>
+          </a:prstGeom>
+          <a:noFill/>
+          <a:ln/>
+        </p:spPr>
+        <p:txBody>
+          <a:bodyPr wrap="square" lIns="0" tIns="0" rIns="0" bIns="0" rtlCol="0" anchor="t"/>
+          <a:lstStyle/>
+          <a:p>
+            <a:pPr algn="l" marL="342900" indent="-342900">
+              <a:lnSpc>
+                <a:spcPts val="1620"/>
+              </a:lnSpc>
+              <a:spcAft>
+                <a:spcPts val="300"/>
+              </a:spcAft>
+              <a:buSzPct val="100000"/>
+              <a:buChar char="•"/>
+            </a:pPr>
+            <a:r>
+              <a:rPr lang="en-US" sz="1200" i="1" dirty="0">
+                <a:solidFill>
+                  <a:srgbClr val="1C2833"/>
+                </a:solidFill>
+                <a:latin typeface="Arial" pitchFamily="34" charset="0"/>
+                <a:ea typeface="Arial" pitchFamily="34" charset="-122"/>
+                <a:cs typeface="Arial" pitchFamily="34" charset="-120"/>
+              </a:rPr>
+              <a:t>baddha-koṇāsana</a:t>
+            </a:r>
+            <a:pPr algn="l" indent="0" marL="0">
+              <a:lnSpc>
+                <a:spcPts val="1620"/>
+              </a:lnSpc>
+              <a:spcAft>
+                <a:spcPts val="300"/>
+              </a:spcAft>
+              <a:buNone/>
+            </a:pPr>
+            <a:r>
+              <a:rPr lang="en-US" sz="1200" dirty="0">
+                <a:solidFill>
+                  <a:srgbClr val="1C2833"/>
+                </a:solidFill>
+                <a:latin typeface="Arial" pitchFamily="34" charset="0"/>
+                <a:ea typeface="Arial" pitchFamily="34" charset="-122"/>
+                <a:cs typeface="Arial" pitchFamily="34" charset="-120"/>
+              </a:rPr>
+              <a:t> (IAST: baddha-koṇa-āsana; lit. "bound-angle posture") — seated wide-knees pose, soles together.</a:t>
+            </a:r>
+            <a:endParaRPr lang="en-US" sz="1200" dirty="0"/>
+          </a:p>
+          <a:p>
+            <a:pPr algn="l" marL="342900" indent="-342900">
+              <a:lnSpc>
+                <a:spcPts val="1620"/>
+              </a:lnSpc>
+              <a:spcAft>
+                <a:spcPts val="300"/>
+              </a:spcAft>
+              <a:buSzPct val="100000"/>
+              <a:buChar char="•"/>
+            </a:pPr>
+            <a:r>
+              <a:rPr lang="en-US" sz="1200" i="1" dirty="0">
+                <a:solidFill>
+                  <a:srgbClr val="1C2833"/>
+                </a:solidFill>
+                <a:latin typeface="Arial" pitchFamily="34" charset="0"/>
+                <a:ea typeface="Arial" pitchFamily="34" charset="-122"/>
+                <a:cs typeface="Arial" pitchFamily="34" charset="-120"/>
+              </a:rPr>
+              <a:t>balāsana</a:t>
+            </a:r>
+            <a:pPr algn="l" indent="0" marL="0">
+              <a:lnSpc>
+                <a:spcPts val="1620"/>
+              </a:lnSpc>
+              <a:spcAft>
+                <a:spcPts val="300"/>
+              </a:spcAft>
+              <a:buNone/>
+            </a:pPr>
+            <a:r>
+              <a:rPr lang="en-US" sz="1200" dirty="0">
+                <a:solidFill>
+                  <a:srgbClr val="1C2833"/>
+                </a:solidFill>
+                <a:latin typeface="Arial" pitchFamily="34" charset="0"/>
+                <a:ea typeface="Arial" pitchFamily="34" charset="-122"/>
+                <a:cs typeface="Arial" pitchFamily="34" charset="-120"/>
+              </a:rPr>
+              <a:t> (IAST: bāla-āsana; lit. "child posture") — folded forward rest pose.</a:t>
+            </a:r>
+            <a:endParaRPr lang="en-US" sz="1200" dirty="0"/>
+          </a:p>
+          <a:p>
+            <a:pPr algn="l" marL="342900" indent="-342900">
+              <a:lnSpc>
+                <a:spcPts val="1620"/>
+              </a:lnSpc>
+              <a:spcAft>
+                <a:spcPts val="300"/>
+              </a:spcAft>
+              <a:buSzPct val="100000"/>
+              <a:buChar char="•"/>
+            </a:pPr>
+            <a:r>
+              <a:rPr lang="en-US" sz="1200" i="1" dirty="0">
+                <a:solidFill>
+                  <a:srgbClr val="1C2833"/>
+                </a:solidFill>
+                <a:latin typeface="Arial" pitchFamily="34" charset="0"/>
+                <a:ea typeface="Arial" pitchFamily="34" charset="-122"/>
+                <a:cs typeface="Arial" pitchFamily="34" charset="-120"/>
+              </a:rPr>
+              <a:t>sukhāsana</a:t>
+            </a:r>
+            <a:pPr algn="l" indent="0" marL="0">
+              <a:lnSpc>
+                <a:spcPts val="1620"/>
+              </a:lnSpc>
+              <a:spcAft>
+                <a:spcPts val="300"/>
+              </a:spcAft>
+              <a:buNone/>
+            </a:pPr>
+            <a:r>
+              <a:rPr lang="en-US" sz="1200" dirty="0">
+                <a:solidFill>
+                  <a:srgbClr val="1C2833"/>
+                </a:solidFill>
+                <a:latin typeface="Arial" pitchFamily="34" charset="0"/>
+                <a:ea typeface="Arial" pitchFamily="34" charset="-122"/>
+                <a:cs typeface="Arial" pitchFamily="34" charset="-120"/>
+              </a:rPr>
+              <a:t> (IAST: sukha-āsana; lit. "easy posture") — comfortable cross-legged seat.</a:t>
+            </a:r>
+            <a:endParaRPr lang="en-US" sz="1200" dirty="0"/>
+          </a:p>
+        </p:txBody>
+      </p:sp>
+      <p:sp>
+        <p:nvSpPr>
+          <p:cNvPr id="5" name="Text 3"/>
           <p:cNvSpPr/>
           <p:nvPr/>
         </p:nvSpPr>
@@ -4751,7 +7560,7 @@
                 <a:ea typeface="Georgia" pitchFamily="34" charset="-122"/>
                 <a:cs typeface="Georgia" pitchFamily="34" charset="-120"/>
               </a:rPr>
-              <a:t>Settle (2 min)</a:t>
+              <a:t>Lesson flow</a:t>
             </a:r>
             <a:endParaRPr lang="en-US" sz="1800" dirty="0"/>
           </a:p>
@@ -4760,54 +7569,6 @@
       <p:sp>
         <p:nvSpPr>
           <p:cNvPr id="4" name="Text 2"/>
-          <p:cNvSpPr/>
-          <p:nvPr/>
-        </p:nvSpPr>
-        <p:spPr>
-          <a:xfrm>
-            <a:off x="406301" y="870942"/>
-            <a:ext cx="8498026" cy="213271"/>
-          </a:xfrm>
-          <a:prstGeom prst="rect">
-            <a:avLst/>
-          </a:prstGeom>
-          <a:noFill/>
-          <a:ln/>
-        </p:spPr>
-        <p:txBody>
-          <a:bodyPr wrap="square" lIns="0" tIns="0" rIns="0" bIns="0" rtlCol="0" anchor="t"/>
-          <a:lstStyle/>
-          <a:p>
-            <a:pPr algn="l" indent="0" marL="0">
-              <a:lnSpc>
-                <a:spcPts val="1680"/>
-              </a:lnSpc>
-              <a:spcBef>
-                <a:spcPts val="300"/>
-              </a:spcBef>
-              <a:spcAft>
-                <a:spcPts val="300"/>
-              </a:spcAft>
-              <a:buNone/>
-            </a:pPr>
-            <a:r>
-              <a:rPr lang="en-US" sz="1200" dirty="0">
-                <a:solidFill>
-                  <a:srgbClr val="1C2833"/>
-                </a:solidFill>
-                <a:latin typeface="Arial" pitchFamily="34" charset="0"/>
-                <a:ea typeface="Arial" pitchFamily="34" charset="-122"/>
-                <a:cs typeface="Arial" pitchFamily="34" charset="-120"/>
-              </a:rPr>
-              <a:t>– Sukhāsana. 5 breaths.</a:t>
-            </a:r>
-            <a:endParaRPr lang="en-US" sz="1200" dirty="0"/>
-          </a:p>
-        </p:txBody>
-      </p:sp>
-      <p:sp>
-        <p:nvSpPr>
-          <p:cNvPr id="5" name="Text 3"/>
           <p:cNvSpPr/>
           <p:nvPr/>
         </p:nvSpPr>
@@ -4957,7 +7718,7 @@
                 <a:ea typeface="Georgia" pitchFamily="34" charset="-122"/>
                 <a:cs typeface="Georgia" pitchFamily="34" charset="-120"/>
               </a:rPr>
-              <a:t>Core (8 min) — The five āsanas, named</a:t>
+              <a:t>Settle (2 min)</a:t>
             </a:r>
             <a:endParaRPr lang="en-US" sz="1800" dirty="0"/>
           </a:p>
@@ -4971,8 +7732,8 @@
         </p:nvSpPr>
         <p:spPr>
           <a:xfrm>
-            <a:off x="406301" y="870942"/>
-            <a:ext cx="8498026" cy="213271"/>
+            <a:off x="634901" y="883593"/>
+            <a:ext cx="8102798" cy="281880"/>
           </a:xfrm>
           <a:prstGeom prst="rect">
             <a:avLst/>
@@ -4984,17 +7745,15 @@
           <a:bodyPr wrap="square" lIns="0" tIns="0" rIns="0" bIns="0" rtlCol="0" anchor="t"/>
           <a:lstStyle/>
           <a:p>
-            <a:pPr algn="l" indent="0" marL="0">
-              <a:lnSpc>
-                <a:spcPts val="1680"/>
-              </a:lnSpc>
-              <a:spcBef>
-                <a:spcPts val="300"/>
-              </a:spcBef>
-              <a:spcAft>
-                <a:spcPts val="300"/>
-              </a:spcAft>
-              <a:buNone/>
+            <a:pPr algn="l" marL="342900" indent="-342900">
+              <a:lnSpc>
+                <a:spcPts val="1620"/>
+              </a:lnSpc>
+              <a:spcAft>
+                <a:spcPts val="300"/>
+              </a:spcAft>
+              <a:buSzPct val="100000"/>
+              <a:buChar char="•"/>
             </a:pPr>
             <a:r>
               <a:rPr lang="en-US" sz="1200" dirty="0">
@@ -5005,7 +7764,7 @@
                 <a:ea typeface="Arial" pitchFamily="34" charset="-122"/>
                 <a:cs typeface="Arial" pitchFamily="34" charset="-120"/>
               </a:rPr>
-              <a:t>Write on the board:</a:t>
+              <a:t>Sukhāsana. 5 breaths.</a:t>
             </a:r>
             <a:endParaRPr lang="en-US" sz="1200" dirty="0"/>
           </a:p>
@@ -5014,380 +7773,6 @@
       <p:sp>
         <p:nvSpPr>
           <p:cNvPr id="5" name="Text 3"/>
-          <p:cNvSpPr/>
-          <p:nvPr/>
-        </p:nvSpPr>
-        <p:spPr>
-          <a:xfrm>
-            <a:off x="406301" y="1160413"/>
-            <a:ext cx="8498026" cy="213271"/>
-          </a:xfrm>
-          <a:prstGeom prst="rect">
-            <a:avLst/>
-          </a:prstGeom>
-          <a:noFill/>
-          <a:ln/>
-        </p:spPr>
-        <p:txBody>
-          <a:bodyPr wrap="square" lIns="0" tIns="0" rIns="0" bIns="0" rtlCol="0" anchor="t"/>
-          <a:lstStyle/>
-          <a:p>
-            <a:pPr algn="l" indent="0" marL="0">
-              <a:lnSpc>
-                <a:spcPts val="1680"/>
-              </a:lnSpc>
-              <a:spcBef>
-                <a:spcPts val="300"/>
-              </a:spcBef>
-              <a:spcAft>
-                <a:spcPts val="300"/>
-              </a:spcAft>
-              <a:buNone/>
-            </a:pPr>
-            <a:r>
-              <a:rPr lang="en-US" sz="1200" i="1" dirty="0">
-                <a:solidFill>
-                  <a:srgbClr val="1C2833"/>
-                </a:solidFill>
-                <a:latin typeface="Arial" pitchFamily="34" charset="0"/>
-                <a:ea typeface="Arial" pitchFamily="34" charset="-122"/>
-                <a:cs typeface="Arial" pitchFamily="34" charset="-120"/>
-              </a:rPr>
-              <a:t>Each row: Āsana · Type · Strengthens / stretches.</a:t>
-            </a:r>
-            <a:endParaRPr lang="en-US" sz="1200" dirty="0"/>
-          </a:p>
-        </p:txBody>
-      </p:sp>
-      <p:sp>
-        <p:nvSpPr>
-          <p:cNvPr id="6" name="Text 4"/>
-          <p:cNvSpPr/>
-          <p:nvPr/>
-        </p:nvSpPr>
-        <p:spPr>
-          <a:xfrm>
-            <a:off x="406301" y="1449884"/>
-            <a:ext cx="8498026" cy="853083"/>
-          </a:xfrm>
-          <a:prstGeom prst="rect">
-            <a:avLst/>
-          </a:prstGeom>
-          <a:noFill/>
-          <a:ln/>
-        </p:spPr>
-        <p:txBody>
-          <a:bodyPr wrap="square" lIns="0" tIns="0" rIns="0" bIns="0" rtlCol="0" anchor="t"/>
-          <a:lstStyle/>
-          <a:p>
-            <a:pPr algn="l" indent="0" marL="0">
-              <a:lnSpc>
-                <a:spcPts val="1680"/>
-              </a:lnSpc>
-              <a:spcBef>
-                <a:spcPts val="300"/>
-              </a:spcBef>
-              <a:spcAft>
-                <a:spcPts val="300"/>
-              </a:spcAft>
-              <a:buNone/>
-            </a:pPr>
-            <a:r>
-              <a:rPr lang="en-US" sz="1200" dirty="0">
-                <a:solidFill>
-                  <a:srgbClr val="1C2833"/>
-                </a:solidFill>
-                <a:latin typeface="Arial" pitchFamily="34" charset="0"/>
-                <a:ea typeface="Arial" pitchFamily="34" charset="-122"/>
-                <a:cs typeface="Arial" pitchFamily="34" charset="-120"/>
-              </a:rPr>
-              <a:t>– 1. </a:t>
-            </a:r>
-            <a:pPr algn="l" indent="0" marL="0">
-              <a:lnSpc>
-                <a:spcPts val="1680"/>
-              </a:lnSpc>
-              <a:spcBef>
-                <a:spcPts val="300"/>
-              </a:spcBef>
-              <a:spcAft>
-                <a:spcPts val="300"/>
-              </a:spcAft>
-              <a:buNone/>
-            </a:pPr>
-            <a:r>
-              <a:rPr lang="en-US" sz="1200" i="1" dirty="0">
-                <a:solidFill>
-                  <a:srgbClr val="1C2833"/>
-                </a:solidFill>
-                <a:latin typeface="Arial" pitchFamily="34" charset="0"/>
-                <a:ea typeface="Arial" pitchFamily="34" charset="-122"/>
-                <a:cs typeface="Arial" pitchFamily="34" charset="-120"/>
-              </a:rPr>
-              <a:t>tāḍāsana</a:t>
-            </a:r>
-            <a:pPr algn="l" indent="0" marL="0">
-              <a:lnSpc>
-                <a:spcPts val="1680"/>
-              </a:lnSpc>
-              <a:spcBef>
-                <a:spcPts val="300"/>
-              </a:spcBef>
-              <a:spcAft>
-                <a:spcPts val="300"/>
-              </a:spcAft>
-              <a:buNone/>
-            </a:pPr>
-            <a:r>
-              <a:rPr lang="en-US" sz="1200" dirty="0">
-                <a:solidFill>
-                  <a:srgbClr val="1C2833"/>
-                </a:solidFill>
-                <a:latin typeface="Arial" pitchFamily="34" charset="0"/>
-                <a:ea typeface="Arial" pitchFamily="34" charset="-122"/>
-                <a:cs typeface="Arial" pitchFamily="34" charset="-120"/>
-              </a:rPr>
-              <a:t> (mountain) — standing · feet, legs, core; cultivates posture awareness – 2. </a:t>
-            </a:r>
-            <a:pPr algn="l" indent="0" marL="0">
-              <a:lnSpc>
-                <a:spcPts val="1680"/>
-              </a:lnSpc>
-              <a:spcBef>
-                <a:spcPts val="300"/>
-              </a:spcBef>
-              <a:spcAft>
-                <a:spcPts val="300"/>
-              </a:spcAft>
-              <a:buNone/>
-            </a:pPr>
-            <a:r>
-              <a:rPr lang="en-US" sz="1200" i="1" dirty="0">
-                <a:solidFill>
-                  <a:srgbClr val="1C2833"/>
-                </a:solidFill>
-                <a:latin typeface="Arial" pitchFamily="34" charset="0"/>
-                <a:ea typeface="Arial" pitchFamily="34" charset="-122"/>
-                <a:cs typeface="Arial" pitchFamily="34" charset="-120"/>
-              </a:rPr>
-              <a:t>vṛkṣāsana</a:t>
-            </a:r>
-            <a:pPr algn="l" indent="0" marL="0">
-              <a:lnSpc>
-                <a:spcPts val="1680"/>
-              </a:lnSpc>
-              <a:spcBef>
-                <a:spcPts val="300"/>
-              </a:spcBef>
-              <a:spcAft>
-                <a:spcPts val="300"/>
-              </a:spcAft>
-              <a:buNone/>
-            </a:pPr>
-            <a:r>
-              <a:rPr lang="en-US" sz="1200" dirty="0">
-                <a:solidFill>
-                  <a:srgbClr val="1C2833"/>
-                </a:solidFill>
-                <a:latin typeface="Arial" pitchFamily="34" charset="0"/>
-                <a:ea typeface="Arial" pitchFamily="34" charset="-122"/>
-                <a:cs typeface="Arial" pitchFamily="34" charset="-120"/>
-              </a:rPr>
-              <a:t> (tree) — standing balance · feet, calves, core, focus – 3. </a:t>
-            </a:r>
-            <a:pPr algn="l" indent="0" marL="0">
-              <a:lnSpc>
-                <a:spcPts val="1680"/>
-              </a:lnSpc>
-              <a:spcBef>
-                <a:spcPts val="300"/>
-              </a:spcBef>
-              <a:spcAft>
-                <a:spcPts val="300"/>
-              </a:spcAft>
-              <a:buNone/>
-            </a:pPr>
-            <a:r>
-              <a:rPr lang="en-US" sz="1200" i="1" dirty="0">
-                <a:solidFill>
-                  <a:srgbClr val="1C2833"/>
-                </a:solidFill>
-                <a:latin typeface="Arial" pitchFamily="34" charset="0"/>
-                <a:ea typeface="Arial" pitchFamily="34" charset="-122"/>
-                <a:cs typeface="Arial" pitchFamily="34" charset="-120"/>
-              </a:rPr>
-              <a:t>baddha-koṇāsana</a:t>
-            </a:r>
-            <a:pPr algn="l" indent="0" marL="0">
-              <a:lnSpc>
-                <a:spcPts val="1680"/>
-              </a:lnSpc>
-              <a:spcBef>
-                <a:spcPts val="300"/>
-              </a:spcBef>
-              <a:spcAft>
-                <a:spcPts val="300"/>
-              </a:spcAft>
-              <a:buNone/>
-            </a:pPr>
-            <a:r>
-              <a:rPr lang="en-US" sz="1200" dirty="0">
-                <a:solidFill>
-                  <a:srgbClr val="1C2833"/>
-                </a:solidFill>
-                <a:latin typeface="Arial" pitchFamily="34" charset="0"/>
-                <a:ea typeface="Arial" pitchFamily="34" charset="-122"/>
-                <a:cs typeface="Arial" pitchFamily="34" charset="-120"/>
-              </a:rPr>
-              <a:t> (bound-angle) — seated stretch · inner thighs, groin, hips – 4. </a:t>
-            </a:r>
-            <a:pPr algn="l" indent="0" marL="0">
-              <a:lnSpc>
-                <a:spcPts val="1680"/>
-              </a:lnSpc>
-              <a:spcBef>
-                <a:spcPts val="300"/>
-              </a:spcBef>
-              <a:spcAft>
-                <a:spcPts val="300"/>
-              </a:spcAft>
-              <a:buNone/>
-            </a:pPr>
-            <a:r>
-              <a:rPr lang="en-US" sz="1200" i="1" dirty="0">
-                <a:solidFill>
-                  <a:srgbClr val="1C2833"/>
-                </a:solidFill>
-                <a:latin typeface="Arial" pitchFamily="34" charset="0"/>
-                <a:ea typeface="Arial" pitchFamily="34" charset="-122"/>
-                <a:cs typeface="Arial" pitchFamily="34" charset="-120"/>
-              </a:rPr>
-              <a:t>balāsana</a:t>
-            </a:r>
-            <a:pPr algn="l" indent="0" marL="0">
-              <a:lnSpc>
-                <a:spcPts val="1680"/>
-              </a:lnSpc>
-              <a:spcBef>
-                <a:spcPts val="300"/>
-              </a:spcBef>
-              <a:spcAft>
-                <a:spcPts val="300"/>
-              </a:spcAft>
-              <a:buNone/>
-            </a:pPr>
-            <a:r>
-              <a:rPr lang="en-US" sz="1200" dirty="0">
-                <a:solidFill>
-                  <a:srgbClr val="1C2833"/>
-                </a:solidFill>
-                <a:latin typeface="Arial" pitchFamily="34" charset="0"/>
-                <a:ea typeface="Arial" pitchFamily="34" charset="-122"/>
-                <a:cs typeface="Arial" pitchFamily="34" charset="-120"/>
-              </a:rPr>
-              <a:t> (child) — seated rest · back, hips; calming – 5. </a:t>
-            </a:r>
-            <a:pPr algn="l" indent="0" marL="0">
-              <a:lnSpc>
-                <a:spcPts val="1680"/>
-              </a:lnSpc>
-              <a:spcBef>
-                <a:spcPts val="300"/>
-              </a:spcBef>
-              <a:spcAft>
-                <a:spcPts val="300"/>
-              </a:spcAft>
-              <a:buNone/>
-            </a:pPr>
-            <a:r>
-              <a:rPr lang="en-US" sz="1200" i="1" dirty="0">
-                <a:solidFill>
-                  <a:srgbClr val="1C2833"/>
-                </a:solidFill>
-                <a:latin typeface="Arial" pitchFamily="34" charset="0"/>
-                <a:ea typeface="Arial" pitchFamily="34" charset="-122"/>
-                <a:cs typeface="Arial" pitchFamily="34" charset="-120"/>
-              </a:rPr>
-              <a:t>sukhāsana</a:t>
-            </a:r>
-            <a:pPr algn="l" indent="0" marL="0">
-              <a:lnSpc>
-                <a:spcPts val="1680"/>
-              </a:lnSpc>
-              <a:spcBef>
-                <a:spcPts val="300"/>
-              </a:spcBef>
-              <a:spcAft>
-                <a:spcPts val="300"/>
-              </a:spcAft>
-              <a:buNone/>
-            </a:pPr>
-            <a:r>
-              <a:rPr lang="en-US" sz="1200" dirty="0">
-                <a:solidFill>
-                  <a:srgbClr val="1C2833"/>
-                </a:solidFill>
-                <a:latin typeface="Arial" pitchFamily="34" charset="0"/>
-                <a:ea typeface="Arial" pitchFamily="34" charset="-122"/>
-                <a:cs typeface="Arial" pitchFamily="34" charset="-120"/>
-              </a:rPr>
-              <a:t> (easy seat) — seated · spine, hips; foundation for breath practice</a:t>
-            </a:r>
-            <a:endParaRPr lang="en-US" sz="1200" dirty="0"/>
-          </a:p>
-        </p:txBody>
-      </p:sp>
-      <p:sp>
-        <p:nvSpPr>
-          <p:cNvPr id="7" name="Text 5"/>
-          <p:cNvSpPr/>
-          <p:nvPr/>
-        </p:nvSpPr>
-        <p:spPr>
-          <a:xfrm>
-            <a:off x="406301" y="2379166"/>
-            <a:ext cx="8498026" cy="213271"/>
-          </a:xfrm>
-          <a:prstGeom prst="rect">
-            <a:avLst/>
-          </a:prstGeom>
-          <a:noFill/>
-          <a:ln/>
-        </p:spPr>
-        <p:txBody>
-          <a:bodyPr wrap="square" lIns="0" tIns="0" rIns="0" bIns="0" rtlCol="0" anchor="t"/>
-          <a:lstStyle/>
-          <a:p>
-            <a:pPr algn="l" indent="0" marL="0">
-              <a:lnSpc>
-                <a:spcPts val="1680"/>
-              </a:lnSpc>
-              <a:spcBef>
-                <a:spcPts val="300"/>
-              </a:spcBef>
-              <a:spcAft>
-                <a:spcPts val="300"/>
-              </a:spcAft>
-              <a:buNone/>
-            </a:pPr>
-            <a:r>
-              <a:rPr lang="en-US" sz="1200" i="1" dirty="0">
-                <a:solidFill>
-                  <a:srgbClr val="1C2833"/>
-                </a:solidFill>
-                <a:latin typeface="Arial" pitchFamily="34" charset="0"/>
-                <a:ea typeface="Arial" pitchFamily="34" charset="-122"/>
-                <a:cs typeface="Arial" pitchFamily="34" charset="-120"/>
-              </a:rPr>
-              <a:t>Note: none of these are inversions or advanced backbends. All five can be practised safely at home.</a:t>
-            </a:r>
-            <a:endParaRPr lang="en-US" sz="1200" dirty="0"/>
-          </a:p>
-        </p:txBody>
-      </p:sp>
-      <p:sp>
-        <p:nvSpPr>
-          <p:cNvPr id="8" name="Text 6"/>
           <p:cNvSpPr/>
           <p:nvPr/>
         </p:nvSpPr>
@@ -5537,7 +7922,7 @@
                 <a:ea typeface="Georgia" pitchFamily="34" charset="-122"/>
                 <a:cs typeface="Georgia" pitchFamily="34" charset="-120"/>
               </a:rPr>
-              <a:t>Practice (25 min) — Walk through all five</a:t>
+              <a:t>Core (8 min) — The five āsanas, named</a:t>
             </a:r>
             <a:endParaRPr lang="en-US" sz="1800" dirty="0"/>
           </a:p>
@@ -5585,7 +7970,7 @@
                 <a:ea typeface="Arial" pitchFamily="34" charset="-122"/>
                 <a:cs typeface="Arial" pitchFamily="34" charset="-120"/>
               </a:rPr>
-              <a:t>For each pose: 1 min demonstration with verbal cues, 1 min student practice with teacher observation, 1 min hold + breath.</a:t>
+              <a:t>Write on the board:</a:t>
             </a:r>
             <a:endParaRPr lang="en-US" sz="1200" dirty="0"/>
           </a:p>
@@ -5599,8 +7984,8 @@
         </p:nvSpPr>
         <p:spPr>
           <a:xfrm>
-            <a:off x="634901" y="1173063"/>
-            <a:ext cx="8102798" cy="281880"/>
+            <a:off x="406301" y="1160413"/>
+            <a:ext cx="8498026" cy="213271"/>
           </a:xfrm>
           <a:prstGeom prst="rect">
             <a:avLst/>
@@ -5612,46 +7997,28 @@
           <a:bodyPr wrap="square" lIns="0" tIns="0" rIns="0" bIns="0" rtlCol="0" anchor="t"/>
           <a:lstStyle/>
           <a:p>
-            <a:pPr algn="l" marL="342900" indent="-342900">
-              <a:lnSpc>
-                <a:spcPts val="1620"/>
-              </a:lnSpc>
-              <a:spcAft>
-                <a:spcPts val="300"/>
-              </a:spcAft>
-              <a:buSzPct val="100000"/>
-              <a:buChar char="•"/>
-            </a:pPr>
-            <a:r>
-              <a:rPr lang="en-US" sz="1200" b="1" dirty="0">
-                <a:solidFill>
-                  <a:srgbClr val="1C2833"/>
-                </a:solidFill>
-                <a:latin typeface="Arial" pitchFamily="34" charset="0"/>
-                <a:ea typeface="Arial" pitchFamily="34" charset="-122"/>
-                <a:cs typeface="Arial" pitchFamily="34" charset="-120"/>
-              </a:rPr>
-              <a:t>Tāḍāsana</a:t>
-            </a:r>
-            <a:pPr algn="l" indent="0" marL="0">
-              <a:lnSpc>
-                <a:spcPts val="1620"/>
-              </a:lnSpc>
-              <a:spcAft>
-                <a:spcPts val="300"/>
-              </a:spcAft>
-              <a:buNone/>
-            </a:pPr>
-            <a:r>
-              <a:rPr lang="en-US" sz="1200" dirty="0">
-                <a:solidFill>
-                  <a:srgbClr val="1C2833"/>
-                </a:solidFill>
-                <a:latin typeface="Arial" pitchFamily="34" charset="0"/>
-                <a:ea typeface="Arial" pitchFamily="34" charset="-122"/>
-                <a:cs typeface="Arial" pitchFamily="34" charset="-120"/>
-              </a:rPr>
-              <a:t> — 30 sec.</a:t>
+            <a:pPr algn="l" indent="0" marL="0">
+              <a:lnSpc>
+                <a:spcPts val="1680"/>
+              </a:lnSpc>
+              <a:spcBef>
+                <a:spcPts val="300"/>
+              </a:spcBef>
+              <a:spcAft>
+                <a:spcPts val="300"/>
+              </a:spcAft>
+              <a:buNone/>
+            </a:pPr>
+            <a:r>
+              <a:rPr lang="en-US" sz="1200" i="1" dirty="0">
+                <a:solidFill>
+                  <a:srgbClr val="1C2833"/>
+                </a:solidFill>
+                <a:latin typeface="Arial" pitchFamily="34" charset="0"/>
+                <a:ea typeface="Arial" pitchFamily="34" charset="-122"/>
+                <a:cs typeface="Arial" pitchFamily="34" charset="-120"/>
+              </a:rPr>
+              <a:t>Each row: Āsana · Type · Strengthens / stretches.</a:t>
             </a:r>
             <a:endParaRPr lang="en-US" sz="1200" dirty="0"/>
           </a:p>
@@ -5665,511 +8032,7 @@
         </p:nvSpPr>
         <p:spPr>
           <a:xfrm>
-            <a:off x="406301" y="1543794"/>
-            <a:ext cx="8498026" cy="213271"/>
-          </a:xfrm>
-          <a:prstGeom prst="rect">
-            <a:avLst/>
-          </a:prstGeom>
-          <a:noFill/>
-          <a:ln/>
-        </p:spPr>
-        <p:txBody>
-          <a:bodyPr wrap="square" lIns="0" tIns="0" rIns="0" bIns="0" rtlCol="0" anchor="t"/>
-          <a:lstStyle/>
-          <a:p>
-            <a:pPr algn="l" indent="0" marL="0">
-              <a:lnSpc>
-                <a:spcPts val="1680"/>
-              </a:lnSpc>
-              <a:spcBef>
-                <a:spcPts val="300"/>
-              </a:spcBef>
-              <a:spcAft>
-                <a:spcPts val="300"/>
-              </a:spcAft>
-              <a:buNone/>
-            </a:pPr>
-            <a:r>
-              <a:rPr lang="en-US" sz="1200" dirty="0">
-                <a:solidFill>
-                  <a:srgbClr val="1C2833"/>
-                </a:solidFill>
-                <a:latin typeface="Arial" pitchFamily="34" charset="0"/>
-                <a:ea typeface="Arial" pitchFamily="34" charset="-122"/>
-                <a:cs typeface="Arial" pitchFamily="34" charset="-120"/>
-              </a:rPr>
-              <a:t>– Feet hip-width. Press into all four corners of each foot.    – Lengthen up. Soft knees. Breathe.</a:t>
-            </a:r>
-            <a:endParaRPr lang="en-US" sz="1200" dirty="0"/>
-          </a:p>
-        </p:txBody>
-      </p:sp>
-      <p:sp>
-        <p:nvSpPr>
-          <p:cNvPr id="7" name="Text 5"/>
-          <p:cNvSpPr/>
-          <p:nvPr/>
-        </p:nvSpPr>
-        <p:spPr>
-          <a:xfrm>
-            <a:off x="634901" y="1845915"/>
-            <a:ext cx="8102798" cy="281880"/>
-          </a:xfrm>
-          <a:prstGeom prst="rect">
-            <a:avLst/>
-          </a:prstGeom>
-          <a:noFill/>
-          <a:ln/>
-        </p:spPr>
-        <p:txBody>
-          <a:bodyPr wrap="square" lIns="0" tIns="0" rIns="0" bIns="0" rtlCol="0" anchor="t"/>
-          <a:lstStyle/>
-          <a:p>
-            <a:pPr algn="l" marL="342900" indent="-342900">
-              <a:lnSpc>
-                <a:spcPts val="1620"/>
-              </a:lnSpc>
-              <a:spcAft>
-                <a:spcPts val="300"/>
-              </a:spcAft>
-              <a:buSzPct val="100000"/>
-              <a:buChar char="•"/>
-            </a:pPr>
-            <a:r>
-              <a:rPr lang="en-US" sz="1200" b="1" dirty="0">
-                <a:solidFill>
-                  <a:srgbClr val="1C2833"/>
-                </a:solidFill>
-                <a:latin typeface="Arial" pitchFamily="34" charset="0"/>
-                <a:ea typeface="Arial" pitchFamily="34" charset="-122"/>
-                <a:cs typeface="Arial" pitchFamily="34" charset="-120"/>
-              </a:rPr>
-              <a:t>Vṛkṣāsana</a:t>
-            </a:r>
-            <a:pPr algn="l" indent="0" marL="0">
-              <a:lnSpc>
-                <a:spcPts val="1620"/>
-              </a:lnSpc>
-              <a:spcAft>
-                <a:spcPts val="300"/>
-              </a:spcAft>
-              <a:buNone/>
-            </a:pPr>
-            <a:r>
-              <a:rPr lang="en-US" sz="1200" dirty="0">
-                <a:solidFill>
-                  <a:srgbClr val="1C2833"/>
-                </a:solidFill>
-                <a:latin typeface="Arial" pitchFamily="34" charset="0"/>
-                <a:ea typeface="Arial" pitchFamily="34" charset="-122"/>
-                <a:cs typeface="Arial" pitchFamily="34" charset="-120"/>
-              </a:rPr>
-              <a:t> — 20 sec per side.</a:t>
-            </a:r>
-            <a:endParaRPr lang="en-US" sz="1200" dirty="0"/>
-          </a:p>
-        </p:txBody>
-      </p:sp>
-      <p:sp>
-        <p:nvSpPr>
-          <p:cNvPr id="8" name="Text 6"/>
-          <p:cNvSpPr/>
-          <p:nvPr/>
-        </p:nvSpPr>
-        <p:spPr>
-          <a:xfrm>
-            <a:off x="406301" y="2216646"/>
-            <a:ext cx="8498026" cy="213271"/>
-          </a:xfrm>
-          <a:prstGeom prst="rect">
-            <a:avLst/>
-          </a:prstGeom>
-          <a:noFill/>
-          <a:ln/>
-        </p:spPr>
-        <p:txBody>
-          <a:bodyPr wrap="square" lIns="0" tIns="0" rIns="0" bIns="0" rtlCol="0" anchor="t"/>
-          <a:lstStyle/>
-          <a:p>
-            <a:pPr algn="l" indent="0" marL="0">
-              <a:lnSpc>
-                <a:spcPts val="1680"/>
-              </a:lnSpc>
-              <a:spcBef>
-                <a:spcPts val="300"/>
-              </a:spcBef>
-              <a:spcAft>
-                <a:spcPts val="300"/>
-              </a:spcAft>
-              <a:buNone/>
-            </a:pPr>
-            <a:r>
-              <a:rPr lang="en-US" sz="1200" dirty="0">
-                <a:solidFill>
-                  <a:srgbClr val="1C2833"/>
-                </a:solidFill>
-                <a:latin typeface="Arial" pitchFamily="34" charset="0"/>
-                <a:ea typeface="Arial" pitchFamily="34" charset="-122"/>
-                <a:cs typeface="Arial" pitchFamily="34" charset="-120"/>
-              </a:rPr>
-              <a:t>– From tāḍāsana, shift weight, foot on calf (NOT knee).    – Hands at heart or overhead.    – Wobble allowed. Switch sides.</a:t>
-            </a:r>
-            <a:endParaRPr lang="en-US" sz="1200" dirty="0"/>
-          </a:p>
-        </p:txBody>
-      </p:sp>
-      <p:sp>
-        <p:nvSpPr>
-          <p:cNvPr id="9" name="Text 7"/>
-          <p:cNvSpPr/>
-          <p:nvPr/>
-        </p:nvSpPr>
-        <p:spPr>
-          <a:xfrm>
-            <a:off x="634901" y="2518767"/>
-            <a:ext cx="8102798" cy="281880"/>
-          </a:xfrm>
-          <a:prstGeom prst="rect">
-            <a:avLst/>
-          </a:prstGeom>
-          <a:noFill/>
-          <a:ln/>
-        </p:spPr>
-        <p:txBody>
-          <a:bodyPr wrap="square" lIns="0" tIns="0" rIns="0" bIns="0" rtlCol="0" anchor="t"/>
-          <a:lstStyle/>
-          <a:p>
-            <a:pPr algn="l" marL="342900" indent="-342900">
-              <a:lnSpc>
-                <a:spcPts val="1620"/>
-              </a:lnSpc>
-              <a:spcAft>
-                <a:spcPts val="300"/>
-              </a:spcAft>
-              <a:buSzPct val="100000"/>
-              <a:buChar char="•"/>
-            </a:pPr>
-            <a:r>
-              <a:rPr lang="en-US" sz="1200" b="1" dirty="0">
-                <a:solidFill>
-                  <a:srgbClr val="1C2833"/>
-                </a:solidFill>
-                <a:latin typeface="Arial" pitchFamily="34" charset="0"/>
-                <a:ea typeface="Arial" pitchFamily="34" charset="-122"/>
-                <a:cs typeface="Arial" pitchFamily="34" charset="-120"/>
-              </a:rPr>
-              <a:t>Baddha-koṇāsana</a:t>
-            </a:r>
-            <a:pPr algn="l" indent="0" marL="0">
-              <a:lnSpc>
-                <a:spcPts val="1620"/>
-              </a:lnSpc>
-              <a:spcAft>
-                <a:spcPts val="300"/>
-              </a:spcAft>
-              <a:buNone/>
-            </a:pPr>
-            <a:r>
-              <a:rPr lang="en-US" sz="1200" dirty="0">
-                <a:solidFill>
-                  <a:srgbClr val="1C2833"/>
-                </a:solidFill>
-                <a:latin typeface="Arial" pitchFamily="34" charset="0"/>
-                <a:ea typeface="Arial" pitchFamily="34" charset="-122"/>
-                <a:cs typeface="Arial" pitchFamily="34" charset="-120"/>
-              </a:rPr>
-              <a:t> — 60 sec.</a:t>
-            </a:r>
-            <a:endParaRPr lang="en-US" sz="1200" dirty="0"/>
-          </a:p>
-        </p:txBody>
-      </p:sp>
-      <p:sp>
-        <p:nvSpPr>
-          <p:cNvPr id="10" name="Text 8"/>
-          <p:cNvSpPr/>
-          <p:nvPr/>
-        </p:nvSpPr>
-        <p:spPr>
-          <a:xfrm>
-            <a:off x="406301" y="2889498"/>
-            <a:ext cx="8498026" cy="426541"/>
-          </a:xfrm>
-          <a:prstGeom prst="rect">
-            <a:avLst/>
-          </a:prstGeom>
-          <a:noFill/>
-          <a:ln/>
-        </p:spPr>
-        <p:txBody>
-          <a:bodyPr wrap="square" lIns="0" tIns="0" rIns="0" bIns="0" rtlCol="0" anchor="t"/>
-          <a:lstStyle/>
-          <a:p>
-            <a:pPr algn="l" indent="0" marL="0">
-              <a:lnSpc>
-                <a:spcPts val="1680"/>
-              </a:lnSpc>
-              <a:spcBef>
-                <a:spcPts val="300"/>
-              </a:spcBef>
-              <a:spcAft>
-                <a:spcPts val="300"/>
-              </a:spcAft>
-              <a:buNone/>
-            </a:pPr>
-            <a:r>
-              <a:rPr lang="en-US" sz="1200" dirty="0">
-                <a:solidFill>
-                  <a:srgbClr val="1C2833"/>
-                </a:solidFill>
-                <a:latin typeface="Arial" pitchFamily="34" charset="0"/>
-                <a:ea typeface="Arial" pitchFamily="34" charset="-122"/>
-                <a:cs typeface="Arial" pitchFamily="34" charset="-120"/>
-              </a:rPr>
-              <a:t>– Sit. Bend knees, soles of feet together, drop knees out to the sides.    – Hold the feet. Long spine. Don't force the knees down.    – Gentle nodding of the knees is acceptable.</a:t>
-            </a:r>
-            <a:endParaRPr lang="en-US" sz="1200" dirty="0"/>
-          </a:p>
-        </p:txBody>
-      </p:sp>
-      <p:sp>
-        <p:nvSpPr>
-          <p:cNvPr id="11" name="Text 9"/>
-          <p:cNvSpPr/>
-          <p:nvPr/>
-        </p:nvSpPr>
-        <p:spPr>
-          <a:xfrm>
-            <a:off x="634901" y="3404890"/>
-            <a:ext cx="8102798" cy="281880"/>
-          </a:xfrm>
-          <a:prstGeom prst="rect">
-            <a:avLst/>
-          </a:prstGeom>
-          <a:noFill/>
-          <a:ln/>
-        </p:spPr>
-        <p:txBody>
-          <a:bodyPr wrap="square" lIns="0" tIns="0" rIns="0" bIns="0" rtlCol="0" anchor="t"/>
-          <a:lstStyle/>
-          <a:p>
-            <a:pPr algn="l" marL="342900" indent="-342900">
-              <a:lnSpc>
-                <a:spcPts val="1620"/>
-              </a:lnSpc>
-              <a:spcAft>
-                <a:spcPts val="300"/>
-              </a:spcAft>
-              <a:buSzPct val="100000"/>
-              <a:buChar char="•"/>
-            </a:pPr>
-            <a:r>
-              <a:rPr lang="en-US" sz="1200" b="1" dirty="0">
-                <a:solidFill>
-                  <a:srgbClr val="1C2833"/>
-                </a:solidFill>
-                <a:latin typeface="Arial" pitchFamily="34" charset="0"/>
-                <a:ea typeface="Arial" pitchFamily="34" charset="-122"/>
-                <a:cs typeface="Arial" pitchFamily="34" charset="-120"/>
-              </a:rPr>
-              <a:t>Balāsana</a:t>
-            </a:r>
-            <a:pPr algn="l" indent="0" marL="0">
-              <a:lnSpc>
-                <a:spcPts val="1620"/>
-              </a:lnSpc>
-              <a:spcAft>
-                <a:spcPts val="300"/>
-              </a:spcAft>
-              <a:buNone/>
-            </a:pPr>
-            <a:r>
-              <a:rPr lang="en-US" sz="1200" dirty="0">
-                <a:solidFill>
-                  <a:srgbClr val="1C2833"/>
-                </a:solidFill>
-                <a:latin typeface="Arial" pitchFamily="34" charset="0"/>
-                <a:ea typeface="Arial" pitchFamily="34" charset="-122"/>
-                <a:cs typeface="Arial" pitchFamily="34" charset="-120"/>
-              </a:rPr>
-              <a:t> — 90 sec rest pose.</a:t>
-            </a:r>
-            <a:endParaRPr lang="en-US" sz="1200" dirty="0"/>
-          </a:p>
-        </p:txBody>
-      </p:sp>
-      <p:sp>
-        <p:nvSpPr>
-          <p:cNvPr id="12" name="Text 10"/>
-          <p:cNvSpPr/>
-          <p:nvPr/>
-        </p:nvSpPr>
-        <p:spPr>
-          <a:xfrm>
-            <a:off x="406301" y="3775621"/>
-            <a:ext cx="8498026" cy="426541"/>
-          </a:xfrm>
-          <a:prstGeom prst="rect">
-            <a:avLst/>
-          </a:prstGeom>
-          <a:noFill/>
-          <a:ln/>
-        </p:spPr>
-        <p:txBody>
-          <a:bodyPr wrap="square" lIns="0" tIns="0" rIns="0" bIns="0" rtlCol="0" anchor="t"/>
-          <a:lstStyle/>
-          <a:p>
-            <a:pPr algn="l" indent="0" marL="0">
-              <a:lnSpc>
-                <a:spcPts val="1680"/>
-              </a:lnSpc>
-              <a:spcBef>
-                <a:spcPts val="300"/>
-              </a:spcBef>
-              <a:spcAft>
-                <a:spcPts val="300"/>
-              </a:spcAft>
-              <a:buNone/>
-            </a:pPr>
-            <a:r>
-              <a:rPr lang="en-US" sz="1200" dirty="0">
-                <a:solidFill>
-                  <a:srgbClr val="1C2833"/>
-                </a:solidFill>
-                <a:latin typeface="Arial" pitchFamily="34" charset="0"/>
-                <a:ea typeface="Arial" pitchFamily="34" charset="-122"/>
-                <a:cs typeface="Arial" pitchFamily="34" charset="-120"/>
-              </a:rPr>
-              <a:t>– From kneeling: knees apart, big toes touch.    – Fold forward, forehead on the mat (or stacked fists if forehead doesn't reach).    – Arms forward or alongside the body.    – Breathe slowly. This is rest, not effort.</a:t>
-            </a:r>
-            <a:endParaRPr lang="en-US" sz="1200" dirty="0"/>
-          </a:p>
-        </p:txBody>
-      </p:sp>
-      <p:sp>
-        <p:nvSpPr>
-          <p:cNvPr id="13" name="Text 11"/>
-          <p:cNvSpPr/>
-          <p:nvPr/>
-        </p:nvSpPr>
-        <p:spPr>
-          <a:xfrm>
-            <a:off x="634901" y="4291013"/>
-            <a:ext cx="8102798" cy="281880"/>
-          </a:xfrm>
-          <a:prstGeom prst="rect">
-            <a:avLst/>
-          </a:prstGeom>
-          <a:noFill/>
-          <a:ln/>
-        </p:spPr>
-        <p:txBody>
-          <a:bodyPr wrap="square" lIns="0" tIns="0" rIns="0" bIns="0" rtlCol="0" anchor="t"/>
-          <a:lstStyle/>
-          <a:p>
-            <a:pPr algn="l" marL="342900" indent="-342900">
-              <a:lnSpc>
-                <a:spcPts val="1620"/>
-              </a:lnSpc>
-              <a:spcAft>
-                <a:spcPts val="300"/>
-              </a:spcAft>
-              <a:buSzPct val="100000"/>
-              <a:buChar char="•"/>
-            </a:pPr>
-            <a:r>
-              <a:rPr lang="en-US" sz="1200" b="1" dirty="0">
-                <a:solidFill>
-                  <a:srgbClr val="1C2833"/>
-                </a:solidFill>
-                <a:latin typeface="Arial" pitchFamily="34" charset="0"/>
-                <a:ea typeface="Arial" pitchFamily="34" charset="-122"/>
-                <a:cs typeface="Arial" pitchFamily="34" charset="-120"/>
-              </a:rPr>
-              <a:t>Sukhāsana</a:t>
-            </a:r>
-            <a:pPr algn="l" indent="0" marL="0">
-              <a:lnSpc>
-                <a:spcPts val="1620"/>
-              </a:lnSpc>
-              <a:spcAft>
-                <a:spcPts val="300"/>
-              </a:spcAft>
-              <a:buNone/>
-            </a:pPr>
-            <a:r>
-              <a:rPr lang="en-US" sz="1200" dirty="0">
-                <a:solidFill>
-                  <a:srgbClr val="1C2833"/>
-                </a:solidFill>
-                <a:latin typeface="Arial" pitchFamily="34" charset="0"/>
-                <a:ea typeface="Arial" pitchFamily="34" charset="-122"/>
-                <a:cs typeface="Arial" pitchFamily="34" charset="-120"/>
-              </a:rPr>
-              <a:t> — 60 sec.</a:t>
-            </a:r>
-            <a:endParaRPr lang="en-US" sz="1200" dirty="0"/>
-          </a:p>
-        </p:txBody>
-      </p:sp>
-      <p:sp>
-        <p:nvSpPr>
-          <p:cNvPr id="14" name="Text 12"/>
-          <p:cNvSpPr/>
-          <p:nvPr/>
-        </p:nvSpPr>
-        <p:spPr>
-          <a:xfrm>
-            <a:off x="406301" y="4661743"/>
-            <a:ext cx="8498026" cy="213271"/>
-          </a:xfrm>
-          <a:prstGeom prst="rect">
-            <a:avLst/>
-          </a:prstGeom>
-          <a:noFill/>
-          <a:ln/>
-        </p:spPr>
-        <p:txBody>
-          <a:bodyPr wrap="square" lIns="0" tIns="0" rIns="0" bIns="0" rtlCol="0" anchor="t"/>
-          <a:lstStyle/>
-          <a:p>
-            <a:pPr algn="l" indent="0" marL="0">
-              <a:lnSpc>
-                <a:spcPts val="1680"/>
-              </a:lnSpc>
-              <a:spcBef>
-                <a:spcPts val="300"/>
-              </a:spcBef>
-              <a:spcAft>
-                <a:spcPts val="300"/>
-              </a:spcAft>
-              <a:buNone/>
-            </a:pPr>
-            <a:r>
-              <a:rPr lang="en-US" sz="1200" dirty="0">
-                <a:solidFill>
-                  <a:srgbClr val="1C2833"/>
-                </a:solidFill>
-                <a:latin typeface="Arial" pitchFamily="34" charset="0"/>
-                <a:ea typeface="Arial" pitchFamily="34" charset="-122"/>
-                <a:cs typeface="Arial" pitchFamily="34" charset="-120"/>
-              </a:rPr>
-              <a:t>– Sit cross-legged. Long spine.    – Hands on the knees, palms up or down.    – Eyes closed. 10 natural breaths.</a:t>
-            </a:r>
-            <a:endParaRPr lang="en-US" sz="1200" dirty="0"/>
-          </a:p>
-        </p:txBody>
-      </p:sp>
-      <p:sp>
-        <p:nvSpPr>
-          <p:cNvPr id="15" name="Text 13"/>
-          <p:cNvSpPr/>
-          <p:nvPr/>
-        </p:nvSpPr>
-        <p:spPr>
-          <a:xfrm>
-            <a:off x="406301" y="5027414"/>
+            <a:off x="406301" y="4434929"/>
             <a:ext cx="8498026" cy="213271"/>
           </a:xfrm>
           <a:prstGeom prst="rect">
@@ -6313,7 +8176,7 @@
                 <a:ea typeface="Georgia" pitchFamily="34" charset="-122"/>
                 <a:cs typeface="Georgia" pitchFamily="34" charset="-120"/>
               </a:rPr>
-              <a:t>Formative quiz (8 min)</a:t>
+              <a:t>Core (8 min) — The five āsanas, named (cont.)</a:t>
             </a:r>
             <a:endParaRPr lang="en-US" sz="1800" dirty="0"/>
           </a:p>
@@ -6327,8 +8190,8 @@
         </p:nvSpPr>
         <p:spPr>
           <a:xfrm>
-            <a:off x="406301" y="870942"/>
-            <a:ext cx="8498026" cy="222796"/>
+            <a:off x="634901" y="883593"/>
+            <a:ext cx="8102798" cy="1257002"/>
           </a:xfrm>
           <a:prstGeom prst="rect">
             <a:avLst/>
@@ -6340,17 +8203,15 @@
           <a:bodyPr wrap="square" lIns="0" tIns="0" rIns="0" bIns="0" rtlCol="0" anchor="t"/>
           <a:lstStyle/>
           <a:p>
-            <a:pPr algn="l" indent="0" marL="0">
-              <a:lnSpc>
-                <a:spcPts val="1680"/>
-              </a:lnSpc>
-              <a:spcBef>
-                <a:spcPts val="300"/>
-              </a:spcBef>
-              <a:spcAft>
-                <a:spcPts val="300"/>
-              </a:spcAft>
-              <a:buNone/>
+            <a:pPr algn="l" marL="342900" indent="-342900">
+              <a:lnSpc>
+                <a:spcPts val="1620"/>
+              </a:lnSpc>
+              <a:spcAft>
+                <a:spcPts val="300"/>
+              </a:spcAft>
+              <a:buSzPct val="100000"/>
+              <a:buChar char="•"/>
             </a:pPr>
             <a:r>
               <a:rPr lang="en-US" sz="1200" dirty="0">
@@ -6361,15 +8222,32 @@
                 <a:ea typeface="Arial" pitchFamily="34" charset="-122"/>
                 <a:cs typeface="Arial" pitchFamily="34" charset="-120"/>
               </a:rPr>
-              <a:t>– See </a:t>
-            </a:r>
-            <a:pPr algn="l" indent="0" marL="0">
-              <a:lnSpc>
-                <a:spcPts val="1680"/>
-              </a:lnSpc>
-              <a:spcBef>
-                <a:spcPts val="300"/>
-              </a:spcBef>
+              <a:t>1. </a:t>
+            </a:r>
+            <a:pPr algn="l" indent="0" marL="0">
+              <a:lnSpc>
+                <a:spcPts val="1620"/>
+              </a:lnSpc>
+              <a:spcAft>
+                <a:spcPts val="300"/>
+              </a:spcAft>
+              <a:buNone/>
+            </a:pPr>
+            <a:r>
+              <a:rPr lang="en-US" sz="1200" i="1" dirty="0">
+                <a:solidFill>
+                  <a:srgbClr val="1C2833"/>
+                </a:solidFill>
+                <a:latin typeface="Arial" pitchFamily="34" charset="0"/>
+                <a:ea typeface="Arial" pitchFamily="34" charset="-122"/>
+                <a:cs typeface="Arial" pitchFamily="34" charset="-120"/>
+              </a:rPr>
+              <a:t>tāḍāsana</a:t>
+            </a:r>
+            <a:pPr algn="l" indent="0" marL="0">
+              <a:lnSpc>
+                <a:spcPts val="1620"/>
+              </a:lnSpc>
               <a:spcAft>
                 <a:spcPts val="300"/>
               </a:spcAft>
@@ -6384,19 +8262,20 @@
                 <a:ea typeface="Arial" pitchFamily="34" charset="-122"/>
                 <a:cs typeface="Arial" pitchFamily="34" charset="-120"/>
               </a:rPr>
-              <a:t>quizzes/formative.md</a:t>
-            </a:r>
-            <a:pPr algn="l" indent="0" marL="0">
-              <a:lnSpc>
-                <a:spcPts val="1680"/>
-              </a:lnSpc>
-              <a:spcBef>
-                <a:spcPts val="300"/>
-              </a:spcBef>
-              <a:spcAft>
-                <a:spcPts val="300"/>
-              </a:spcAft>
-              <a:buNone/>
+              <a:t> (mountain) — standing · feet, legs, core; cultivates posture awareness</a:t>
+            </a:r>
+            <a:endParaRPr lang="en-US" sz="1200" dirty="0"/>
+          </a:p>
+          <a:p>
+            <a:pPr algn="l" marL="342900" indent="-342900">
+              <a:lnSpc>
+                <a:spcPts val="1620"/>
+              </a:lnSpc>
+              <a:spcAft>
+                <a:spcPts val="300"/>
+              </a:spcAft>
+              <a:buSzPct val="100000"/>
+              <a:buChar char="•"/>
             </a:pPr>
             <a:r>
               <a:rPr lang="en-US" sz="1200" dirty="0">
@@ -6407,7 +8286,239 @@
                 <a:ea typeface="Arial" pitchFamily="34" charset="-122"/>
                 <a:cs typeface="Arial" pitchFamily="34" charset="-120"/>
               </a:rPr>
-              <a:t> Part A — limb-matching from Day 2 + āsana-naming from Day 3.</a:t>
+              <a:t>2. </a:t>
+            </a:r>
+            <a:pPr algn="l" indent="0" marL="0">
+              <a:lnSpc>
+                <a:spcPts val="1620"/>
+              </a:lnSpc>
+              <a:spcAft>
+                <a:spcPts val="300"/>
+              </a:spcAft>
+              <a:buNone/>
+            </a:pPr>
+            <a:r>
+              <a:rPr lang="en-US" sz="1200" i="1" dirty="0">
+                <a:solidFill>
+                  <a:srgbClr val="1C2833"/>
+                </a:solidFill>
+                <a:latin typeface="Arial" pitchFamily="34" charset="0"/>
+                <a:ea typeface="Arial" pitchFamily="34" charset="-122"/>
+                <a:cs typeface="Arial" pitchFamily="34" charset="-120"/>
+              </a:rPr>
+              <a:t>vṛkṣāsana</a:t>
+            </a:r>
+            <a:pPr algn="l" indent="0" marL="0">
+              <a:lnSpc>
+                <a:spcPts val="1620"/>
+              </a:lnSpc>
+              <a:spcAft>
+                <a:spcPts val="300"/>
+              </a:spcAft>
+              <a:buNone/>
+            </a:pPr>
+            <a:r>
+              <a:rPr lang="en-US" sz="1200" dirty="0">
+                <a:solidFill>
+                  <a:srgbClr val="1C2833"/>
+                </a:solidFill>
+                <a:latin typeface="Arial" pitchFamily="34" charset="0"/>
+                <a:ea typeface="Arial" pitchFamily="34" charset="-122"/>
+                <a:cs typeface="Arial" pitchFamily="34" charset="-120"/>
+              </a:rPr>
+              <a:t> (tree) — standing balance · feet, calves, core, focus</a:t>
+            </a:r>
+            <a:endParaRPr lang="en-US" sz="1200" dirty="0"/>
+          </a:p>
+          <a:p>
+            <a:pPr algn="l" marL="342900" indent="-342900">
+              <a:lnSpc>
+                <a:spcPts val="1620"/>
+              </a:lnSpc>
+              <a:spcAft>
+                <a:spcPts val="300"/>
+              </a:spcAft>
+              <a:buSzPct val="100000"/>
+              <a:buChar char="•"/>
+            </a:pPr>
+            <a:r>
+              <a:rPr lang="en-US" sz="1200" dirty="0">
+                <a:solidFill>
+                  <a:srgbClr val="1C2833"/>
+                </a:solidFill>
+                <a:latin typeface="Arial" pitchFamily="34" charset="0"/>
+                <a:ea typeface="Arial" pitchFamily="34" charset="-122"/>
+                <a:cs typeface="Arial" pitchFamily="34" charset="-120"/>
+              </a:rPr>
+              <a:t>3. </a:t>
+            </a:r>
+            <a:pPr algn="l" indent="0" marL="0">
+              <a:lnSpc>
+                <a:spcPts val="1620"/>
+              </a:lnSpc>
+              <a:spcAft>
+                <a:spcPts val="300"/>
+              </a:spcAft>
+              <a:buNone/>
+            </a:pPr>
+            <a:r>
+              <a:rPr lang="en-US" sz="1200" i="1" dirty="0">
+                <a:solidFill>
+                  <a:srgbClr val="1C2833"/>
+                </a:solidFill>
+                <a:latin typeface="Arial" pitchFamily="34" charset="0"/>
+                <a:ea typeface="Arial" pitchFamily="34" charset="-122"/>
+                <a:cs typeface="Arial" pitchFamily="34" charset="-120"/>
+              </a:rPr>
+              <a:t>baddha-koṇāsana</a:t>
+            </a:r>
+            <a:pPr algn="l" indent="0" marL="0">
+              <a:lnSpc>
+                <a:spcPts val="1620"/>
+              </a:lnSpc>
+              <a:spcAft>
+                <a:spcPts val="300"/>
+              </a:spcAft>
+              <a:buNone/>
+            </a:pPr>
+            <a:r>
+              <a:rPr lang="en-US" sz="1200" dirty="0">
+                <a:solidFill>
+                  <a:srgbClr val="1C2833"/>
+                </a:solidFill>
+                <a:latin typeface="Arial" pitchFamily="34" charset="0"/>
+                <a:ea typeface="Arial" pitchFamily="34" charset="-122"/>
+                <a:cs typeface="Arial" pitchFamily="34" charset="-120"/>
+              </a:rPr>
+              <a:t> (bound-angle) — seated stretch · inner thighs, groin, hips</a:t>
+            </a:r>
+            <a:endParaRPr lang="en-US" sz="1200" dirty="0"/>
+          </a:p>
+          <a:p>
+            <a:pPr algn="l" marL="342900" indent="-342900">
+              <a:lnSpc>
+                <a:spcPts val="1620"/>
+              </a:lnSpc>
+              <a:spcAft>
+                <a:spcPts val="300"/>
+              </a:spcAft>
+              <a:buSzPct val="100000"/>
+              <a:buChar char="•"/>
+            </a:pPr>
+            <a:r>
+              <a:rPr lang="en-US" sz="1200" dirty="0">
+                <a:solidFill>
+                  <a:srgbClr val="1C2833"/>
+                </a:solidFill>
+                <a:latin typeface="Arial" pitchFamily="34" charset="0"/>
+                <a:ea typeface="Arial" pitchFamily="34" charset="-122"/>
+                <a:cs typeface="Arial" pitchFamily="34" charset="-120"/>
+              </a:rPr>
+              <a:t>4. </a:t>
+            </a:r>
+            <a:pPr algn="l" indent="0" marL="0">
+              <a:lnSpc>
+                <a:spcPts val="1620"/>
+              </a:lnSpc>
+              <a:spcAft>
+                <a:spcPts val="300"/>
+              </a:spcAft>
+              <a:buNone/>
+            </a:pPr>
+            <a:r>
+              <a:rPr lang="en-US" sz="1200" i="1" dirty="0">
+                <a:solidFill>
+                  <a:srgbClr val="1C2833"/>
+                </a:solidFill>
+                <a:latin typeface="Arial" pitchFamily="34" charset="0"/>
+                <a:ea typeface="Arial" pitchFamily="34" charset="-122"/>
+                <a:cs typeface="Arial" pitchFamily="34" charset="-120"/>
+              </a:rPr>
+              <a:t>balāsana</a:t>
+            </a:r>
+            <a:pPr algn="l" indent="0" marL="0">
+              <a:lnSpc>
+                <a:spcPts val="1620"/>
+              </a:lnSpc>
+              <a:spcAft>
+                <a:spcPts val="300"/>
+              </a:spcAft>
+              <a:buNone/>
+            </a:pPr>
+            <a:r>
+              <a:rPr lang="en-US" sz="1200" dirty="0">
+                <a:solidFill>
+                  <a:srgbClr val="1C2833"/>
+                </a:solidFill>
+                <a:latin typeface="Arial" pitchFamily="34" charset="0"/>
+                <a:ea typeface="Arial" pitchFamily="34" charset="-122"/>
+                <a:cs typeface="Arial" pitchFamily="34" charset="-120"/>
+              </a:rPr>
+              <a:t> (child) — seated rest · back, hips; calming</a:t>
+            </a:r>
+            <a:endParaRPr lang="en-US" sz="1200" dirty="0"/>
+          </a:p>
+          <a:p>
+            <a:pPr algn="l" marL="342900" indent="-342900">
+              <a:lnSpc>
+                <a:spcPts val="1620"/>
+              </a:lnSpc>
+              <a:spcAft>
+                <a:spcPts val="300"/>
+              </a:spcAft>
+              <a:buSzPct val="100000"/>
+              <a:buChar char="•"/>
+            </a:pPr>
+            <a:r>
+              <a:rPr lang="en-US" sz="1200" dirty="0">
+                <a:solidFill>
+                  <a:srgbClr val="1C2833"/>
+                </a:solidFill>
+                <a:latin typeface="Arial" pitchFamily="34" charset="0"/>
+                <a:ea typeface="Arial" pitchFamily="34" charset="-122"/>
+                <a:cs typeface="Arial" pitchFamily="34" charset="-120"/>
+              </a:rPr>
+              <a:t>5. </a:t>
+            </a:r>
+            <a:pPr algn="l" indent="0" marL="0">
+              <a:lnSpc>
+                <a:spcPts val="1620"/>
+              </a:lnSpc>
+              <a:spcAft>
+                <a:spcPts val="300"/>
+              </a:spcAft>
+              <a:buNone/>
+            </a:pPr>
+            <a:r>
+              <a:rPr lang="en-US" sz="1200" i="1" dirty="0">
+                <a:solidFill>
+                  <a:srgbClr val="1C2833"/>
+                </a:solidFill>
+                <a:latin typeface="Arial" pitchFamily="34" charset="0"/>
+                <a:ea typeface="Arial" pitchFamily="34" charset="-122"/>
+                <a:cs typeface="Arial" pitchFamily="34" charset="-120"/>
+              </a:rPr>
+              <a:t>sukhāsana</a:t>
+            </a:r>
+            <a:pPr algn="l" indent="0" marL="0">
+              <a:lnSpc>
+                <a:spcPts val="1620"/>
+              </a:lnSpc>
+              <a:spcAft>
+                <a:spcPts val="300"/>
+              </a:spcAft>
+              <a:buNone/>
+            </a:pPr>
+            <a:r>
+              <a:rPr lang="en-US" sz="1200" dirty="0">
+                <a:solidFill>
+                  <a:srgbClr val="1C2833"/>
+                </a:solidFill>
+                <a:latin typeface="Arial" pitchFamily="34" charset="0"/>
+                <a:ea typeface="Arial" pitchFamily="34" charset="-122"/>
+                <a:cs typeface="Arial" pitchFamily="34" charset="-120"/>
+              </a:rPr>
+              <a:t> (easy seat) — seated · spine, hips; foundation for breath practice</a:t>
             </a:r>
             <a:endParaRPr lang="en-US" sz="1200" dirty="0"/>
           </a:p>
@@ -6565,7 +8676,7 @@
                 <a:ea typeface="Georgia" pitchFamily="34" charset="-122"/>
                 <a:cs typeface="Georgia" pitchFamily="34" charset="-120"/>
               </a:rPr>
-              <a:t>Wrap-up (2 min)</a:t>
+              <a:t>Core (8 min) — The five āsanas, named (cont.)</a:t>
             </a:r>
             <a:endParaRPr lang="en-US" sz="1800" dirty="0"/>
           </a:p>
@@ -6580,7 +8691,7 @@
         <p:spPr>
           <a:xfrm>
             <a:off x="406301" y="870942"/>
-            <a:ext cx="8498026" cy="426541"/>
+            <a:ext cx="8498026" cy="213271"/>
           </a:xfrm>
           <a:prstGeom prst="rect">
             <a:avLst/>
@@ -6605,29 +8716,6 @@
               <a:buNone/>
             </a:pPr>
             <a:r>
-              <a:rPr lang="en-US" sz="1200" dirty="0">
-                <a:solidFill>
-                  <a:srgbClr val="1C2833"/>
-                </a:solidFill>
-                <a:latin typeface="Arial" pitchFamily="34" charset="0"/>
-                <a:ea typeface="Arial" pitchFamily="34" charset="-122"/>
-                <a:cs typeface="Arial" pitchFamily="34" charset="-120"/>
-              </a:rPr>
-              <a:t>– Question: </a:t>
-            </a:r>
-            <a:pPr algn="l" indent="0" marL="0">
-              <a:lnSpc>
-                <a:spcPts val="1680"/>
-              </a:lnSpc>
-              <a:spcBef>
-                <a:spcPts val="300"/>
-              </a:spcBef>
-              <a:spcAft>
-                <a:spcPts val="300"/>
-              </a:spcAft>
-              <a:buNone/>
-            </a:pPr>
-            <a:r>
               <a:rPr lang="en-US" sz="1200" i="1" dirty="0">
                 <a:solidFill>
                   <a:srgbClr val="1C2833"/>
@@ -6636,53 +8724,7 @@
                 <a:ea typeface="Arial" pitchFamily="34" charset="-122"/>
                 <a:cs typeface="Arial" pitchFamily="34" charset="-120"/>
               </a:rPr>
-              <a:t>"Which of the five did your body LIKE the most? Which felt hardest?"</a:t>
-            </a:r>
-            <a:pPr algn="l" indent="0" marL="0">
-              <a:lnSpc>
-                <a:spcPts val="1680"/>
-              </a:lnSpc>
-              <a:spcBef>
-                <a:spcPts val="300"/>
-              </a:spcBef>
-              <a:spcAft>
-                <a:spcPts val="300"/>
-              </a:spcAft>
-              <a:buNone/>
-            </a:pPr>
-            <a:r>
-              <a:rPr lang="en-US" sz="1200" dirty="0">
-                <a:solidFill>
-                  <a:srgbClr val="1C2833"/>
-                </a:solidFill>
-                <a:latin typeface="Arial" pitchFamily="34" charset="0"/>
-                <a:ea typeface="Arial" pitchFamily="34" charset="-122"/>
-                <a:cs typeface="Arial" pitchFamily="34" charset="-120"/>
-              </a:rPr>
-              <a:t> — students share with a neighbour for 30 sec each. – Preview Day 4: </a:t>
-            </a:r>
-            <a:pPr algn="l" indent="0" marL="0">
-              <a:lnSpc>
-                <a:spcPts val="1680"/>
-              </a:lnSpc>
-              <a:spcBef>
-                <a:spcPts val="300"/>
-              </a:spcBef>
-              <a:spcAft>
-                <a:spcPts val="300"/>
-              </a:spcAft>
-              <a:buNone/>
-            </a:pPr>
-            <a:r>
-              <a:rPr lang="en-US" sz="1200" i="1" dirty="0">
-                <a:solidFill>
-                  <a:srgbClr val="1C2833"/>
-                </a:solidFill>
-                <a:latin typeface="Arial" pitchFamily="34" charset="0"/>
-                <a:ea typeface="Arial" pitchFamily="34" charset="-122"/>
-                <a:cs typeface="Arial" pitchFamily="34" charset="-120"/>
-              </a:rPr>
-              <a:t>"Tomorrow we begin Sūrya Namaskāra — the 12-pose sun salutation."</a:t>
+              <a:t>Note: none of these are inversions or advanced backbends. All five can be practised safely at home.</a:t>
             </a:r>
             <a:endParaRPr lang="en-US" sz="1200" dirty="0"/>
           </a:p>
